--- a/FOPS_Git.pptx
+++ b/FOPS_Git.pptx
@@ -7,6 +7,17 @@
   <p:sldIdLst>
     <p:sldId id="256" r:id="rId2"/>
     <p:sldId id="257" r:id="rId3"/>
+    <p:sldId id="258" r:id="rId4"/>
+    <p:sldId id="260" r:id="rId5"/>
+    <p:sldId id="261" r:id="rId6"/>
+    <p:sldId id="262" r:id="rId7"/>
+    <p:sldId id="263" r:id="rId8"/>
+    <p:sldId id="264" r:id="rId9"/>
+    <p:sldId id="265" r:id="rId10"/>
+    <p:sldId id="266" r:id="rId11"/>
+    <p:sldId id="267" r:id="rId12"/>
+    <p:sldId id="268" r:id="rId13"/>
+    <p:sldId id="259" r:id="rId14"/>
   </p:sldIdLst>
   <p:sldSz cx="12192000" cy="6858000"/>
   <p:notesSz cx="6858000" cy="9144000"/>
@@ -113,6 +124,19 @@
 </p:presentation>
 </file>
 
+<file path=ppt/revisionInfo.xml><?xml version="1.0" encoding="utf-8"?>
+<p1510:revInfo xmlns:a="http://schemas.openxmlformats.org/drawingml/2006/main" xmlns:r="http://schemas.openxmlformats.org/officeDocument/2006/relationships" xmlns:p1510="http://schemas.microsoft.com/office/powerpoint/2015/10/main">
+  <p1510:revLst>
+    <p1510:client id="{04F6685B-28AD-6A86-7DA6-D6D725FF40A4}" v="20" dt="2024-10-21T17:11:53.299"/>
+    <p1510:client id="{13D068F5-38B1-9FAB-857E-EF01EB6C97ED}" v="29" dt="2024-10-21T17:28:25.495"/>
+    <p1510:client id="{50052912-925E-830A-F533-F27F887840A6}" v="756" dt="2024-10-21T17:04:08.217"/>
+    <p1510:client id="{548DDE2A-AFBB-7014-6A00-FACAA2E58FC7}" v="87" dt="2024-10-21T17:17:09.928"/>
+    <p1510:client id="{6CF9AD3C-433C-1848-9998-91B31793A4B4}" v="139" dt="2024-10-21T16:24:12.823"/>
+    <p1510:client id="{89AFED0A-C672-3FD0-B4E8-FE1C8A8A6CBB}" v="11" dt="2024-10-21T17:08:45.737"/>
+  </p1510:revLst>
+</p1510:revInfo>
+</file>
+
 <file path=ppt/slideLayouts/slideLayout1.xml><?xml version="1.0" encoding="utf-8"?>
 <p:sldLayout xmlns:a="http://schemas.openxmlformats.org/drawingml/2006/main" xmlns:r="http://schemas.openxmlformats.org/officeDocument/2006/relationships" xmlns:p="http://schemas.openxmlformats.org/presentationml/2006/main" type="title" preserve="1">
   <p:cSld name="Címdia">
@@ -1427,7 +1451,7 @@
             </a:lvl1pPr>
           </a:lstStyle>
           <a:p>
-            <a:endParaRPr lang="en-US" dirty="0"/>
+            <a:endParaRPr lang="en-US"/>
           </a:p>
         </p:txBody>
       </p:sp>
@@ -1498,10 +1522,10 @@
           </a:lstStyle>
           <a:p>
             <a:r>
-              <a:rPr lang="hu-HU" dirty="0"/>
+              <a:rPr lang="hu-HU"/>
               <a:t>Kattintson ide az alcím mintájának szerkesztéséhez</a:t>
             </a:r>
-            <a:endParaRPr lang="en-US" dirty="0"/>
+            <a:endParaRPr lang="en-US"/>
           </a:p>
         </p:txBody>
       </p:sp>
@@ -1532,9 +1556,9 @@
             <a:fld id="{48A87A34-81AB-432B-8DAE-1953F412C126}" type="datetimeFigureOut">
               <a:rPr lang="en-US" dirty="0"/>
               <a:pPr/>
-              <a:t>10/15/2024</a:t>
+              <a:t>10/22/2024</a:t>
             </a:fld>
-            <a:endParaRPr lang="en-US" dirty="0"/>
+            <a:endParaRPr lang="en-US"/>
           </a:p>
         </p:txBody>
       </p:sp>
@@ -1562,7 +1586,7 @@
             </a:lvl1pPr>
           </a:lstStyle>
           <a:p>
-            <a:endParaRPr lang="en-US" dirty="0"/>
+            <a:endParaRPr lang="en-US"/>
           </a:p>
         </p:txBody>
       </p:sp>
@@ -1590,7 +1614,7 @@
               <a:rPr lang="en-US" dirty="0"/>
               <a:t>‹#›</a:t>
             </a:fld>
-            <a:endParaRPr lang="en-US" dirty="0"/>
+            <a:endParaRPr lang="en-US"/>
           </a:p>
         </p:txBody>
       </p:sp>
@@ -1599,6 +1623,9 @@
   <p:clrMapOvr>
     <a:masterClrMapping/>
   </p:clrMapOvr>
+  <p:transition spd="slow">
+    <p:cover/>
+  </p:transition>
 </p:sldLayout>
 </file>
 
@@ -2904,10 +2931,10 @@
           </a:lstStyle>
           <a:p>
             <a:r>
-              <a:rPr lang="hu-HU" dirty="0"/>
+              <a:rPr lang="hu-HU"/>
               <a:t>Mintacím szerkesztése</a:t>
             </a:r>
-            <a:endParaRPr lang="en-US" dirty="0"/>
+            <a:endParaRPr lang="en-US"/>
           </a:p>
         </p:txBody>
       </p:sp>
@@ -2964,7 +2991,7 @@
               <a:rPr lang="hu-HU"/>
               <a:t>Ötödik szint</a:t>
             </a:r>
-            <a:endParaRPr lang="en-US" dirty="0"/>
+            <a:endParaRPr lang="en-US"/>
           </a:p>
         </p:txBody>
       </p:sp>
@@ -2985,9 +3012,9 @@
           <a:p>
             <a:fld id="{48A87A34-81AB-432B-8DAE-1953F412C126}" type="datetimeFigureOut">
               <a:rPr lang="en-US" dirty="0"/>
-              <a:t>10/15/2024</a:t>
+              <a:t>10/22/2024</a:t>
             </a:fld>
-            <a:endParaRPr lang="en-US" dirty="0"/>
+            <a:endParaRPr lang="en-US"/>
           </a:p>
         </p:txBody>
       </p:sp>
@@ -3006,7 +3033,7 @@
           <a:bodyPr/>
           <a:lstStyle/>
           <a:p>
-            <a:endParaRPr lang="en-US" dirty="0"/>
+            <a:endParaRPr lang="en-US"/>
           </a:p>
         </p:txBody>
       </p:sp>
@@ -3029,7 +3056,7 @@
               <a:rPr lang="en-US" dirty="0"/>
               <a:t>‹#›</a:t>
             </a:fld>
-            <a:endParaRPr lang="en-US" dirty="0"/>
+            <a:endParaRPr lang="en-US"/>
           </a:p>
         </p:txBody>
       </p:sp>
@@ -3038,6 +3065,9 @@
   <p:clrMapOvr>
     <a:masterClrMapping/>
   </p:clrMapOvr>
+  <p:transition spd="slow">
+    <p:cover/>
+  </p:transition>
 </p:sldLayout>
 </file>
 
@@ -4380,10 +4410,10 @@
           </a:lstStyle>
           <a:p>
             <a:r>
-              <a:rPr lang="hu-HU" dirty="0"/>
+              <a:rPr lang="hu-HU"/>
               <a:t>Mintacím szerkesztése</a:t>
             </a:r>
-            <a:endParaRPr lang="en-US" dirty="0"/>
+            <a:endParaRPr lang="en-US"/>
           </a:p>
         </p:txBody>
       </p:sp>
@@ -4440,7 +4470,7 @@
               <a:rPr lang="hu-HU"/>
               <a:t>Ötödik szint</a:t>
             </a:r>
-            <a:endParaRPr lang="en-US" dirty="0"/>
+            <a:endParaRPr lang="en-US"/>
           </a:p>
         </p:txBody>
       </p:sp>
@@ -4466,9 +4496,9 @@
           <a:p>
             <a:fld id="{48A87A34-81AB-432B-8DAE-1953F412C126}" type="datetimeFigureOut">
               <a:rPr lang="en-US" dirty="0"/>
-              <a:t>10/15/2024</a:t>
+              <a:t>10/22/2024</a:t>
             </a:fld>
-            <a:endParaRPr lang="en-US" dirty="0"/>
+            <a:endParaRPr lang="en-US"/>
           </a:p>
         </p:txBody>
       </p:sp>
@@ -4492,7 +4522,7 @@
           <a:bodyPr/>
           <a:lstStyle/>
           <a:p>
-            <a:endParaRPr lang="en-US" dirty="0"/>
+            <a:endParaRPr lang="en-US"/>
           </a:p>
         </p:txBody>
       </p:sp>
@@ -4520,7 +4550,7 @@
               <a:rPr lang="en-US" dirty="0"/>
               <a:t>‹#›</a:t>
             </a:fld>
-            <a:endParaRPr lang="en-US" dirty="0"/>
+            <a:endParaRPr lang="en-US"/>
           </a:p>
         </p:txBody>
       </p:sp>
@@ -4608,7 +4638,7 @@
           <a:lstStyle/>
           <a:p>
             <a:r>
-              <a:rPr lang="hu-HU" dirty="0"/>
+              <a:rPr lang="hu-HU"/>
               <a:t>pénz</a:t>
             </a:r>
           </a:p>
@@ -4619,6 +4649,9 @@
   <p:clrMapOvr>
     <a:masterClrMapping/>
   </p:clrMapOvr>
+  <p:transition spd="slow">
+    <p:cover/>
+  </p:transition>
 </p:sldLayout>
 </file>
 
@@ -5775,7 +5808,7 @@
         </p:nvGrpSpPr>
         <p:grpSpPr>
           <a:xfrm>
-            <a:off x="800144" y="1699589"/>
+            <a:off x="765219" y="136960"/>
             <a:ext cx="3674476" cy="3470421"/>
             <a:chOff x="697883" y="1816768"/>
             <a:chExt cx="3674476" cy="3470421"/>
@@ -5943,7 +5976,7 @@
               <a:rPr lang="hu-HU"/>
               <a:t>Ötödik szint</a:t>
             </a:r>
-            <a:endParaRPr lang="en-US" dirty="0"/>
+            <a:endParaRPr lang="en-US"/>
           </a:p>
         </p:txBody>
       </p:sp>
@@ -5964,9 +5997,9 @@
           <a:p>
             <a:fld id="{48A87A34-81AB-432B-8DAE-1953F412C126}" type="datetimeFigureOut">
               <a:rPr lang="en-US" dirty="0"/>
-              <a:t>10/15/2024</a:t>
+              <a:t>10/22/2024</a:t>
             </a:fld>
-            <a:endParaRPr lang="en-US" dirty="0"/>
+            <a:endParaRPr lang="en-US"/>
           </a:p>
         </p:txBody>
       </p:sp>
@@ -5985,7 +6018,7 @@
           <a:bodyPr/>
           <a:lstStyle/>
           <a:p>
-            <a:endParaRPr lang="en-US" dirty="0"/>
+            <a:endParaRPr lang="en-US"/>
           </a:p>
         </p:txBody>
       </p:sp>
@@ -6008,7 +6041,7 @@
               <a:rPr lang="en-US" dirty="0"/>
               <a:t>‹#›</a:t>
             </a:fld>
-            <a:endParaRPr lang="en-US" dirty="0"/>
+            <a:endParaRPr lang="en-US"/>
           </a:p>
         </p:txBody>
       </p:sp>
@@ -6026,7 +6059,7 @@
         </p:nvGrpSpPr>
         <p:grpSpPr>
           <a:xfrm>
-            <a:off x="784224" y="1750814"/>
+            <a:off x="749299" y="188185"/>
             <a:ext cx="3674476" cy="3470421"/>
             <a:chOff x="697883" y="1816768"/>
             <a:chExt cx="3674476" cy="3470421"/>
@@ -6180,7 +6213,7 @@
         </p:nvSpPr>
         <p:spPr>
           <a:xfrm>
-            <a:off x="889000" y="2339669"/>
+            <a:off x="854075" y="777040"/>
             <a:ext cx="3500828" cy="2470065"/>
           </a:xfrm>
           <a:prstGeom prst="rect">
@@ -6212,7 +6245,43 @@
             </a:lvl1pPr>
           </a:lstStyle>
           <a:p>
-            <a:endParaRPr lang="en-US" dirty="0"/>
+            <a:endParaRPr lang="en-US"/>
+          </a:p>
+        </p:txBody>
+      </p:sp>
+      <p:sp>
+        <p:nvSpPr>
+          <p:cNvPr id="38" name="Title 1"/>
+          <p:cNvSpPr>
+            <a:spLocks noGrp="1"/>
+          </p:cNvSpPr>
+          <p:nvPr>
+            <p:ph type="title"/>
+          </p:nvPr>
+        </p:nvSpPr>
+        <p:spPr>
+          <a:xfrm>
+            <a:off x="836123" y="825884"/>
+            <a:ext cx="3500828" cy="2470065"/>
+          </a:xfrm>
+        </p:spPr>
+        <p:txBody>
+          <a:bodyPr lIns="91440" tIns="91440" rIns="91440" bIns="91440"/>
+          <a:lstStyle>
+            <a:lvl1pPr>
+              <a:defRPr>
+                <a:solidFill>
+                  <a:srgbClr val="FFFEFF"/>
+                </a:solidFill>
+              </a:defRPr>
+            </a:lvl1pPr>
+          </a:lstStyle>
+          <a:p>
+            <a:r>
+              <a:rPr lang="hu-HU"/>
+              <a:t>Mintacím szerkesztése</a:t>
+            </a:r>
+            <a:endParaRPr lang="en-US"/>
           </a:p>
         </p:txBody>
       </p:sp>
@@ -6221,6 +6290,9 @@
   <p:clrMapOvr>
     <a:masterClrMapping/>
   </p:clrMapOvr>
+  <p:transition spd="slow">
+    <p:cover/>
+  </p:transition>
 </p:sldLayout>
 </file>
 
@@ -7519,7 +7591,7 @@
             <a:bodyPr/>
             <a:lstStyle/>
             <a:p>
-              <a:endParaRPr lang="hu-HU" dirty="0"/>
+              <a:endParaRPr lang="hu-HU"/>
             </a:p>
           </p:txBody>
         </p:sp>
@@ -7555,10 +7627,10 @@
           </a:lstStyle>
           <a:p>
             <a:r>
-              <a:rPr lang="hu-HU" dirty="0"/>
+              <a:rPr lang="hu-HU"/>
               <a:t>Mintacím szerkesztése</a:t>
             </a:r>
-            <a:endParaRPr lang="en-US" dirty="0"/>
+            <a:endParaRPr lang="en-US"/>
           </a:p>
         </p:txBody>
       </p:sp>
@@ -7675,7 +7747,7 @@
           <a:p>
             <a:pPr lvl="0"/>
             <a:r>
-              <a:rPr lang="hu-HU" dirty="0"/>
+              <a:rPr lang="hu-HU"/>
               <a:t>Mintaszöveg szerkesztése</a:t>
             </a:r>
           </a:p>
@@ -7703,9 +7775,9 @@
           <a:p>
             <a:fld id="{48A87A34-81AB-432B-8DAE-1953F412C126}" type="datetimeFigureOut">
               <a:rPr lang="en-US" dirty="0"/>
-              <a:t>10/15/2024</a:t>
+              <a:t>10/22/2024</a:t>
             </a:fld>
-            <a:endParaRPr lang="en-US" dirty="0"/>
+            <a:endParaRPr lang="en-US"/>
           </a:p>
         </p:txBody>
       </p:sp>
@@ -7733,7 +7805,7 @@
             </a:lvl1pPr>
           </a:lstStyle>
           <a:p>
-            <a:endParaRPr lang="en-US" dirty="0"/>
+            <a:endParaRPr lang="en-US"/>
           </a:p>
         </p:txBody>
       </p:sp>
@@ -7761,7 +7833,7 @@
               <a:rPr lang="en-US" dirty="0"/>
               <a:t>‹#›</a:t>
             </a:fld>
-            <a:endParaRPr lang="en-US" dirty="0"/>
+            <a:endParaRPr lang="en-US"/>
           </a:p>
         </p:txBody>
       </p:sp>
@@ -7770,6 +7842,9 @@
   <p:clrMapOvr>
     <a:masterClrMapping/>
   </p:clrMapOvr>
+  <p:transition spd="slow">
+    <p:cover/>
+  </p:transition>
 </p:sldLayout>
 </file>
 
@@ -7798,7 +7873,7 @@
         </p:nvGrpSpPr>
         <p:grpSpPr>
           <a:xfrm>
-            <a:off x="-417513" y="0"/>
+            <a:off x="-513212" y="245543"/>
             <a:ext cx="12584114" cy="6853238"/>
             <a:chOff x="-417513" y="0"/>
             <a:chExt cx="12584114" cy="6853238"/>
@@ -9093,10 +9168,10 @@
           </a:lstStyle>
           <a:p>
             <a:r>
-              <a:rPr lang="hu-HU" dirty="0"/>
+              <a:rPr lang="hu-HU"/>
               <a:t>Mintacím szerkesztése</a:t>
             </a:r>
-            <a:endParaRPr lang="en-US" dirty="0"/>
+            <a:endParaRPr lang="en-US"/>
           </a:p>
         </p:txBody>
       </p:sp>
@@ -9153,7 +9228,7 @@
               <a:rPr lang="hu-HU"/>
               <a:t>Ötödik szint</a:t>
             </a:r>
-            <a:endParaRPr lang="en-US" dirty="0"/>
+            <a:endParaRPr lang="en-US"/>
           </a:p>
         </p:txBody>
       </p:sp>
@@ -9210,7 +9285,7 @@
               <a:rPr lang="hu-HU"/>
               <a:t>Ötödik szint</a:t>
             </a:r>
-            <a:endParaRPr lang="en-US" dirty="0"/>
+            <a:endParaRPr lang="en-US"/>
           </a:p>
         </p:txBody>
       </p:sp>
@@ -9236,9 +9311,9 @@
           <a:p>
             <a:fld id="{48A87A34-81AB-432B-8DAE-1953F412C126}" type="datetimeFigureOut">
               <a:rPr lang="en-US" dirty="0"/>
-              <a:t>10/15/2024</a:t>
+              <a:t>10/22/2024</a:t>
             </a:fld>
-            <a:endParaRPr lang="en-US" dirty="0"/>
+            <a:endParaRPr lang="en-US"/>
           </a:p>
         </p:txBody>
       </p:sp>
@@ -9262,7 +9337,7 @@
           <a:bodyPr/>
           <a:lstStyle/>
           <a:p>
-            <a:endParaRPr lang="en-US" dirty="0"/>
+            <a:endParaRPr lang="en-US"/>
           </a:p>
         </p:txBody>
       </p:sp>
@@ -9290,7 +9365,7 @@
               <a:rPr lang="en-US" dirty="0"/>
               <a:t>‹#›</a:t>
             </a:fld>
-            <a:endParaRPr lang="en-US" dirty="0"/>
+            <a:endParaRPr lang="en-US"/>
           </a:p>
         </p:txBody>
       </p:sp>
@@ -9299,6 +9374,9 @@
   <p:clrMapOvr>
     <a:masterClrMapping/>
   </p:clrMapOvr>
+  <p:transition spd="slow">
+    <p:cover/>
+  </p:transition>
 </p:sldLayout>
 </file>
 
@@ -10614,10 +10692,10 @@
           </a:lstStyle>
           <a:p>
             <a:r>
-              <a:rPr lang="hu-HU" dirty="0"/>
+              <a:rPr lang="hu-HU"/>
               <a:t>Mintacím szerkesztése</a:t>
             </a:r>
-            <a:endParaRPr lang="en-US" dirty="0"/>
+            <a:endParaRPr lang="en-US"/>
           </a:p>
         </p:txBody>
       </p:sp>
@@ -10689,7 +10767,7 @@
           <a:p>
             <a:pPr lvl="0"/>
             <a:r>
-              <a:rPr lang="hu-HU" dirty="0"/>
+              <a:rPr lang="hu-HU"/>
               <a:t>Mintaszöveg szerkesztése</a:t>
             </a:r>
           </a:p>
@@ -10748,7 +10826,7 @@
               <a:rPr lang="hu-HU"/>
               <a:t>Ötödik szint</a:t>
             </a:r>
-            <a:endParaRPr lang="en-US" dirty="0"/>
+            <a:endParaRPr lang="en-US"/>
           </a:p>
         </p:txBody>
       </p:sp>
@@ -10820,7 +10898,7 @@
           <a:p>
             <a:pPr lvl="0"/>
             <a:r>
-              <a:rPr lang="hu-HU" dirty="0"/>
+              <a:rPr lang="hu-HU"/>
               <a:t>Mintaszöveg szerkesztése</a:t>
             </a:r>
           </a:p>
@@ -10879,7 +10957,7 @@
               <a:rPr lang="hu-HU"/>
               <a:t>Ötödik szint</a:t>
             </a:r>
-            <a:endParaRPr lang="en-US" dirty="0"/>
+            <a:endParaRPr lang="en-US"/>
           </a:p>
         </p:txBody>
       </p:sp>
@@ -10905,9 +10983,9 @@
           <a:p>
             <a:fld id="{48A87A34-81AB-432B-8DAE-1953F412C126}" type="datetimeFigureOut">
               <a:rPr lang="en-US" dirty="0"/>
-              <a:t>10/15/2024</a:t>
+              <a:t>10/22/2024</a:t>
             </a:fld>
-            <a:endParaRPr lang="en-US" dirty="0"/>
+            <a:endParaRPr lang="en-US"/>
           </a:p>
         </p:txBody>
       </p:sp>
@@ -10931,7 +11009,7 @@
           <a:bodyPr/>
           <a:lstStyle/>
           <a:p>
-            <a:endParaRPr lang="en-US" dirty="0"/>
+            <a:endParaRPr lang="en-US"/>
           </a:p>
         </p:txBody>
       </p:sp>
@@ -10959,7 +11037,7 @@
               <a:rPr lang="en-US" dirty="0"/>
               <a:t>‹#›</a:t>
             </a:fld>
-            <a:endParaRPr lang="en-US" dirty="0"/>
+            <a:endParaRPr lang="en-US"/>
           </a:p>
         </p:txBody>
       </p:sp>
@@ -10968,6 +11046,9 @@
   <p:clrMapOvr>
     <a:masterClrMapping/>
   </p:clrMapOvr>
+  <p:transition spd="slow">
+    <p:cover/>
+  </p:transition>
 </p:sldLayout>
 </file>
 
@@ -12276,7 +12357,7 @@
               <a:rPr lang="hu-HU"/>
               <a:t>Mintacím szerkesztése</a:t>
             </a:r>
-            <a:endParaRPr lang="en-US" dirty="0"/>
+            <a:endParaRPr lang="en-US"/>
           </a:p>
         </p:txBody>
       </p:sp>
@@ -12297,9 +12378,9 @@
           <a:p>
             <a:fld id="{48A87A34-81AB-432B-8DAE-1953F412C126}" type="datetimeFigureOut">
               <a:rPr lang="en-US" dirty="0"/>
-              <a:t>10/15/2024</a:t>
+              <a:t>10/22/2024</a:t>
             </a:fld>
-            <a:endParaRPr lang="en-US" dirty="0"/>
+            <a:endParaRPr lang="en-US"/>
           </a:p>
         </p:txBody>
       </p:sp>
@@ -12318,7 +12399,7 @@
           <a:bodyPr/>
           <a:lstStyle/>
           <a:p>
-            <a:endParaRPr lang="en-US" dirty="0"/>
+            <a:endParaRPr lang="en-US"/>
           </a:p>
         </p:txBody>
       </p:sp>
@@ -12341,7 +12422,7 @@
               <a:rPr lang="en-US" dirty="0"/>
               <a:t>‹#›</a:t>
             </a:fld>
-            <a:endParaRPr lang="en-US" dirty="0"/>
+            <a:endParaRPr lang="en-US"/>
           </a:p>
         </p:txBody>
       </p:sp>
@@ -12350,6 +12431,9 @@
   <p:clrMapOvr>
     <a:masterClrMapping/>
   </p:clrMapOvr>
+  <p:transition spd="slow">
+    <p:cover/>
+  </p:transition>
 </p:sldLayout>
 </file>
 
@@ -12392,9 +12476,9 @@
           <a:p>
             <a:fld id="{48A87A34-81AB-432B-8DAE-1953F412C126}" type="datetimeFigureOut">
               <a:rPr lang="en-US" dirty="0"/>
-              <a:t>10/15/2024</a:t>
+              <a:t>10/22/2024</a:t>
             </a:fld>
-            <a:endParaRPr lang="en-US" dirty="0"/>
+            <a:endParaRPr lang="en-US"/>
           </a:p>
         </p:txBody>
       </p:sp>
@@ -12418,7 +12502,7 @@
           <a:bodyPr/>
           <a:lstStyle/>
           <a:p>
-            <a:endParaRPr lang="en-US" dirty="0"/>
+            <a:endParaRPr lang="en-US"/>
           </a:p>
         </p:txBody>
       </p:sp>
@@ -12446,7 +12530,7 @@
               <a:rPr lang="en-US" dirty="0"/>
               <a:t>‹#›</a:t>
             </a:fld>
-            <a:endParaRPr lang="en-US" dirty="0"/>
+            <a:endParaRPr lang="en-US"/>
           </a:p>
         </p:txBody>
       </p:sp>
@@ -12455,6 +12539,9 @@
   <p:clrMapOvr>
     <a:masterClrMapping/>
   </p:clrMapOvr>
+  <p:transition spd="slow">
+    <p:cover/>
+  </p:transition>
 </p:sldLayout>
 </file>
 
@@ -13765,7 +13852,7 @@
               <a:rPr lang="hu-HU"/>
               <a:t>Mintacím szerkesztése</a:t>
             </a:r>
-            <a:endParaRPr lang="en-US" dirty="0"/>
+            <a:endParaRPr lang="en-US"/>
           </a:p>
         </p:txBody>
       </p:sp>
@@ -13822,7 +13909,7 @@
               <a:rPr lang="hu-HU"/>
               <a:t>Ötödik szint</a:t>
             </a:r>
-            <a:endParaRPr lang="en-US" dirty="0"/>
+            <a:endParaRPr lang="en-US"/>
           </a:p>
         </p:txBody>
       </p:sp>
@@ -13912,9 +13999,9 @@
           <a:p>
             <a:fld id="{48A87A34-81AB-432B-8DAE-1953F412C126}" type="datetimeFigureOut">
               <a:rPr lang="en-US" dirty="0"/>
-              <a:t>10/15/2024</a:t>
+              <a:t>10/22/2024</a:t>
             </a:fld>
-            <a:endParaRPr lang="en-US" dirty="0"/>
+            <a:endParaRPr lang="en-US"/>
           </a:p>
         </p:txBody>
       </p:sp>
@@ -13933,7 +14020,7 @@
           <a:bodyPr/>
           <a:lstStyle/>
           <a:p>
-            <a:endParaRPr lang="en-US" dirty="0"/>
+            <a:endParaRPr lang="en-US"/>
           </a:p>
         </p:txBody>
       </p:sp>
@@ -13956,7 +14043,7 @@
               <a:rPr lang="en-US" dirty="0"/>
               <a:t>‹#›</a:t>
             </a:fld>
-            <a:endParaRPr lang="en-US" dirty="0"/>
+            <a:endParaRPr lang="en-US"/>
           </a:p>
         </p:txBody>
       </p:sp>
@@ -13965,6 +14052,9 @@
   <p:clrMapOvr>
     <a:masterClrMapping/>
   </p:clrMapOvr>
+  <p:transition spd="slow">
+    <p:cover/>
+  </p:transition>
 </p:sldLayout>
 </file>
 
@@ -15307,7 +15397,7 @@
               <a:rPr lang="hu-HU"/>
               <a:t>Kép beszúrásához kattintson az ikonra</a:t>
             </a:r>
-            <a:endParaRPr lang="en-US" dirty="0"/>
+            <a:endParaRPr lang="en-US"/>
           </a:p>
         </p:txBody>
       </p:sp>
@@ -15345,7 +15435,7 @@
               <a:rPr lang="hu-HU"/>
               <a:t>Mintacím szerkesztése</a:t>
             </a:r>
-            <a:endParaRPr lang="en-US" dirty="0"/>
+            <a:endParaRPr lang="en-US"/>
           </a:p>
         </p:txBody>
       </p:sp>
@@ -15442,9 +15532,9 @@
           <a:p>
             <a:fld id="{48A87A34-81AB-432B-8DAE-1953F412C126}" type="datetimeFigureOut">
               <a:rPr lang="en-US" dirty="0"/>
-              <a:t>10/15/2024</a:t>
+              <a:t>10/22/2024</a:t>
             </a:fld>
-            <a:endParaRPr lang="en-US" dirty="0"/>
+            <a:endParaRPr lang="en-US"/>
           </a:p>
         </p:txBody>
       </p:sp>
@@ -15468,7 +15558,7 @@
           <a:bodyPr/>
           <a:lstStyle/>
           <a:p>
-            <a:endParaRPr lang="en-US" dirty="0"/>
+            <a:endParaRPr lang="en-US"/>
           </a:p>
         </p:txBody>
       </p:sp>
@@ -15496,7 +15586,7 @@
               <a:rPr lang="en-US" dirty="0"/>
               <a:t>‹#›</a:t>
             </a:fld>
-            <a:endParaRPr lang="en-US" dirty="0"/>
+            <a:endParaRPr lang="en-US"/>
           </a:p>
         </p:txBody>
       </p:sp>
@@ -15505,6 +15595,9 @@
   <p:clrMapOvr>
     <a:masterClrMapping/>
   </p:clrMapOvr>
+  <p:transition spd="slow">
+    <p:cover/>
+  </p:transition>
 </p:sldLayout>
 </file>
 
@@ -15561,10 +15654,10 @@
           <a:lstStyle/>
           <a:p>
             <a:r>
-              <a:rPr lang="hu-HU" dirty="0"/>
+              <a:rPr lang="hu-HU"/>
               <a:t>Mintacím szerkesztése</a:t>
             </a:r>
-            <a:endParaRPr lang="en-US" dirty="0"/>
+            <a:endParaRPr lang="en-US"/>
           </a:p>
         </p:txBody>
       </p:sp>
@@ -15595,63 +15688,63 @@
           <a:p>
             <a:pPr lvl="0"/>
             <a:r>
-              <a:rPr lang="en-US" dirty="0"/>
+              <a:rPr lang="en-US"/>
               <a:t>Edit Master text styles</a:t>
             </a:r>
           </a:p>
           <a:p>
             <a:pPr lvl="1"/>
             <a:r>
-              <a:rPr lang="en-US" dirty="0"/>
+              <a:rPr lang="en-US"/>
               <a:t>Second level</a:t>
             </a:r>
           </a:p>
           <a:p>
             <a:pPr lvl="2"/>
             <a:r>
-              <a:rPr lang="en-US" dirty="0"/>
+              <a:rPr lang="en-US"/>
               <a:t>Third level</a:t>
             </a:r>
           </a:p>
           <a:p>
             <a:pPr lvl="3"/>
             <a:r>
-              <a:rPr lang="en-US" dirty="0"/>
+              <a:rPr lang="en-US"/>
               <a:t>Fourth level</a:t>
             </a:r>
           </a:p>
           <a:p>
             <a:pPr lvl="4"/>
             <a:r>
-              <a:rPr lang="en-US" dirty="0"/>
+              <a:rPr lang="en-US"/>
               <a:t>Fifth level</a:t>
             </a:r>
           </a:p>
           <a:p>
             <a:pPr lvl="5"/>
             <a:r>
-              <a:rPr lang="en-US" dirty="0"/>
+              <a:rPr lang="en-US"/>
               <a:t>6</a:t>
             </a:r>
           </a:p>
           <a:p>
             <a:pPr lvl="6"/>
             <a:r>
-              <a:rPr lang="en-US" dirty="0"/>
+              <a:rPr lang="en-US"/>
               <a:t>7</a:t>
             </a:r>
           </a:p>
           <a:p>
             <a:pPr lvl="7"/>
             <a:r>
-              <a:rPr lang="en-US" dirty="0"/>
+              <a:rPr lang="en-US"/>
               <a:t>8</a:t>
             </a:r>
           </a:p>
           <a:p>
             <a:pPr lvl="8"/>
             <a:r>
-              <a:rPr lang="en-US" dirty="0"/>
+              <a:rPr lang="en-US"/>
               <a:t>9</a:t>
             </a:r>
           </a:p>
@@ -15693,9 +15786,9 @@
             <a:fld id="{48A87A34-81AB-432B-8DAE-1953F412C126}" type="datetimeFigureOut">
               <a:rPr lang="en-US" dirty="0"/>
               <a:pPr/>
-              <a:t>10/15/2024</a:t>
+              <a:t>10/22/2024</a:t>
             </a:fld>
-            <a:endParaRPr lang="en-US" dirty="0"/>
+            <a:endParaRPr lang="en-US"/>
           </a:p>
         </p:txBody>
       </p:sp>
@@ -15732,7 +15825,7 @@
             </a:lvl1pPr>
           </a:lstStyle>
           <a:p>
-            <a:endParaRPr lang="en-US" dirty="0"/>
+            <a:endParaRPr lang="en-US"/>
           </a:p>
         </p:txBody>
       </p:sp>
@@ -15774,7 +15867,7 @@
               <a:pPr/>
               <a:t>‹#›</a:t>
             </a:fld>
-            <a:endParaRPr lang="en-US" dirty="0"/>
+            <a:endParaRPr lang="en-US"/>
           </a:p>
         </p:txBody>
       </p:sp>
@@ -15794,6 +15887,9 @@
     <p:sldLayoutId id="2147483658" r:id="rId10"/>
     <p:sldLayoutId id="2147483659" r:id="rId11"/>
   </p:sldLayoutIdLst>
+  <p:transition spd="slow">
+    <p:cover/>
+  </p:transition>
   <p:txStyles>
     <p:titleStyle>
       <a:lvl1pPr algn="ctr" defTabSz="914400" rtl="0" eaLnBrk="1" latinLnBrk="0" hangingPunct="1">
@@ -16162,15 +16258,15 @@
           <a:lstStyle/>
           <a:p>
             <a:r>
-              <a:rPr lang="hu-HU" dirty="0"/>
+              <a:rPr lang="hu-HU"/>
               <a:t>A </a:t>
             </a:r>
             <a:r>
-              <a:rPr lang="hu-HU" dirty="0" err="1"/>
+              <a:rPr lang="hu-HU" err="1"/>
               <a:t>Git</a:t>
             </a:r>
             <a:r>
-              <a:rPr lang="hu-HU" dirty="0"/>
+              <a:rPr lang="hu-HU"/>
               <a:t> használata</a:t>
             </a:r>
           </a:p>
@@ -16198,7 +16294,7 @@
           <a:lstStyle/>
           <a:p>
             <a:r>
-              <a:rPr lang="hu-HU" dirty="0"/>
+              <a:rPr lang="hu-HU"/>
               <a:t>Készítette: FOPS Team</a:t>
             </a:r>
           </a:p>
@@ -16214,6 +16310,1637 @@
   <p:clrMapOvr>
     <a:masterClrMapping/>
   </p:clrMapOvr>
+  <p:transition spd="slow">
+    <p:cover/>
+  </p:transition>
+</p:sld>
+</file>
+
+<file path=ppt/slides/slide10.xml><?xml version="1.0" encoding="utf-8"?>
+<p:sld xmlns:a="http://schemas.openxmlformats.org/drawingml/2006/main" xmlns:r="http://schemas.openxmlformats.org/officeDocument/2006/relationships" xmlns:p="http://schemas.openxmlformats.org/presentationml/2006/main">
+  <p:cSld>
+    <p:spTree>
+      <p:nvGrpSpPr>
+        <p:cNvPr id="1" name=""/>
+        <p:cNvGrpSpPr/>
+        <p:nvPr/>
+      </p:nvGrpSpPr>
+      <p:grpSpPr>
+        <a:xfrm>
+          <a:off x="0" y="0"/>
+          <a:ext cx="0" cy="0"/>
+          <a:chOff x="0" y="0"/>
+          <a:chExt cx="0" cy="0"/>
+        </a:xfrm>
+      </p:grpSpPr>
+      <p:sp>
+        <p:nvSpPr>
+          <p:cNvPr id="2" name="Cím 1">
+            <a:extLst>
+              <a:ext uri="{FF2B5EF4-FFF2-40B4-BE49-F238E27FC236}">
+                <a16:creationId xmlns:a16="http://schemas.microsoft.com/office/drawing/2014/main" id="{2DE06A5C-0110-55E8-AD49-97C64712A5A1}"/>
+              </a:ext>
+            </a:extLst>
+          </p:cNvPr>
+          <p:cNvSpPr>
+            <a:spLocks noGrp="1"/>
+          </p:cNvSpPr>
+          <p:nvPr>
+            <p:ph type="title"/>
+          </p:nvPr>
+        </p:nvSpPr>
+        <p:spPr>
+          <a:xfrm>
+            <a:off x="889000" y="2760774"/>
+            <a:ext cx="3500828" cy="1327065"/>
+          </a:xfrm>
+        </p:spPr>
+        <p:txBody>
+          <a:bodyPr/>
+          <a:lstStyle/>
+          <a:p>
+            <a:r>
+              <a:rPr lang="hu-HU" sz="4400" err="1">
+                <a:latin typeface="Bahnschrift SemiBold"/>
+              </a:rPr>
+              <a:t>Merge</a:t>
+            </a:r>
+            <a:r>
+              <a:rPr lang="hu-HU">
+                <a:latin typeface="Bahnschrift SemiBold"/>
+              </a:rPr>
+              <a:t> </a:t>
+            </a:r>
+            <a:endParaRPr lang="hu-HU" b="1">
+              <a:latin typeface="Bahnschrift SemiBold"/>
+            </a:endParaRPr>
+          </a:p>
+        </p:txBody>
+      </p:sp>
+      <p:sp>
+        <p:nvSpPr>
+          <p:cNvPr id="3" name="Tartalom helye 2">
+            <a:extLst>
+              <a:ext uri="{FF2B5EF4-FFF2-40B4-BE49-F238E27FC236}">
+                <a16:creationId xmlns:a16="http://schemas.microsoft.com/office/drawing/2014/main" id="{18D93351-362F-7932-5F1B-70EE4B8F4D3F}"/>
+              </a:ext>
+            </a:extLst>
+          </p:cNvPr>
+          <p:cNvSpPr>
+            <a:spLocks noGrp="1"/>
+          </p:cNvSpPr>
+          <p:nvPr>
+            <p:ph sz="half" idx="1"/>
+          </p:nvPr>
+        </p:nvSpPr>
+        <p:spPr>
+          <a:xfrm>
+            <a:off x="5775930" y="2099924"/>
+            <a:ext cx="5053065" cy="1326546"/>
+          </a:xfrm>
+        </p:spPr>
+        <p:txBody>
+          <a:bodyPr vert="horz" lIns="91440" tIns="45720" rIns="91440" bIns="45720" rtlCol="0" anchor="t">
+            <a:normAutofit/>
+          </a:bodyPr>
+          <a:lstStyle/>
+          <a:p>
+            <a:r>
+              <a:rPr lang="hu-HU" sz="3200">
+                <a:latin typeface="Bahnschrift"/>
+              </a:rPr>
+              <a:t>Az ágakat összevonhatod a fő (main) ággal:</a:t>
+            </a:r>
+          </a:p>
+        </p:txBody>
+      </p:sp>
+      <p:sp>
+        <p:nvSpPr>
+          <p:cNvPr id="5" name="Szövegdoboz 4">
+            <a:extLst>
+              <a:ext uri="{FF2B5EF4-FFF2-40B4-BE49-F238E27FC236}">
+                <a16:creationId xmlns:a16="http://schemas.microsoft.com/office/drawing/2014/main" id="{09CA5C37-DE1E-E2A7-312E-021514DA8D69}"/>
+              </a:ext>
+            </a:extLst>
+          </p:cNvPr>
+          <p:cNvSpPr txBox="1"/>
+          <p:nvPr/>
+        </p:nvSpPr>
+        <p:spPr>
+          <a:xfrm>
+            <a:off x="1149683" y="3669631"/>
+            <a:ext cx="2981157" cy="637034"/>
+          </a:xfrm>
+          <a:prstGeom prst="rect">
+            <a:avLst/>
+          </a:prstGeom>
+          <a:noFill/>
+        </p:spPr>
+        <p:txBody>
+          <a:bodyPr rot="0" spcFirstLastPara="0" vertOverflow="overflow" horzOverflow="overflow" vert="horz" wrap="square" lIns="91440" tIns="45720" rIns="91440" bIns="45720" numCol="1" spcCol="0" rtlCol="0" fromWordArt="0" anchor="t" anchorCtr="0" forceAA="0" compatLnSpc="1">
+            <a:prstTxWarp prst="textNoShape">
+              <a:avLst/>
+            </a:prstTxWarp>
+            <a:spAutoFit/>
+          </a:bodyPr>
+          <a:lstStyle/>
+          <a:p>
+            <a:pPr algn="ctr" defTabSz="914400">
+              <a:lnSpc>
+                <a:spcPct val="120000"/>
+              </a:lnSpc>
+              <a:spcBef>
+                <a:spcPts val="1000"/>
+              </a:spcBef>
+              <a:buClr>
+                <a:schemeClr val="accent1"/>
+              </a:buClr>
+              <a:buSzPct val="110000"/>
+            </a:pPr>
+            <a:r>
+              <a:rPr lang="hu-HU" sz="3200">
+                <a:solidFill>
+                  <a:srgbClr val="FFFEFF"/>
+                </a:solidFill>
+                <a:latin typeface="Bahnschrift"/>
+              </a:rPr>
+              <a:t>Összevonás</a:t>
+            </a:r>
+          </a:p>
+        </p:txBody>
+      </p:sp>
+      <p:pic>
+        <p:nvPicPr>
+          <p:cNvPr id="6" name="Kép 5">
+            <a:extLst>
+              <a:ext uri="{FF2B5EF4-FFF2-40B4-BE49-F238E27FC236}">
+                <a16:creationId xmlns:a16="http://schemas.microsoft.com/office/drawing/2014/main" id="{664EF6BB-5E72-7716-5B01-2D2798C4C604}"/>
+              </a:ext>
+            </a:extLst>
+          </p:cNvPr>
+          <p:cNvPicPr>
+            <a:picLocks noChangeAspect="1"/>
+          </p:cNvPicPr>
+          <p:nvPr/>
+        </p:nvPicPr>
+        <p:blipFill>
+          <a:blip r:embed="rId2"/>
+          <a:stretch>
+            <a:fillRect/>
+          </a:stretch>
+        </p:blipFill>
+        <p:spPr>
+          <a:xfrm>
+            <a:off x="6094162" y="3640555"/>
+            <a:ext cx="2563729" cy="666416"/>
+          </a:xfrm>
+          <a:prstGeom prst="rect">
+            <a:avLst/>
+          </a:prstGeom>
+          <a:ln w="38100" cap="sq">
+            <a:solidFill>
+              <a:srgbClr val="000000"/>
+            </a:solidFill>
+            <a:prstDash val="solid"/>
+            <a:miter lim="800000"/>
+          </a:ln>
+          <a:effectLst>
+            <a:outerShdw blurRad="50800" dist="38100" dir="2700000" algn="tl" rotWithShape="0">
+              <a:srgbClr val="000000">
+                <a:alpha val="43000"/>
+              </a:srgbClr>
+            </a:outerShdw>
+          </a:effectLst>
+        </p:spPr>
+      </p:pic>
+    </p:spTree>
+    <p:extLst>
+      <p:ext uri="{BB962C8B-B14F-4D97-AF65-F5344CB8AC3E}">
+        <p14:creationId xmlns:p14="http://schemas.microsoft.com/office/powerpoint/2010/main" val="3161529942"/>
+      </p:ext>
+    </p:extLst>
+  </p:cSld>
+  <p:clrMapOvr>
+    <a:masterClrMapping/>
+  </p:clrMapOvr>
+  <p:transition spd="slow">
+    <p:cover/>
+  </p:transition>
+  <p:timing>
+    <p:tnLst>
+      <p:par>
+        <p:cTn id="1" dur="indefinite" restart="never" nodeType="tmRoot">
+          <p:childTnLst>
+            <p:seq concurrent="1" nextAc="seek">
+              <p:cTn id="2" dur="indefinite" nodeType="mainSeq">
+                <p:childTnLst>
+                  <p:par>
+                    <p:cTn id="3" fill="hold">
+                      <p:stCondLst>
+                        <p:cond delay="indefinite"/>
+                      </p:stCondLst>
+                      <p:childTnLst>
+                        <p:par>
+                          <p:cTn id="4" fill="hold">
+                            <p:stCondLst>
+                              <p:cond delay="0"/>
+                            </p:stCondLst>
+                            <p:childTnLst>
+                              <p:par>
+                                <p:cTn id="5" presetID="2" presetClass="entr" presetSubtype="4" fill="hold" grpId="0" nodeType="clickEffect">
+                                  <p:stCondLst>
+                                    <p:cond delay="0"/>
+                                  </p:stCondLst>
+                                  <p:childTnLst>
+                                    <p:set>
+                                      <p:cBhvr>
+                                        <p:cTn id="6" dur="1" fill="hold">
+                                          <p:stCondLst>
+                                            <p:cond delay="0"/>
+                                          </p:stCondLst>
+                                        </p:cTn>
+                                        <p:tgtEl>
+                                          <p:spTgt spid="3">
+                                            <p:txEl>
+                                              <p:pRg st="0" end="0"/>
+                                            </p:txEl>
+                                          </p:spTgt>
+                                        </p:tgtEl>
+                                        <p:attrNameLst>
+                                          <p:attrName>style.visibility</p:attrName>
+                                        </p:attrNameLst>
+                                      </p:cBhvr>
+                                      <p:to>
+                                        <p:strVal val="visible"/>
+                                      </p:to>
+                                    </p:set>
+                                    <p:anim calcmode="lin" valueType="num">
+                                      <p:cBhvr additive="base">
+                                        <p:cTn id="7" dur="1000" fill="hold"/>
+                                        <p:tgtEl>
+                                          <p:spTgt spid="3">
+                                            <p:txEl>
+                                              <p:pRg st="0" end="0"/>
+                                            </p:txEl>
+                                          </p:spTgt>
+                                        </p:tgtEl>
+                                        <p:attrNameLst>
+                                          <p:attrName>ppt_x</p:attrName>
+                                        </p:attrNameLst>
+                                      </p:cBhvr>
+                                      <p:tavLst>
+                                        <p:tav tm="0">
+                                          <p:val>
+                                            <p:strVal val="#ppt_x"/>
+                                          </p:val>
+                                        </p:tav>
+                                        <p:tav tm="100000">
+                                          <p:val>
+                                            <p:strVal val="#ppt_x"/>
+                                          </p:val>
+                                        </p:tav>
+                                      </p:tavLst>
+                                    </p:anim>
+                                    <p:anim calcmode="lin" valueType="num">
+                                      <p:cBhvr additive="base">
+                                        <p:cTn id="8" dur="1000" fill="hold"/>
+                                        <p:tgtEl>
+                                          <p:spTgt spid="3">
+                                            <p:txEl>
+                                              <p:pRg st="0" end="0"/>
+                                            </p:txEl>
+                                          </p:spTgt>
+                                        </p:tgtEl>
+                                        <p:attrNameLst>
+                                          <p:attrName>ppt_y</p:attrName>
+                                        </p:attrNameLst>
+                                      </p:cBhvr>
+                                      <p:tavLst>
+                                        <p:tav tm="0">
+                                          <p:val>
+                                            <p:strVal val="1+#ppt_h/2"/>
+                                          </p:val>
+                                        </p:tav>
+                                        <p:tav tm="100000">
+                                          <p:val>
+                                            <p:strVal val="#ppt_y"/>
+                                          </p:val>
+                                        </p:tav>
+                                      </p:tavLst>
+                                    </p:anim>
+                                  </p:childTnLst>
+                                </p:cTn>
+                              </p:par>
+                              <p:par>
+                                <p:cTn id="9" presetID="2" presetClass="entr" presetSubtype="4" fill="hold" nodeType="withEffect">
+                                  <p:stCondLst>
+                                    <p:cond delay="0"/>
+                                  </p:stCondLst>
+                                  <p:childTnLst>
+                                    <p:set>
+                                      <p:cBhvr>
+                                        <p:cTn id="10" dur="1" fill="hold">
+                                          <p:stCondLst>
+                                            <p:cond delay="0"/>
+                                          </p:stCondLst>
+                                        </p:cTn>
+                                        <p:tgtEl>
+                                          <p:spTgt spid="6"/>
+                                        </p:tgtEl>
+                                        <p:attrNameLst>
+                                          <p:attrName>style.visibility</p:attrName>
+                                        </p:attrNameLst>
+                                      </p:cBhvr>
+                                      <p:to>
+                                        <p:strVal val="visible"/>
+                                      </p:to>
+                                    </p:set>
+                                    <p:anim calcmode="lin" valueType="num">
+                                      <p:cBhvr additive="base">
+                                        <p:cTn id="11" dur="1000" fill="hold"/>
+                                        <p:tgtEl>
+                                          <p:spTgt spid="6"/>
+                                        </p:tgtEl>
+                                        <p:attrNameLst>
+                                          <p:attrName>ppt_x</p:attrName>
+                                        </p:attrNameLst>
+                                      </p:cBhvr>
+                                      <p:tavLst>
+                                        <p:tav tm="0">
+                                          <p:val>
+                                            <p:strVal val="#ppt_x"/>
+                                          </p:val>
+                                        </p:tav>
+                                        <p:tav tm="100000">
+                                          <p:val>
+                                            <p:strVal val="#ppt_x"/>
+                                          </p:val>
+                                        </p:tav>
+                                      </p:tavLst>
+                                    </p:anim>
+                                    <p:anim calcmode="lin" valueType="num">
+                                      <p:cBhvr additive="base">
+                                        <p:cTn id="12" dur="1000" fill="hold"/>
+                                        <p:tgtEl>
+                                          <p:spTgt spid="6"/>
+                                        </p:tgtEl>
+                                        <p:attrNameLst>
+                                          <p:attrName>ppt_y</p:attrName>
+                                        </p:attrNameLst>
+                                      </p:cBhvr>
+                                      <p:tavLst>
+                                        <p:tav tm="0">
+                                          <p:val>
+                                            <p:strVal val="1+#ppt_h/2"/>
+                                          </p:val>
+                                        </p:tav>
+                                        <p:tav tm="100000">
+                                          <p:val>
+                                            <p:strVal val="#ppt_y"/>
+                                          </p:val>
+                                        </p:tav>
+                                      </p:tavLst>
+                                    </p:anim>
+                                  </p:childTnLst>
+                                </p:cTn>
+                              </p:par>
+                            </p:childTnLst>
+                          </p:cTn>
+                        </p:par>
+                      </p:childTnLst>
+                    </p:cTn>
+                  </p:par>
+                </p:childTnLst>
+              </p:cTn>
+              <p:prevCondLst>
+                <p:cond evt="onPrev" delay="0">
+                  <p:tgtEl>
+                    <p:sldTgt/>
+                  </p:tgtEl>
+                </p:cond>
+              </p:prevCondLst>
+              <p:nextCondLst>
+                <p:cond evt="onNext" delay="0">
+                  <p:tgtEl>
+                    <p:sldTgt/>
+                  </p:tgtEl>
+                </p:cond>
+              </p:nextCondLst>
+            </p:seq>
+          </p:childTnLst>
+        </p:cTn>
+      </p:par>
+    </p:tnLst>
+    <p:bldLst>
+      <p:bldP spid="3" grpId="0" build="p"/>
+    </p:bldLst>
+  </p:timing>
+</p:sld>
+</file>
+
+<file path=ppt/slides/slide11.xml><?xml version="1.0" encoding="utf-8"?>
+<p:sld xmlns:a="http://schemas.openxmlformats.org/drawingml/2006/main" xmlns:r="http://schemas.openxmlformats.org/officeDocument/2006/relationships" xmlns:p="http://schemas.openxmlformats.org/presentationml/2006/main">
+  <p:cSld>
+    <p:spTree>
+      <p:nvGrpSpPr>
+        <p:cNvPr id="1" name=""/>
+        <p:cNvGrpSpPr/>
+        <p:nvPr/>
+      </p:nvGrpSpPr>
+      <p:grpSpPr>
+        <a:xfrm>
+          <a:off x="0" y="0"/>
+          <a:ext cx="0" cy="0"/>
+          <a:chOff x="0" y="0"/>
+          <a:chExt cx="0" cy="0"/>
+        </a:xfrm>
+      </p:grpSpPr>
+      <p:sp>
+        <p:nvSpPr>
+          <p:cNvPr id="2" name="Cím 1">
+            <a:extLst>
+              <a:ext uri="{FF2B5EF4-FFF2-40B4-BE49-F238E27FC236}">
+                <a16:creationId xmlns:a16="http://schemas.microsoft.com/office/drawing/2014/main" id="{4977722A-EC43-8CBC-09DA-2598D9F96E59}"/>
+              </a:ext>
+            </a:extLst>
+          </p:cNvPr>
+          <p:cNvSpPr>
+            <a:spLocks noGrp="1"/>
+          </p:cNvSpPr>
+          <p:nvPr>
+            <p:ph type="title"/>
+          </p:nvPr>
+        </p:nvSpPr>
+        <p:spPr/>
+        <p:txBody>
+          <a:bodyPr/>
+          <a:lstStyle/>
+          <a:p>
+            <a:r>
+              <a:rPr lang="hu-HU" sz="4400" err="1">
+                <a:latin typeface="Bahnschrift SemiBold"/>
+              </a:rPr>
+              <a:t>Push</a:t>
+            </a:r>
+            <a:endParaRPr lang="hu-HU" sz="4400" err="1"/>
+          </a:p>
+        </p:txBody>
+      </p:sp>
+      <p:sp>
+        <p:nvSpPr>
+          <p:cNvPr id="3" name="Tartalom helye 2">
+            <a:extLst>
+              <a:ext uri="{FF2B5EF4-FFF2-40B4-BE49-F238E27FC236}">
+                <a16:creationId xmlns:a16="http://schemas.microsoft.com/office/drawing/2014/main" id="{2D396B7E-FE12-B074-41B8-52F0D728ABF9}"/>
+              </a:ext>
+            </a:extLst>
+          </p:cNvPr>
+          <p:cNvSpPr>
+            <a:spLocks noGrp="1"/>
+          </p:cNvSpPr>
+          <p:nvPr>
+            <p:ph idx="1"/>
+          </p:nvPr>
+        </p:nvSpPr>
+        <p:spPr>
+          <a:xfrm>
+            <a:off x="5109983" y="451117"/>
+            <a:ext cx="6275035" cy="3794670"/>
+          </a:xfrm>
+        </p:spPr>
+        <p:txBody>
+          <a:bodyPr>
+            <a:normAutofit/>
+          </a:bodyPr>
+          <a:lstStyle/>
+          <a:p>
+            <a:r>
+              <a:rPr lang="hu-HU" sz="3200">
+                <a:latin typeface="Bahnschrift"/>
+              </a:rPr>
+              <a:t>A helyi könyvtár feltöltése a GitHub projekt könyvtárába</a:t>
+            </a:r>
+          </a:p>
+          <a:p>
+            <a:r>
+              <a:rPr lang="hu-HU" sz="3200">
+                <a:latin typeface="Bahnschrift"/>
+              </a:rPr>
+              <a:t>Parancs: "</a:t>
+            </a:r>
+            <a:r>
+              <a:rPr lang="hu-HU" sz="3200" err="1">
+                <a:latin typeface="Bahnschrift"/>
+              </a:rPr>
+              <a:t>git</a:t>
+            </a:r>
+            <a:r>
+              <a:rPr lang="hu-HU" sz="3200">
+                <a:latin typeface="Bahnschrift"/>
+              </a:rPr>
+              <a:t> </a:t>
+            </a:r>
+            <a:r>
+              <a:rPr lang="hu-HU" sz="3200" err="1">
+                <a:latin typeface="Bahnschrift"/>
+              </a:rPr>
+              <a:t>push</a:t>
+            </a:r>
+            <a:r>
+              <a:rPr lang="hu-HU" sz="3200">
+                <a:latin typeface="Bahnschrift"/>
+              </a:rPr>
+              <a:t> </a:t>
+            </a:r>
+            <a:r>
+              <a:rPr lang="hu-HU" sz="3200" err="1">
+                <a:latin typeface="Bahnschrift"/>
+              </a:rPr>
+              <a:t>origin</a:t>
+            </a:r>
+            <a:r>
+              <a:rPr lang="hu-HU" sz="3200">
+                <a:latin typeface="Bahnschrift"/>
+              </a:rPr>
+              <a:t>"</a:t>
+            </a:r>
+            <a:endParaRPr lang="hu-HU" sz="3200"/>
+          </a:p>
+          <a:p>
+            <a:endParaRPr lang="hu-HU" sz="3200"/>
+          </a:p>
+        </p:txBody>
+      </p:sp>
+      <p:sp>
+        <p:nvSpPr>
+          <p:cNvPr id="4" name="Szöveg helye 3">
+            <a:extLst>
+              <a:ext uri="{FF2B5EF4-FFF2-40B4-BE49-F238E27FC236}">
+                <a16:creationId xmlns:a16="http://schemas.microsoft.com/office/drawing/2014/main" id="{4E949E2C-9989-A5CA-D52E-7F4638AEA676}"/>
+              </a:ext>
+            </a:extLst>
+          </p:cNvPr>
+          <p:cNvSpPr>
+            <a:spLocks noGrp="1"/>
+          </p:cNvSpPr>
+          <p:nvPr>
+            <p:ph type="body" sz="half" idx="2"/>
+          </p:nvPr>
+        </p:nvSpPr>
+        <p:spPr/>
+        <p:txBody>
+          <a:bodyPr vert="horz" lIns="91440" tIns="45720" rIns="91440" bIns="45720" rtlCol="0" anchor="t">
+            <a:normAutofit/>
+          </a:bodyPr>
+          <a:lstStyle/>
+          <a:p>
+            <a:r>
+              <a:rPr lang="hu-HU" sz="3200">
+                <a:latin typeface="Bahnschrift"/>
+              </a:rPr>
+              <a:t>Feltöltés</a:t>
+            </a:r>
+            <a:endParaRPr lang="hu-HU" sz="3200"/>
+          </a:p>
+        </p:txBody>
+      </p:sp>
+      <p:pic>
+        <p:nvPicPr>
+          <p:cNvPr id="7" name="Kép 6" descr="A képen szöveg, képernyőkép, szoftver, Betűtípus látható&#10;&#10;Automatikusan generált leírás">
+            <a:extLst>
+              <a:ext uri="{FF2B5EF4-FFF2-40B4-BE49-F238E27FC236}">
+                <a16:creationId xmlns:a16="http://schemas.microsoft.com/office/drawing/2014/main" id="{F09BDE7F-22CC-5091-DD13-07971E963949}"/>
+              </a:ext>
+            </a:extLst>
+          </p:cNvPr>
+          <p:cNvPicPr>
+            <a:picLocks noChangeAspect="1"/>
+          </p:cNvPicPr>
+          <p:nvPr/>
+        </p:nvPicPr>
+        <p:blipFill>
+          <a:blip r:embed="rId2"/>
+          <a:stretch>
+            <a:fillRect/>
+          </a:stretch>
+        </p:blipFill>
+        <p:spPr>
+          <a:xfrm>
+            <a:off x="4812079" y="3232273"/>
+            <a:ext cx="6573227" cy="2562225"/>
+          </a:xfrm>
+          <a:prstGeom prst="rect">
+            <a:avLst/>
+          </a:prstGeom>
+          <a:ln w="127000" cap="sq">
+            <a:solidFill>
+              <a:srgbClr val="000000"/>
+            </a:solidFill>
+            <a:miter lim="800000"/>
+          </a:ln>
+          <a:effectLst>
+            <a:outerShdw blurRad="57150" dist="50800" dir="2700000" algn="tl" rotWithShape="0">
+              <a:srgbClr val="000000">
+                <a:alpha val="40000"/>
+              </a:srgbClr>
+            </a:outerShdw>
+          </a:effectLst>
+        </p:spPr>
+      </p:pic>
+    </p:spTree>
+    <p:extLst>
+      <p:ext uri="{BB962C8B-B14F-4D97-AF65-F5344CB8AC3E}">
+        <p14:creationId xmlns:p14="http://schemas.microsoft.com/office/powerpoint/2010/main" val="3101527100"/>
+      </p:ext>
+    </p:extLst>
+  </p:cSld>
+  <p:clrMapOvr>
+    <a:masterClrMapping/>
+  </p:clrMapOvr>
+  <p:transition spd="slow">
+    <p:cover/>
+  </p:transition>
+  <p:timing>
+    <p:tnLst>
+      <p:par>
+        <p:cTn id="1" dur="indefinite" restart="never" nodeType="tmRoot">
+          <p:childTnLst>
+            <p:seq concurrent="1" nextAc="seek">
+              <p:cTn id="2" dur="indefinite" nodeType="mainSeq">
+                <p:childTnLst>
+                  <p:par>
+                    <p:cTn id="3" fill="hold">
+                      <p:stCondLst>
+                        <p:cond delay="indefinite"/>
+                      </p:stCondLst>
+                      <p:childTnLst>
+                        <p:par>
+                          <p:cTn id="4" fill="hold">
+                            <p:stCondLst>
+                              <p:cond delay="0"/>
+                            </p:stCondLst>
+                            <p:childTnLst>
+                              <p:par>
+                                <p:cTn id="5" presetID="2" presetClass="entr" presetSubtype="4" fill="hold" grpId="0" nodeType="clickEffect">
+                                  <p:stCondLst>
+                                    <p:cond delay="0"/>
+                                  </p:stCondLst>
+                                  <p:childTnLst>
+                                    <p:set>
+                                      <p:cBhvr>
+                                        <p:cTn id="6" dur="1" fill="hold">
+                                          <p:stCondLst>
+                                            <p:cond delay="0"/>
+                                          </p:stCondLst>
+                                        </p:cTn>
+                                        <p:tgtEl>
+                                          <p:spTgt spid="3">
+                                            <p:txEl>
+                                              <p:pRg st="0" end="0"/>
+                                            </p:txEl>
+                                          </p:spTgt>
+                                        </p:tgtEl>
+                                        <p:attrNameLst>
+                                          <p:attrName>style.visibility</p:attrName>
+                                        </p:attrNameLst>
+                                      </p:cBhvr>
+                                      <p:to>
+                                        <p:strVal val="visible"/>
+                                      </p:to>
+                                    </p:set>
+                                    <p:anim calcmode="lin" valueType="num">
+                                      <p:cBhvr additive="base">
+                                        <p:cTn id="7" dur="1000" fill="hold"/>
+                                        <p:tgtEl>
+                                          <p:spTgt spid="3">
+                                            <p:txEl>
+                                              <p:pRg st="0" end="0"/>
+                                            </p:txEl>
+                                          </p:spTgt>
+                                        </p:tgtEl>
+                                        <p:attrNameLst>
+                                          <p:attrName>ppt_x</p:attrName>
+                                        </p:attrNameLst>
+                                      </p:cBhvr>
+                                      <p:tavLst>
+                                        <p:tav tm="0">
+                                          <p:val>
+                                            <p:strVal val="#ppt_x"/>
+                                          </p:val>
+                                        </p:tav>
+                                        <p:tav tm="100000">
+                                          <p:val>
+                                            <p:strVal val="#ppt_x"/>
+                                          </p:val>
+                                        </p:tav>
+                                      </p:tavLst>
+                                    </p:anim>
+                                    <p:anim calcmode="lin" valueType="num">
+                                      <p:cBhvr additive="base">
+                                        <p:cTn id="8" dur="1000" fill="hold"/>
+                                        <p:tgtEl>
+                                          <p:spTgt spid="3">
+                                            <p:txEl>
+                                              <p:pRg st="0" end="0"/>
+                                            </p:txEl>
+                                          </p:spTgt>
+                                        </p:tgtEl>
+                                        <p:attrNameLst>
+                                          <p:attrName>ppt_y</p:attrName>
+                                        </p:attrNameLst>
+                                      </p:cBhvr>
+                                      <p:tavLst>
+                                        <p:tav tm="0">
+                                          <p:val>
+                                            <p:strVal val="1+#ppt_h/2"/>
+                                          </p:val>
+                                        </p:tav>
+                                        <p:tav tm="100000">
+                                          <p:val>
+                                            <p:strVal val="#ppt_y"/>
+                                          </p:val>
+                                        </p:tav>
+                                      </p:tavLst>
+                                    </p:anim>
+                                  </p:childTnLst>
+                                </p:cTn>
+                              </p:par>
+                            </p:childTnLst>
+                          </p:cTn>
+                        </p:par>
+                        <p:par>
+                          <p:cTn id="9" fill="hold">
+                            <p:stCondLst>
+                              <p:cond delay="1000"/>
+                            </p:stCondLst>
+                            <p:childTnLst>
+                              <p:par>
+                                <p:cTn id="10" presetID="2" presetClass="entr" presetSubtype="4" fill="hold" grpId="0" nodeType="afterEffect">
+                                  <p:stCondLst>
+                                    <p:cond delay="2000"/>
+                                  </p:stCondLst>
+                                  <p:childTnLst>
+                                    <p:set>
+                                      <p:cBhvr>
+                                        <p:cTn id="11" dur="1" fill="hold">
+                                          <p:stCondLst>
+                                            <p:cond delay="0"/>
+                                          </p:stCondLst>
+                                        </p:cTn>
+                                        <p:tgtEl>
+                                          <p:spTgt spid="3">
+                                            <p:txEl>
+                                              <p:pRg st="1" end="1"/>
+                                            </p:txEl>
+                                          </p:spTgt>
+                                        </p:tgtEl>
+                                        <p:attrNameLst>
+                                          <p:attrName>style.visibility</p:attrName>
+                                        </p:attrNameLst>
+                                      </p:cBhvr>
+                                      <p:to>
+                                        <p:strVal val="visible"/>
+                                      </p:to>
+                                    </p:set>
+                                    <p:anim calcmode="lin" valueType="num">
+                                      <p:cBhvr additive="base">
+                                        <p:cTn id="12" dur="1000" fill="hold"/>
+                                        <p:tgtEl>
+                                          <p:spTgt spid="3">
+                                            <p:txEl>
+                                              <p:pRg st="1" end="1"/>
+                                            </p:txEl>
+                                          </p:spTgt>
+                                        </p:tgtEl>
+                                        <p:attrNameLst>
+                                          <p:attrName>ppt_x</p:attrName>
+                                        </p:attrNameLst>
+                                      </p:cBhvr>
+                                      <p:tavLst>
+                                        <p:tav tm="0">
+                                          <p:val>
+                                            <p:strVal val="#ppt_x"/>
+                                          </p:val>
+                                        </p:tav>
+                                        <p:tav tm="100000">
+                                          <p:val>
+                                            <p:strVal val="#ppt_x"/>
+                                          </p:val>
+                                        </p:tav>
+                                      </p:tavLst>
+                                    </p:anim>
+                                    <p:anim calcmode="lin" valueType="num">
+                                      <p:cBhvr additive="base">
+                                        <p:cTn id="13" dur="1000" fill="hold"/>
+                                        <p:tgtEl>
+                                          <p:spTgt spid="3">
+                                            <p:txEl>
+                                              <p:pRg st="1" end="1"/>
+                                            </p:txEl>
+                                          </p:spTgt>
+                                        </p:tgtEl>
+                                        <p:attrNameLst>
+                                          <p:attrName>ppt_y</p:attrName>
+                                        </p:attrNameLst>
+                                      </p:cBhvr>
+                                      <p:tavLst>
+                                        <p:tav tm="0">
+                                          <p:val>
+                                            <p:strVal val="1+#ppt_h/2"/>
+                                          </p:val>
+                                        </p:tav>
+                                        <p:tav tm="100000">
+                                          <p:val>
+                                            <p:strVal val="#ppt_y"/>
+                                          </p:val>
+                                        </p:tav>
+                                      </p:tavLst>
+                                    </p:anim>
+                                  </p:childTnLst>
+                                </p:cTn>
+                              </p:par>
+                            </p:childTnLst>
+                          </p:cTn>
+                        </p:par>
+                        <p:par>
+                          <p:cTn id="14" fill="hold">
+                            <p:stCondLst>
+                              <p:cond delay="4000"/>
+                            </p:stCondLst>
+                            <p:childTnLst>
+                              <p:par>
+                                <p:cTn id="15" presetID="2" presetClass="entr" presetSubtype="4" fill="hold" nodeType="afterEffect">
+                                  <p:stCondLst>
+                                    <p:cond delay="2000"/>
+                                  </p:stCondLst>
+                                  <p:childTnLst>
+                                    <p:set>
+                                      <p:cBhvr>
+                                        <p:cTn id="16" dur="1" fill="hold">
+                                          <p:stCondLst>
+                                            <p:cond delay="0"/>
+                                          </p:stCondLst>
+                                        </p:cTn>
+                                        <p:tgtEl>
+                                          <p:spTgt spid="7"/>
+                                        </p:tgtEl>
+                                        <p:attrNameLst>
+                                          <p:attrName>style.visibility</p:attrName>
+                                        </p:attrNameLst>
+                                      </p:cBhvr>
+                                      <p:to>
+                                        <p:strVal val="visible"/>
+                                      </p:to>
+                                    </p:set>
+                                    <p:anim calcmode="lin" valueType="num">
+                                      <p:cBhvr additive="base">
+                                        <p:cTn id="17" dur="1000" fill="hold"/>
+                                        <p:tgtEl>
+                                          <p:spTgt spid="7"/>
+                                        </p:tgtEl>
+                                        <p:attrNameLst>
+                                          <p:attrName>ppt_x</p:attrName>
+                                        </p:attrNameLst>
+                                      </p:cBhvr>
+                                      <p:tavLst>
+                                        <p:tav tm="0">
+                                          <p:val>
+                                            <p:strVal val="#ppt_x"/>
+                                          </p:val>
+                                        </p:tav>
+                                        <p:tav tm="100000">
+                                          <p:val>
+                                            <p:strVal val="#ppt_x"/>
+                                          </p:val>
+                                        </p:tav>
+                                      </p:tavLst>
+                                    </p:anim>
+                                    <p:anim calcmode="lin" valueType="num">
+                                      <p:cBhvr additive="base">
+                                        <p:cTn id="18" dur="1000" fill="hold"/>
+                                        <p:tgtEl>
+                                          <p:spTgt spid="7"/>
+                                        </p:tgtEl>
+                                        <p:attrNameLst>
+                                          <p:attrName>ppt_y</p:attrName>
+                                        </p:attrNameLst>
+                                      </p:cBhvr>
+                                      <p:tavLst>
+                                        <p:tav tm="0">
+                                          <p:val>
+                                            <p:strVal val="1+#ppt_h/2"/>
+                                          </p:val>
+                                        </p:tav>
+                                        <p:tav tm="100000">
+                                          <p:val>
+                                            <p:strVal val="#ppt_y"/>
+                                          </p:val>
+                                        </p:tav>
+                                      </p:tavLst>
+                                    </p:anim>
+                                  </p:childTnLst>
+                                </p:cTn>
+                              </p:par>
+                            </p:childTnLst>
+                          </p:cTn>
+                        </p:par>
+                      </p:childTnLst>
+                    </p:cTn>
+                  </p:par>
+                </p:childTnLst>
+              </p:cTn>
+              <p:prevCondLst>
+                <p:cond evt="onPrev" delay="0">
+                  <p:tgtEl>
+                    <p:sldTgt/>
+                  </p:tgtEl>
+                </p:cond>
+              </p:prevCondLst>
+              <p:nextCondLst>
+                <p:cond evt="onNext" delay="0">
+                  <p:tgtEl>
+                    <p:sldTgt/>
+                  </p:tgtEl>
+                </p:cond>
+              </p:nextCondLst>
+            </p:seq>
+          </p:childTnLst>
+        </p:cTn>
+      </p:par>
+    </p:tnLst>
+    <p:bldLst>
+      <p:bldP spid="3" grpId="0" build="p"/>
+    </p:bldLst>
+  </p:timing>
+</p:sld>
+</file>
+
+<file path=ppt/slides/slide12.xml><?xml version="1.0" encoding="utf-8"?>
+<p:sld xmlns:a="http://schemas.openxmlformats.org/drawingml/2006/main" xmlns:r="http://schemas.openxmlformats.org/officeDocument/2006/relationships" xmlns:p="http://schemas.openxmlformats.org/presentationml/2006/main">
+  <p:cSld>
+    <p:spTree>
+      <p:nvGrpSpPr>
+        <p:cNvPr id="1" name=""/>
+        <p:cNvGrpSpPr/>
+        <p:nvPr/>
+      </p:nvGrpSpPr>
+      <p:grpSpPr>
+        <a:xfrm>
+          <a:off x="0" y="0"/>
+          <a:ext cx="0" cy="0"/>
+          <a:chOff x="0" y="0"/>
+          <a:chExt cx="0" cy="0"/>
+        </a:xfrm>
+      </p:grpSpPr>
+      <p:sp>
+        <p:nvSpPr>
+          <p:cNvPr id="2" name="Cím 1">
+            <a:extLst>
+              <a:ext uri="{FF2B5EF4-FFF2-40B4-BE49-F238E27FC236}">
+                <a16:creationId xmlns:a16="http://schemas.microsoft.com/office/drawing/2014/main" id="{4977722A-EC43-8CBC-09DA-2598D9F96E59}"/>
+              </a:ext>
+            </a:extLst>
+          </p:cNvPr>
+          <p:cNvSpPr>
+            <a:spLocks noGrp="1"/>
+          </p:cNvSpPr>
+          <p:nvPr>
+            <p:ph type="title"/>
+          </p:nvPr>
+        </p:nvSpPr>
+        <p:spPr/>
+        <p:txBody>
+          <a:bodyPr/>
+          <a:lstStyle/>
+          <a:p>
+            <a:r>
+              <a:rPr lang="hu-HU" sz="4400" err="1">
+                <a:latin typeface="Bahnschrift SemiBold"/>
+              </a:rPr>
+              <a:t>Pull</a:t>
+            </a:r>
+            <a:endParaRPr lang="hu-HU" sz="4400" err="1"/>
+          </a:p>
+        </p:txBody>
+      </p:sp>
+      <p:sp>
+        <p:nvSpPr>
+          <p:cNvPr id="3" name="Tartalom helye 2">
+            <a:extLst>
+              <a:ext uri="{FF2B5EF4-FFF2-40B4-BE49-F238E27FC236}">
+                <a16:creationId xmlns:a16="http://schemas.microsoft.com/office/drawing/2014/main" id="{2D396B7E-FE12-B074-41B8-52F0D728ABF9}"/>
+              </a:ext>
+            </a:extLst>
+          </p:cNvPr>
+          <p:cNvSpPr>
+            <a:spLocks noGrp="1"/>
+          </p:cNvSpPr>
+          <p:nvPr>
+            <p:ph idx="1"/>
+          </p:nvPr>
+        </p:nvSpPr>
+        <p:spPr>
+          <a:xfrm>
+            <a:off x="5109983" y="777688"/>
+            <a:ext cx="6265139" cy="2320151"/>
+          </a:xfrm>
+        </p:spPr>
+        <p:txBody>
+          <a:bodyPr>
+            <a:normAutofit/>
+          </a:bodyPr>
+          <a:lstStyle/>
+          <a:p>
+            <a:r>
+              <a:rPr lang="hu-HU" sz="3200">
+                <a:latin typeface="Bahnschrift"/>
+              </a:rPr>
+              <a:t>A GitHub projekt könyvtárából letölti a helyi könyvtárba</a:t>
+            </a:r>
+          </a:p>
+          <a:p>
+            <a:r>
+              <a:rPr lang="hu-HU" sz="3200">
+                <a:latin typeface="Bahnschrift"/>
+              </a:rPr>
+              <a:t>Parancs: "</a:t>
+            </a:r>
+            <a:r>
+              <a:rPr lang="hu-HU" sz="3200" err="1">
+                <a:latin typeface="Bahnschrift"/>
+              </a:rPr>
+              <a:t>git</a:t>
+            </a:r>
+            <a:r>
+              <a:rPr lang="hu-HU" sz="3200">
+                <a:latin typeface="Bahnschrift"/>
+              </a:rPr>
+              <a:t> </a:t>
+            </a:r>
+            <a:r>
+              <a:rPr lang="hu-HU" sz="3200" err="1">
+                <a:latin typeface="Bahnschrift"/>
+              </a:rPr>
+              <a:t>pull</a:t>
+            </a:r>
+            <a:r>
+              <a:rPr lang="hu-HU" sz="3200">
+                <a:latin typeface="Bahnschrift"/>
+              </a:rPr>
+              <a:t> </a:t>
+            </a:r>
+            <a:r>
+              <a:rPr lang="hu-HU" sz="3200" err="1">
+                <a:latin typeface="Bahnschrift"/>
+              </a:rPr>
+              <a:t>origin</a:t>
+            </a:r>
+            <a:r>
+              <a:rPr lang="hu-HU" sz="3200">
+                <a:latin typeface="Bahnschrift"/>
+              </a:rPr>
+              <a:t>"</a:t>
+            </a:r>
+            <a:endParaRPr lang="hu-HU" sz="3200"/>
+          </a:p>
+          <a:p>
+            <a:endParaRPr lang="hu-HU" sz="3200"/>
+          </a:p>
+        </p:txBody>
+      </p:sp>
+      <p:sp>
+        <p:nvSpPr>
+          <p:cNvPr id="4" name="Szöveg helye 3">
+            <a:extLst>
+              <a:ext uri="{FF2B5EF4-FFF2-40B4-BE49-F238E27FC236}">
+                <a16:creationId xmlns:a16="http://schemas.microsoft.com/office/drawing/2014/main" id="{4E949E2C-9989-A5CA-D52E-7F4638AEA676}"/>
+              </a:ext>
+            </a:extLst>
+          </p:cNvPr>
+          <p:cNvSpPr>
+            <a:spLocks noGrp="1"/>
+          </p:cNvSpPr>
+          <p:nvPr>
+            <p:ph type="body" sz="half" idx="2"/>
+          </p:nvPr>
+        </p:nvSpPr>
+        <p:spPr/>
+        <p:txBody>
+          <a:bodyPr vert="horz" lIns="91440" tIns="45720" rIns="91440" bIns="45720" rtlCol="0" anchor="t">
+            <a:normAutofit/>
+          </a:bodyPr>
+          <a:lstStyle/>
+          <a:p>
+            <a:r>
+              <a:rPr lang="hu-HU" sz="3200">
+                <a:latin typeface="Bahnschrift"/>
+              </a:rPr>
+              <a:t>Letöltés</a:t>
+            </a:r>
+            <a:endParaRPr lang="hu-HU" sz="3200"/>
+          </a:p>
+        </p:txBody>
+      </p:sp>
+      <p:pic>
+        <p:nvPicPr>
+          <p:cNvPr id="5" name="Kép 4" descr="A képen szöveg, képernyőkép, Betűtípus, szoftver látható&#10;&#10;Automatikusan generált leírás">
+            <a:extLst>
+              <a:ext uri="{FF2B5EF4-FFF2-40B4-BE49-F238E27FC236}">
+                <a16:creationId xmlns:a16="http://schemas.microsoft.com/office/drawing/2014/main" id="{5E3CBA28-561E-FF93-8258-6E80E0293567}"/>
+              </a:ext>
+            </a:extLst>
+          </p:cNvPr>
+          <p:cNvPicPr>
+            <a:picLocks noChangeAspect="1"/>
+          </p:cNvPicPr>
+          <p:nvPr/>
+        </p:nvPicPr>
+        <p:blipFill>
+          <a:blip r:embed="rId2"/>
+          <a:stretch>
+            <a:fillRect/>
+          </a:stretch>
+        </p:blipFill>
+        <p:spPr>
+          <a:xfrm>
+            <a:off x="5113580" y="3088903"/>
+            <a:ext cx="6263299" cy="2314575"/>
+          </a:xfrm>
+          <a:prstGeom prst="rect">
+            <a:avLst/>
+          </a:prstGeom>
+          <a:ln w="127000" cap="sq">
+            <a:solidFill>
+              <a:srgbClr val="000000"/>
+            </a:solidFill>
+            <a:miter lim="800000"/>
+          </a:ln>
+          <a:effectLst>
+            <a:outerShdw blurRad="57150" dist="50800" dir="2700000" algn="tl" rotWithShape="0">
+              <a:srgbClr val="000000">
+                <a:alpha val="40000"/>
+              </a:srgbClr>
+            </a:outerShdw>
+          </a:effectLst>
+        </p:spPr>
+      </p:pic>
+    </p:spTree>
+    <p:extLst>
+      <p:ext uri="{BB962C8B-B14F-4D97-AF65-F5344CB8AC3E}">
+        <p14:creationId xmlns:p14="http://schemas.microsoft.com/office/powerpoint/2010/main" val="2124038509"/>
+      </p:ext>
+    </p:extLst>
+  </p:cSld>
+  <p:clrMapOvr>
+    <a:masterClrMapping/>
+  </p:clrMapOvr>
+  <p:transition spd="slow">
+    <p:cover/>
+  </p:transition>
+  <p:timing>
+    <p:tnLst>
+      <p:par>
+        <p:cTn id="1" dur="indefinite" restart="never" nodeType="tmRoot">
+          <p:childTnLst>
+            <p:seq concurrent="1" nextAc="seek">
+              <p:cTn id="2" dur="indefinite" nodeType="mainSeq">
+                <p:childTnLst>
+                  <p:par>
+                    <p:cTn id="3" fill="hold">
+                      <p:stCondLst>
+                        <p:cond delay="indefinite"/>
+                      </p:stCondLst>
+                      <p:childTnLst>
+                        <p:par>
+                          <p:cTn id="4" fill="hold">
+                            <p:stCondLst>
+                              <p:cond delay="0"/>
+                            </p:stCondLst>
+                            <p:childTnLst>
+                              <p:par>
+                                <p:cTn id="5" presetID="2" presetClass="entr" presetSubtype="4" fill="hold" grpId="0" nodeType="clickEffect">
+                                  <p:stCondLst>
+                                    <p:cond delay="0"/>
+                                  </p:stCondLst>
+                                  <p:childTnLst>
+                                    <p:set>
+                                      <p:cBhvr>
+                                        <p:cTn id="6" dur="1" fill="hold">
+                                          <p:stCondLst>
+                                            <p:cond delay="0"/>
+                                          </p:stCondLst>
+                                        </p:cTn>
+                                        <p:tgtEl>
+                                          <p:spTgt spid="3">
+                                            <p:txEl>
+                                              <p:pRg st="0" end="0"/>
+                                            </p:txEl>
+                                          </p:spTgt>
+                                        </p:tgtEl>
+                                        <p:attrNameLst>
+                                          <p:attrName>style.visibility</p:attrName>
+                                        </p:attrNameLst>
+                                      </p:cBhvr>
+                                      <p:to>
+                                        <p:strVal val="visible"/>
+                                      </p:to>
+                                    </p:set>
+                                    <p:anim calcmode="lin" valueType="num">
+                                      <p:cBhvr additive="base">
+                                        <p:cTn id="7" dur="1000" fill="hold"/>
+                                        <p:tgtEl>
+                                          <p:spTgt spid="3">
+                                            <p:txEl>
+                                              <p:pRg st="0" end="0"/>
+                                            </p:txEl>
+                                          </p:spTgt>
+                                        </p:tgtEl>
+                                        <p:attrNameLst>
+                                          <p:attrName>ppt_x</p:attrName>
+                                        </p:attrNameLst>
+                                      </p:cBhvr>
+                                      <p:tavLst>
+                                        <p:tav tm="0">
+                                          <p:val>
+                                            <p:strVal val="#ppt_x"/>
+                                          </p:val>
+                                        </p:tav>
+                                        <p:tav tm="100000">
+                                          <p:val>
+                                            <p:strVal val="#ppt_x"/>
+                                          </p:val>
+                                        </p:tav>
+                                      </p:tavLst>
+                                    </p:anim>
+                                    <p:anim calcmode="lin" valueType="num">
+                                      <p:cBhvr additive="base">
+                                        <p:cTn id="8" dur="1000" fill="hold"/>
+                                        <p:tgtEl>
+                                          <p:spTgt spid="3">
+                                            <p:txEl>
+                                              <p:pRg st="0" end="0"/>
+                                            </p:txEl>
+                                          </p:spTgt>
+                                        </p:tgtEl>
+                                        <p:attrNameLst>
+                                          <p:attrName>ppt_y</p:attrName>
+                                        </p:attrNameLst>
+                                      </p:cBhvr>
+                                      <p:tavLst>
+                                        <p:tav tm="0">
+                                          <p:val>
+                                            <p:strVal val="1+#ppt_h/2"/>
+                                          </p:val>
+                                        </p:tav>
+                                        <p:tav tm="100000">
+                                          <p:val>
+                                            <p:strVal val="#ppt_y"/>
+                                          </p:val>
+                                        </p:tav>
+                                      </p:tavLst>
+                                    </p:anim>
+                                  </p:childTnLst>
+                                </p:cTn>
+                              </p:par>
+                            </p:childTnLst>
+                          </p:cTn>
+                        </p:par>
+                        <p:par>
+                          <p:cTn id="9" fill="hold">
+                            <p:stCondLst>
+                              <p:cond delay="1000"/>
+                            </p:stCondLst>
+                            <p:childTnLst>
+                              <p:par>
+                                <p:cTn id="10" presetID="2" presetClass="entr" presetSubtype="4" fill="hold" grpId="0" nodeType="afterEffect">
+                                  <p:stCondLst>
+                                    <p:cond delay="2000"/>
+                                  </p:stCondLst>
+                                  <p:childTnLst>
+                                    <p:set>
+                                      <p:cBhvr>
+                                        <p:cTn id="11" dur="1" fill="hold">
+                                          <p:stCondLst>
+                                            <p:cond delay="0"/>
+                                          </p:stCondLst>
+                                        </p:cTn>
+                                        <p:tgtEl>
+                                          <p:spTgt spid="3">
+                                            <p:txEl>
+                                              <p:pRg st="1" end="1"/>
+                                            </p:txEl>
+                                          </p:spTgt>
+                                        </p:tgtEl>
+                                        <p:attrNameLst>
+                                          <p:attrName>style.visibility</p:attrName>
+                                        </p:attrNameLst>
+                                      </p:cBhvr>
+                                      <p:to>
+                                        <p:strVal val="visible"/>
+                                      </p:to>
+                                    </p:set>
+                                    <p:anim calcmode="lin" valueType="num">
+                                      <p:cBhvr additive="base">
+                                        <p:cTn id="12" dur="1000" fill="hold"/>
+                                        <p:tgtEl>
+                                          <p:spTgt spid="3">
+                                            <p:txEl>
+                                              <p:pRg st="1" end="1"/>
+                                            </p:txEl>
+                                          </p:spTgt>
+                                        </p:tgtEl>
+                                        <p:attrNameLst>
+                                          <p:attrName>ppt_x</p:attrName>
+                                        </p:attrNameLst>
+                                      </p:cBhvr>
+                                      <p:tavLst>
+                                        <p:tav tm="0">
+                                          <p:val>
+                                            <p:strVal val="#ppt_x"/>
+                                          </p:val>
+                                        </p:tav>
+                                        <p:tav tm="100000">
+                                          <p:val>
+                                            <p:strVal val="#ppt_x"/>
+                                          </p:val>
+                                        </p:tav>
+                                      </p:tavLst>
+                                    </p:anim>
+                                    <p:anim calcmode="lin" valueType="num">
+                                      <p:cBhvr additive="base">
+                                        <p:cTn id="13" dur="1000" fill="hold"/>
+                                        <p:tgtEl>
+                                          <p:spTgt spid="3">
+                                            <p:txEl>
+                                              <p:pRg st="1" end="1"/>
+                                            </p:txEl>
+                                          </p:spTgt>
+                                        </p:tgtEl>
+                                        <p:attrNameLst>
+                                          <p:attrName>ppt_y</p:attrName>
+                                        </p:attrNameLst>
+                                      </p:cBhvr>
+                                      <p:tavLst>
+                                        <p:tav tm="0">
+                                          <p:val>
+                                            <p:strVal val="1+#ppt_h/2"/>
+                                          </p:val>
+                                        </p:tav>
+                                        <p:tav tm="100000">
+                                          <p:val>
+                                            <p:strVal val="#ppt_y"/>
+                                          </p:val>
+                                        </p:tav>
+                                      </p:tavLst>
+                                    </p:anim>
+                                  </p:childTnLst>
+                                </p:cTn>
+                              </p:par>
+                            </p:childTnLst>
+                          </p:cTn>
+                        </p:par>
+                        <p:par>
+                          <p:cTn id="14" fill="hold">
+                            <p:stCondLst>
+                              <p:cond delay="4000"/>
+                            </p:stCondLst>
+                            <p:childTnLst>
+                              <p:par>
+                                <p:cTn id="15" presetID="2" presetClass="entr" presetSubtype="4" fill="hold" nodeType="afterEffect">
+                                  <p:stCondLst>
+                                    <p:cond delay="2000"/>
+                                  </p:stCondLst>
+                                  <p:childTnLst>
+                                    <p:set>
+                                      <p:cBhvr>
+                                        <p:cTn id="16" dur="1" fill="hold">
+                                          <p:stCondLst>
+                                            <p:cond delay="0"/>
+                                          </p:stCondLst>
+                                        </p:cTn>
+                                        <p:tgtEl>
+                                          <p:spTgt spid="5"/>
+                                        </p:tgtEl>
+                                        <p:attrNameLst>
+                                          <p:attrName>style.visibility</p:attrName>
+                                        </p:attrNameLst>
+                                      </p:cBhvr>
+                                      <p:to>
+                                        <p:strVal val="visible"/>
+                                      </p:to>
+                                    </p:set>
+                                    <p:anim calcmode="lin" valueType="num">
+                                      <p:cBhvr additive="base">
+                                        <p:cTn id="17" dur="1000" fill="hold"/>
+                                        <p:tgtEl>
+                                          <p:spTgt spid="5"/>
+                                        </p:tgtEl>
+                                        <p:attrNameLst>
+                                          <p:attrName>ppt_x</p:attrName>
+                                        </p:attrNameLst>
+                                      </p:cBhvr>
+                                      <p:tavLst>
+                                        <p:tav tm="0">
+                                          <p:val>
+                                            <p:strVal val="#ppt_x"/>
+                                          </p:val>
+                                        </p:tav>
+                                        <p:tav tm="100000">
+                                          <p:val>
+                                            <p:strVal val="#ppt_x"/>
+                                          </p:val>
+                                        </p:tav>
+                                      </p:tavLst>
+                                    </p:anim>
+                                    <p:anim calcmode="lin" valueType="num">
+                                      <p:cBhvr additive="base">
+                                        <p:cTn id="18" dur="1000" fill="hold"/>
+                                        <p:tgtEl>
+                                          <p:spTgt spid="5"/>
+                                        </p:tgtEl>
+                                        <p:attrNameLst>
+                                          <p:attrName>ppt_y</p:attrName>
+                                        </p:attrNameLst>
+                                      </p:cBhvr>
+                                      <p:tavLst>
+                                        <p:tav tm="0">
+                                          <p:val>
+                                            <p:strVal val="1+#ppt_h/2"/>
+                                          </p:val>
+                                        </p:tav>
+                                        <p:tav tm="100000">
+                                          <p:val>
+                                            <p:strVal val="#ppt_y"/>
+                                          </p:val>
+                                        </p:tav>
+                                      </p:tavLst>
+                                    </p:anim>
+                                  </p:childTnLst>
+                                </p:cTn>
+                              </p:par>
+                            </p:childTnLst>
+                          </p:cTn>
+                        </p:par>
+                      </p:childTnLst>
+                    </p:cTn>
+                  </p:par>
+                </p:childTnLst>
+              </p:cTn>
+              <p:prevCondLst>
+                <p:cond evt="onPrev" delay="0">
+                  <p:tgtEl>
+                    <p:sldTgt/>
+                  </p:tgtEl>
+                </p:cond>
+              </p:prevCondLst>
+              <p:nextCondLst>
+                <p:cond evt="onNext" delay="0">
+                  <p:tgtEl>
+                    <p:sldTgt/>
+                  </p:tgtEl>
+                </p:cond>
+              </p:nextCondLst>
+            </p:seq>
+          </p:childTnLst>
+        </p:cTn>
+      </p:par>
+    </p:tnLst>
+    <p:bldLst>
+      <p:bldP spid="3" grpId="0" build="p"/>
+    </p:bldLst>
+  </p:timing>
+</p:sld>
+</file>
+
+<file path=ppt/slides/slide13.xml><?xml version="1.0" encoding="utf-8"?>
+<p:sld xmlns:a="http://schemas.openxmlformats.org/drawingml/2006/main" xmlns:r="http://schemas.openxmlformats.org/officeDocument/2006/relationships" xmlns:p="http://schemas.openxmlformats.org/presentationml/2006/main">
+  <p:cSld>
+    <p:spTree>
+      <p:nvGrpSpPr>
+        <p:cNvPr id="1" name=""/>
+        <p:cNvGrpSpPr/>
+        <p:nvPr/>
+      </p:nvGrpSpPr>
+      <p:grpSpPr>
+        <a:xfrm>
+          <a:off x="0" y="0"/>
+          <a:ext cx="0" cy="0"/>
+          <a:chOff x="0" y="0"/>
+          <a:chExt cx="0" cy="0"/>
+        </a:xfrm>
+      </p:grpSpPr>
+      <p:sp>
+        <p:nvSpPr>
+          <p:cNvPr id="2" name="Cím 1"/>
+          <p:cNvSpPr>
+            <a:spLocks noGrp="1"/>
+          </p:cNvSpPr>
+          <p:nvPr>
+            <p:ph type="title"/>
+          </p:nvPr>
+        </p:nvSpPr>
+        <p:spPr/>
+        <p:txBody>
+          <a:bodyPr/>
+          <a:lstStyle/>
+          <a:p>
+            <a:r>
+              <a:rPr lang="hu-HU"/>
+              <a:t>Források</a:t>
+            </a:r>
+          </a:p>
+        </p:txBody>
+      </p:sp>
+      <p:sp>
+        <p:nvSpPr>
+          <p:cNvPr id="3" name="Tartalom helye 2"/>
+          <p:cNvSpPr>
+            <a:spLocks noGrp="1"/>
+          </p:cNvSpPr>
+          <p:nvPr>
+            <p:ph idx="1"/>
+          </p:nvPr>
+        </p:nvSpPr>
+        <p:spPr/>
+        <p:txBody>
+          <a:bodyPr/>
+          <a:lstStyle/>
+          <a:p>
+            <a:r>
+              <a:rPr lang="hu-HU">
+                <a:hlinkClick r:id="rId2"/>
+              </a:rPr>
+              <a:t>https://hu.wikipedia.org/wiki/Linus_Torvalds</a:t>
+            </a:r>
+            <a:r>
+              <a:rPr lang="hu-HU"/>
+              <a:t> | 2. Dia</a:t>
+            </a:r>
+          </a:p>
+          <a:p>
+            <a:r>
+              <a:rPr lang="hu-HU">
+                <a:latin typeface="Bahnschrift"/>
+                <a:hlinkClick r:id="rId3"/>
+              </a:rPr>
+              <a:t>https://www.w3schools.com/git/git_getstarted.asp</a:t>
+            </a:r>
+            <a:r>
+              <a:rPr lang="hu-HU">
+                <a:latin typeface="Bahnschrift"/>
+              </a:rPr>
+              <a:t> | 4, 6, 9, 11, 12 Dia</a:t>
+            </a:r>
+            <a:endParaRPr lang="hu-HU"/>
+          </a:p>
+        </p:txBody>
+      </p:sp>
+      <p:sp>
+        <p:nvSpPr>
+          <p:cNvPr id="4" name="Szöveg helye 3"/>
+          <p:cNvSpPr>
+            <a:spLocks noGrp="1"/>
+          </p:cNvSpPr>
+          <p:nvPr>
+            <p:ph type="body" sz="half" idx="2"/>
+          </p:nvPr>
+        </p:nvSpPr>
+        <p:spPr>
+          <a:xfrm>
+            <a:off x="888631" y="3575324"/>
+            <a:ext cx="3501197" cy="1226025"/>
+          </a:xfrm>
+        </p:spPr>
+        <p:txBody>
+          <a:bodyPr/>
+          <a:lstStyle/>
+          <a:p>
+            <a:r>
+              <a:rPr lang="hu-HU"/>
+              <a:t>Letöltés ideje</a:t>
+            </a:r>
+          </a:p>
+          <a:p>
+            <a:r>
+              <a:rPr lang="hu-HU"/>
+              <a:t>2024.10.21.</a:t>
+            </a:r>
+          </a:p>
+        </p:txBody>
+      </p:sp>
+    </p:spTree>
+    <p:extLst>
+      <p:ext uri="{BB962C8B-B14F-4D97-AF65-F5344CB8AC3E}">
+        <p14:creationId xmlns:p14="http://schemas.microsoft.com/office/powerpoint/2010/main" val="3317459765"/>
+      </p:ext>
+    </p:extLst>
+  </p:cSld>
+  <p:clrMapOvr>
+    <a:masterClrMapping/>
+  </p:clrMapOvr>
+  <p:transition spd="slow">
+    <p:cover/>
+  </p:transition>
 </p:sld>
 </file>
 
@@ -16236,10 +17963,1199 @@
       </p:grpSpPr>
       <p:sp>
         <p:nvSpPr>
-          <p:cNvPr id="2" name="Tartalom helye 1">
+          <p:cNvPr id="2" name="Tartalom helye 1"/>
+          <p:cNvSpPr>
+            <a:spLocks noGrp="1"/>
+          </p:cNvSpPr>
+          <p:nvPr>
+            <p:ph idx="1"/>
+          </p:nvPr>
+        </p:nvSpPr>
+        <p:spPr>
+          <a:xfrm>
+            <a:off x="4971909" y="519878"/>
+            <a:ext cx="6281873" cy="3070084"/>
+          </a:xfrm>
+        </p:spPr>
+        <p:txBody>
+          <a:bodyPr>
+            <a:normAutofit/>
+          </a:bodyPr>
+          <a:lstStyle/>
+          <a:p>
+            <a:r>
+              <a:rPr lang="hu-HU" sz="3200"/>
+              <a:t>Egy nyílt forráskódú verziókezelő szoftver</a:t>
+            </a:r>
+          </a:p>
+          <a:p>
+            <a:r>
+              <a:rPr lang="hu-HU" sz="3200"/>
+              <a:t>Eredeti fejlesztője Linus </a:t>
+            </a:r>
+            <a:r>
+              <a:rPr lang="hu-HU" sz="3200" err="1"/>
+              <a:t>Torvalds</a:t>
+            </a:r>
+            <a:endParaRPr lang="hu-HU" sz="3200"/>
+          </a:p>
+        </p:txBody>
+      </p:sp>
+      <p:sp>
+        <p:nvSpPr>
+          <p:cNvPr id="3" name="Cím 2"/>
+          <p:cNvSpPr>
+            <a:spLocks noGrp="1"/>
+          </p:cNvSpPr>
+          <p:nvPr>
+            <p:ph type="title"/>
+          </p:nvPr>
+        </p:nvSpPr>
+        <p:spPr/>
+        <p:txBody>
+          <a:bodyPr/>
+          <a:lstStyle/>
+          <a:p>
+            <a:r>
+              <a:rPr lang="hu-HU"/>
+              <a:t>Mi az a </a:t>
+            </a:r>
+            <a:r>
+              <a:rPr lang="hu-HU" err="1"/>
+              <a:t>Git</a:t>
+            </a:r>
+            <a:r>
+              <a:rPr lang="hu-HU"/>
+              <a:t>?</a:t>
+            </a:r>
+          </a:p>
+        </p:txBody>
+      </p:sp>
+      <p:pic>
+        <p:nvPicPr>
+          <p:cNvPr id="1030" name="Picture 6" descr="undefined"/>
+          <p:cNvPicPr>
+            <a:picLocks noChangeAspect="1" noChangeArrowheads="1"/>
+          </p:cNvPicPr>
+          <p:nvPr/>
+        </p:nvPicPr>
+        <p:blipFill>
+          <a:blip r:embed="rId2">
+            <a:extLst>
+              <a:ext uri="{28A0092B-C50C-407E-A947-70E740481C1C}">
+                <a14:useLocalDpi xmlns:a14="http://schemas.microsoft.com/office/drawing/2010/main" val="0"/>
+              </a:ext>
+            </a:extLst>
+          </a:blip>
+          <a:srcRect/>
+          <a:stretch>
+            <a:fillRect/>
+          </a:stretch>
+        </p:blipFill>
+        <p:spPr bwMode="auto">
+          <a:xfrm>
+            <a:off x="1551496" y="3760508"/>
+            <a:ext cx="2070082" cy="2880000"/>
+          </a:xfrm>
+          <a:prstGeom prst="rect">
+            <a:avLst/>
+          </a:prstGeom>
+          <a:ln w="88900" cap="sq" cmpd="thickThin">
+            <a:solidFill>
+              <a:srgbClr val="000000"/>
+            </a:solidFill>
+            <a:prstDash val="solid"/>
+            <a:miter lim="800000"/>
+          </a:ln>
+          <a:effectLst>
+            <a:innerShdw blurRad="76200">
+              <a:srgbClr val="000000"/>
+            </a:innerShdw>
+          </a:effectLst>
+          <a:extLst>
+            <a:ext uri="{909E8E84-426E-40DD-AFC4-6F175D3DCCD1}">
+              <a14:hiddenFill xmlns:a14="http://schemas.microsoft.com/office/drawing/2010/main">
+                <a:solidFill>
+                  <a:srgbClr val="FFFFFF"/>
+                </a:solidFill>
+              </a14:hiddenFill>
+            </a:ext>
+          </a:extLst>
+        </p:spPr>
+      </p:pic>
+      <p:sp>
+        <p:nvSpPr>
+          <p:cNvPr id="5" name="Szövegdoboz 4"/>
+          <p:cNvSpPr txBox="1"/>
+          <p:nvPr/>
+        </p:nvSpPr>
+        <p:spPr>
+          <a:xfrm>
+            <a:off x="3699732" y="4877342"/>
+            <a:ext cx="1276865" cy="646331"/>
+          </a:xfrm>
+          <a:prstGeom prst="rect">
+            <a:avLst/>
+          </a:prstGeom>
+          <a:noFill/>
+        </p:spPr>
+        <p:txBody>
+          <a:bodyPr wrap="square" rtlCol="0">
+            <a:spAutoFit/>
+          </a:bodyPr>
+          <a:lstStyle/>
+          <a:p>
+            <a:r>
+              <a:rPr lang="hu-HU">
+                <a:solidFill>
+                  <a:schemeClr val="bg1"/>
+                </a:solidFill>
+                <a:latin typeface="Bahnschrift" panose="020B0502040204020203" pitchFamily="34" charset="0"/>
+              </a:rPr>
+              <a:t>Linus </a:t>
+            </a:r>
+            <a:r>
+              <a:rPr lang="hu-HU" err="1">
+                <a:solidFill>
+                  <a:schemeClr val="bg1"/>
+                </a:solidFill>
+                <a:latin typeface="Bahnschrift" panose="020B0502040204020203" pitchFamily="34" charset="0"/>
+              </a:rPr>
+              <a:t>Torvalds</a:t>
+            </a:r>
+            <a:endParaRPr lang="hu-HU">
+              <a:solidFill>
+                <a:schemeClr val="bg1"/>
+              </a:solidFill>
+              <a:latin typeface="Bahnschrift" panose="020B0502040204020203" pitchFamily="34" charset="0"/>
+            </a:endParaRPr>
+          </a:p>
+        </p:txBody>
+      </p:sp>
+    </p:spTree>
+    <p:extLst>
+      <p:ext uri="{BB962C8B-B14F-4D97-AF65-F5344CB8AC3E}">
+        <p14:creationId xmlns:p14="http://schemas.microsoft.com/office/powerpoint/2010/main" val="718366628"/>
+      </p:ext>
+    </p:extLst>
+  </p:cSld>
+  <p:clrMapOvr>
+    <a:masterClrMapping/>
+  </p:clrMapOvr>
+  <p:transition spd="slow">
+    <p:cover/>
+  </p:transition>
+  <p:timing>
+    <p:tnLst>
+      <p:par>
+        <p:cTn id="1" dur="indefinite" restart="never" nodeType="tmRoot">
+          <p:childTnLst>
+            <p:seq concurrent="1" nextAc="seek">
+              <p:cTn id="2" dur="indefinite" nodeType="mainSeq">
+                <p:childTnLst>
+                  <p:par>
+                    <p:cTn id="3" fill="hold">
+                      <p:stCondLst>
+                        <p:cond delay="indefinite"/>
+                      </p:stCondLst>
+                      <p:childTnLst>
+                        <p:par>
+                          <p:cTn id="4" fill="hold">
+                            <p:stCondLst>
+                              <p:cond delay="0"/>
+                            </p:stCondLst>
+                            <p:childTnLst>
+                              <p:par>
+                                <p:cTn id="5" presetID="2" presetClass="entr" presetSubtype="4" fill="hold" grpId="0" nodeType="clickEffect">
+                                  <p:stCondLst>
+                                    <p:cond delay="0"/>
+                                  </p:stCondLst>
+                                  <p:childTnLst>
+                                    <p:set>
+                                      <p:cBhvr>
+                                        <p:cTn id="6" dur="1" fill="hold">
+                                          <p:stCondLst>
+                                            <p:cond delay="0"/>
+                                          </p:stCondLst>
+                                        </p:cTn>
+                                        <p:tgtEl>
+                                          <p:spTgt spid="2">
+                                            <p:txEl>
+                                              <p:pRg st="0" end="0"/>
+                                            </p:txEl>
+                                          </p:spTgt>
+                                        </p:tgtEl>
+                                        <p:attrNameLst>
+                                          <p:attrName>style.visibility</p:attrName>
+                                        </p:attrNameLst>
+                                      </p:cBhvr>
+                                      <p:to>
+                                        <p:strVal val="visible"/>
+                                      </p:to>
+                                    </p:set>
+                                    <p:anim calcmode="lin" valueType="num">
+                                      <p:cBhvr additive="base">
+                                        <p:cTn id="7" dur="1000" fill="hold"/>
+                                        <p:tgtEl>
+                                          <p:spTgt spid="2">
+                                            <p:txEl>
+                                              <p:pRg st="0" end="0"/>
+                                            </p:txEl>
+                                          </p:spTgt>
+                                        </p:tgtEl>
+                                        <p:attrNameLst>
+                                          <p:attrName>ppt_x</p:attrName>
+                                        </p:attrNameLst>
+                                      </p:cBhvr>
+                                      <p:tavLst>
+                                        <p:tav tm="0">
+                                          <p:val>
+                                            <p:strVal val="#ppt_x"/>
+                                          </p:val>
+                                        </p:tav>
+                                        <p:tav tm="100000">
+                                          <p:val>
+                                            <p:strVal val="#ppt_x"/>
+                                          </p:val>
+                                        </p:tav>
+                                      </p:tavLst>
+                                    </p:anim>
+                                    <p:anim calcmode="lin" valueType="num">
+                                      <p:cBhvr additive="base">
+                                        <p:cTn id="8" dur="1000" fill="hold"/>
+                                        <p:tgtEl>
+                                          <p:spTgt spid="2">
+                                            <p:txEl>
+                                              <p:pRg st="0" end="0"/>
+                                            </p:txEl>
+                                          </p:spTgt>
+                                        </p:tgtEl>
+                                        <p:attrNameLst>
+                                          <p:attrName>ppt_y</p:attrName>
+                                        </p:attrNameLst>
+                                      </p:cBhvr>
+                                      <p:tavLst>
+                                        <p:tav tm="0">
+                                          <p:val>
+                                            <p:strVal val="1+#ppt_h/2"/>
+                                          </p:val>
+                                        </p:tav>
+                                        <p:tav tm="100000">
+                                          <p:val>
+                                            <p:strVal val="#ppt_y"/>
+                                          </p:val>
+                                        </p:tav>
+                                      </p:tavLst>
+                                    </p:anim>
+                                  </p:childTnLst>
+                                </p:cTn>
+                              </p:par>
+                            </p:childTnLst>
+                          </p:cTn>
+                        </p:par>
+                        <p:par>
+                          <p:cTn id="9" fill="hold">
+                            <p:stCondLst>
+                              <p:cond delay="1000"/>
+                            </p:stCondLst>
+                            <p:childTnLst>
+                              <p:par>
+                                <p:cTn id="10" presetID="2" presetClass="entr" presetSubtype="4" fill="hold" grpId="0" nodeType="afterEffect">
+                                  <p:stCondLst>
+                                    <p:cond delay="2000"/>
+                                  </p:stCondLst>
+                                  <p:childTnLst>
+                                    <p:set>
+                                      <p:cBhvr>
+                                        <p:cTn id="11" dur="1" fill="hold">
+                                          <p:stCondLst>
+                                            <p:cond delay="0"/>
+                                          </p:stCondLst>
+                                        </p:cTn>
+                                        <p:tgtEl>
+                                          <p:spTgt spid="2">
+                                            <p:txEl>
+                                              <p:pRg st="1" end="1"/>
+                                            </p:txEl>
+                                          </p:spTgt>
+                                        </p:tgtEl>
+                                        <p:attrNameLst>
+                                          <p:attrName>style.visibility</p:attrName>
+                                        </p:attrNameLst>
+                                      </p:cBhvr>
+                                      <p:to>
+                                        <p:strVal val="visible"/>
+                                      </p:to>
+                                    </p:set>
+                                    <p:anim calcmode="lin" valueType="num">
+                                      <p:cBhvr additive="base">
+                                        <p:cTn id="12" dur="1000" fill="hold"/>
+                                        <p:tgtEl>
+                                          <p:spTgt spid="2">
+                                            <p:txEl>
+                                              <p:pRg st="1" end="1"/>
+                                            </p:txEl>
+                                          </p:spTgt>
+                                        </p:tgtEl>
+                                        <p:attrNameLst>
+                                          <p:attrName>ppt_x</p:attrName>
+                                        </p:attrNameLst>
+                                      </p:cBhvr>
+                                      <p:tavLst>
+                                        <p:tav tm="0">
+                                          <p:val>
+                                            <p:strVal val="#ppt_x"/>
+                                          </p:val>
+                                        </p:tav>
+                                        <p:tav tm="100000">
+                                          <p:val>
+                                            <p:strVal val="#ppt_x"/>
+                                          </p:val>
+                                        </p:tav>
+                                      </p:tavLst>
+                                    </p:anim>
+                                    <p:anim calcmode="lin" valueType="num">
+                                      <p:cBhvr additive="base">
+                                        <p:cTn id="13" dur="1000" fill="hold"/>
+                                        <p:tgtEl>
+                                          <p:spTgt spid="2">
+                                            <p:txEl>
+                                              <p:pRg st="1" end="1"/>
+                                            </p:txEl>
+                                          </p:spTgt>
+                                        </p:tgtEl>
+                                        <p:attrNameLst>
+                                          <p:attrName>ppt_y</p:attrName>
+                                        </p:attrNameLst>
+                                      </p:cBhvr>
+                                      <p:tavLst>
+                                        <p:tav tm="0">
+                                          <p:val>
+                                            <p:strVal val="1+#ppt_h/2"/>
+                                          </p:val>
+                                        </p:tav>
+                                        <p:tav tm="100000">
+                                          <p:val>
+                                            <p:strVal val="#ppt_y"/>
+                                          </p:val>
+                                        </p:tav>
+                                      </p:tavLst>
+                                    </p:anim>
+                                  </p:childTnLst>
+                                </p:cTn>
+                              </p:par>
+                              <p:par>
+                                <p:cTn id="14" presetID="2" presetClass="entr" presetSubtype="4" fill="hold" nodeType="withEffect">
+                                  <p:stCondLst>
+                                    <p:cond delay="2000"/>
+                                  </p:stCondLst>
+                                  <p:childTnLst>
+                                    <p:set>
+                                      <p:cBhvr>
+                                        <p:cTn id="15" dur="1" fill="hold">
+                                          <p:stCondLst>
+                                            <p:cond delay="0"/>
+                                          </p:stCondLst>
+                                        </p:cTn>
+                                        <p:tgtEl>
+                                          <p:spTgt spid="1030"/>
+                                        </p:tgtEl>
+                                        <p:attrNameLst>
+                                          <p:attrName>style.visibility</p:attrName>
+                                        </p:attrNameLst>
+                                      </p:cBhvr>
+                                      <p:to>
+                                        <p:strVal val="visible"/>
+                                      </p:to>
+                                    </p:set>
+                                    <p:anim calcmode="lin" valueType="num">
+                                      <p:cBhvr additive="base">
+                                        <p:cTn id="16" dur="1000" fill="hold"/>
+                                        <p:tgtEl>
+                                          <p:spTgt spid="1030"/>
+                                        </p:tgtEl>
+                                        <p:attrNameLst>
+                                          <p:attrName>ppt_x</p:attrName>
+                                        </p:attrNameLst>
+                                      </p:cBhvr>
+                                      <p:tavLst>
+                                        <p:tav tm="0">
+                                          <p:val>
+                                            <p:strVal val="#ppt_x"/>
+                                          </p:val>
+                                        </p:tav>
+                                        <p:tav tm="100000">
+                                          <p:val>
+                                            <p:strVal val="#ppt_x"/>
+                                          </p:val>
+                                        </p:tav>
+                                      </p:tavLst>
+                                    </p:anim>
+                                    <p:anim calcmode="lin" valueType="num">
+                                      <p:cBhvr additive="base">
+                                        <p:cTn id="17" dur="1000" fill="hold"/>
+                                        <p:tgtEl>
+                                          <p:spTgt spid="1030"/>
+                                        </p:tgtEl>
+                                        <p:attrNameLst>
+                                          <p:attrName>ppt_y</p:attrName>
+                                        </p:attrNameLst>
+                                      </p:cBhvr>
+                                      <p:tavLst>
+                                        <p:tav tm="0">
+                                          <p:val>
+                                            <p:strVal val="1+#ppt_h/2"/>
+                                          </p:val>
+                                        </p:tav>
+                                        <p:tav tm="100000">
+                                          <p:val>
+                                            <p:strVal val="#ppt_y"/>
+                                          </p:val>
+                                        </p:tav>
+                                      </p:tavLst>
+                                    </p:anim>
+                                  </p:childTnLst>
+                                </p:cTn>
+                              </p:par>
+                            </p:childTnLst>
+                          </p:cTn>
+                        </p:par>
+                        <p:par>
+                          <p:cTn id="18" fill="hold">
+                            <p:stCondLst>
+                              <p:cond delay="4000"/>
+                            </p:stCondLst>
+                            <p:childTnLst>
+                              <p:par>
+                                <p:cTn id="19" presetID="2" presetClass="entr" presetSubtype="4" fill="hold" grpId="0" nodeType="afterEffect">
+                                  <p:stCondLst>
+                                    <p:cond delay="0"/>
+                                  </p:stCondLst>
+                                  <p:childTnLst>
+                                    <p:set>
+                                      <p:cBhvr>
+                                        <p:cTn id="20" dur="1" fill="hold">
+                                          <p:stCondLst>
+                                            <p:cond delay="0"/>
+                                          </p:stCondLst>
+                                        </p:cTn>
+                                        <p:tgtEl>
+                                          <p:spTgt spid="5"/>
+                                        </p:tgtEl>
+                                        <p:attrNameLst>
+                                          <p:attrName>style.visibility</p:attrName>
+                                        </p:attrNameLst>
+                                      </p:cBhvr>
+                                      <p:to>
+                                        <p:strVal val="visible"/>
+                                      </p:to>
+                                    </p:set>
+                                    <p:anim calcmode="lin" valueType="num">
+                                      <p:cBhvr additive="base">
+                                        <p:cTn id="21" dur="1000" fill="hold"/>
+                                        <p:tgtEl>
+                                          <p:spTgt spid="5"/>
+                                        </p:tgtEl>
+                                        <p:attrNameLst>
+                                          <p:attrName>ppt_x</p:attrName>
+                                        </p:attrNameLst>
+                                      </p:cBhvr>
+                                      <p:tavLst>
+                                        <p:tav tm="0">
+                                          <p:val>
+                                            <p:strVal val="#ppt_x"/>
+                                          </p:val>
+                                        </p:tav>
+                                        <p:tav tm="100000">
+                                          <p:val>
+                                            <p:strVal val="#ppt_x"/>
+                                          </p:val>
+                                        </p:tav>
+                                      </p:tavLst>
+                                    </p:anim>
+                                    <p:anim calcmode="lin" valueType="num">
+                                      <p:cBhvr additive="base">
+                                        <p:cTn id="22" dur="1000" fill="hold"/>
+                                        <p:tgtEl>
+                                          <p:spTgt spid="5"/>
+                                        </p:tgtEl>
+                                        <p:attrNameLst>
+                                          <p:attrName>ppt_y</p:attrName>
+                                        </p:attrNameLst>
+                                      </p:cBhvr>
+                                      <p:tavLst>
+                                        <p:tav tm="0">
+                                          <p:val>
+                                            <p:strVal val="1+#ppt_h/2"/>
+                                          </p:val>
+                                        </p:tav>
+                                        <p:tav tm="100000">
+                                          <p:val>
+                                            <p:strVal val="#ppt_y"/>
+                                          </p:val>
+                                        </p:tav>
+                                      </p:tavLst>
+                                    </p:anim>
+                                  </p:childTnLst>
+                                </p:cTn>
+                              </p:par>
+                            </p:childTnLst>
+                          </p:cTn>
+                        </p:par>
+                      </p:childTnLst>
+                    </p:cTn>
+                  </p:par>
+                </p:childTnLst>
+              </p:cTn>
+              <p:prevCondLst>
+                <p:cond evt="onPrev" delay="0">
+                  <p:tgtEl>
+                    <p:sldTgt/>
+                  </p:tgtEl>
+                </p:cond>
+              </p:prevCondLst>
+              <p:nextCondLst>
+                <p:cond evt="onNext" delay="0">
+                  <p:tgtEl>
+                    <p:sldTgt/>
+                  </p:tgtEl>
+                </p:cond>
+              </p:nextCondLst>
+            </p:seq>
+          </p:childTnLst>
+        </p:cTn>
+      </p:par>
+    </p:tnLst>
+    <p:bldLst>
+      <p:bldP spid="2" grpId="0" build="p"/>
+      <p:bldP spid="5" grpId="0"/>
+    </p:bldLst>
+  </p:timing>
+</p:sld>
+</file>
+
+<file path=ppt/slides/slide3.xml><?xml version="1.0" encoding="utf-8"?>
+<p:sld xmlns:a="http://schemas.openxmlformats.org/drawingml/2006/main" xmlns:r="http://schemas.openxmlformats.org/officeDocument/2006/relationships" xmlns:p="http://schemas.openxmlformats.org/presentationml/2006/main">
+  <p:cSld>
+    <p:spTree>
+      <p:nvGrpSpPr>
+        <p:cNvPr id="1" name=""/>
+        <p:cNvGrpSpPr/>
+        <p:nvPr/>
+      </p:nvGrpSpPr>
+      <p:grpSpPr>
+        <a:xfrm>
+          <a:off x="0" y="0"/>
+          <a:ext cx="0" cy="0"/>
+          <a:chOff x="0" y="0"/>
+          <a:chExt cx="0" cy="0"/>
+        </a:xfrm>
+      </p:grpSpPr>
+      <p:sp>
+        <p:nvSpPr>
+          <p:cNvPr id="2" name="Cím 1"/>
+          <p:cNvSpPr>
+            <a:spLocks noGrp="1"/>
+          </p:cNvSpPr>
+          <p:nvPr>
+            <p:ph type="title"/>
+          </p:nvPr>
+        </p:nvSpPr>
+        <p:spPr>
+          <a:xfrm>
+            <a:off x="3350900" y="2235151"/>
+            <a:ext cx="5490224" cy="1689390"/>
+          </a:xfrm>
+        </p:spPr>
+        <p:txBody>
+          <a:bodyPr/>
+          <a:lstStyle/>
+          <a:p>
+            <a:r>
+              <a:rPr lang="hu-HU"/>
+              <a:t>Alapfogalmak</a:t>
+            </a:r>
+          </a:p>
+        </p:txBody>
+      </p:sp>
+    </p:spTree>
+    <p:extLst>
+      <p:ext uri="{BB962C8B-B14F-4D97-AF65-F5344CB8AC3E}">
+        <p14:creationId xmlns:p14="http://schemas.microsoft.com/office/powerpoint/2010/main" val="2687353495"/>
+      </p:ext>
+    </p:extLst>
+  </p:cSld>
+  <p:clrMapOvr>
+    <a:masterClrMapping/>
+  </p:clrMapOvr>
+  <p:transition spd="slow">
+    <p:cover/>
+  </p:transition>
+</p:sld>
+</file>
+
+<file path=ppt/slides/slide4.xml><?xml version="1.0" encoding="utf-8"?>
+<p:sld xmlns:a="http://schemas.openxmlformats.org/drawingml/2006/main" xmlns:r="http://schemas.openxmlformats.org/officeDocument/2006/relationships" xmlns:p="http://schemas.openxmlformats.org/presentationml/2006/main">
+  <p:cSld>
+    <p:spTree>
+      <p:nvGrpSpPr>
+        <p:cNvPr id="1" name=""/>
+        <p:cNvGrpSpPr/>
+        <p:nvPr/>
+      </p:nvGrpSpPr>
+      <p:grpSpPr>
+        <a:xfrm>
+          <a:off x="0" y="0"/>
+          <a:ext cx="0" cy="0"/>
+          <a:chOff x="0" y="0"/>
+          <a:chExt cx="0" cy="0"/>
+        </a:xfrm>
+      </p:grpSpPr>
+      <p:sp>
+        <p:nvSpPr>
+          <p:cNvPr id="2" name="Cím 1"/>
+          <p:cNvSpPr>
+            <a:spLocks noGrp="1"/>
+          </p:cNvSpPr>
+          <p:nvPr>
+            <p:ph type="title"/>
+          </p:nvPr>
+        </p:nvSpPr>
+        <p:spPr/>
+        <p:txBody>
+          <a:bodyPr/>
+          <a:lstStyle/>
+          <a:p>
+            <a:r>
+              <a:rPr lang="hu-HU" sz="4400" err="1">
+                <a:latin typeface="Bahnschrift SemiBold"/>
+              </a:rPr>
+              <a:t>Repository</a:t>
+            </a:r>
+            <a:endParaRPr lang="hu-HU" sz="4400">
+              <a:latin typeface="Bahnschrift SemiBold"/>
+            </a:endParaRPr>
+          </a:p>
+        </p:txBody>
+      </p:sp>
+      <p:sp>
+        <p:nvSpPr>
+          <p:cNvPr id="3" name="Tartalom helye 2"/>
+          <p:cNvSpPr>
+            <a:spLocks noGrp="1"/>
+          </p:cNvSpPr>
+          <p:nvPr>
+            <p:ph idx="1"/>
+          </p:nvPr>
+        </p:nvSpPr>
+        <p:spPr>
+          <a:xfrm>
+            <a:off x="5118948" y="865561"/>
+            <a:ext cx="6292964" cy="3869377"/>
+          </a:xfrm>
+        </p:spPr>
+        <p:txBody>
+          <a:bodyPr>
+            <a:normAutofit/>
+          </a:bodyPr>
+          <a:lstStyle/>
+          <a:p>
+            <a:r>
+              <a:rPr lang="hu-HU" sz="3200">
+                <a:latin typeface="Bahnschrift"/>
+              </a:rPr>
+              <a:t>A projekt fájljaival és verziótörténetével rendelkező mappa</a:t>
+            </a:r>
+          </a:p>
+          <a:p>
+            <a:r>
+              <a:rPr lang="hu-HU" sz="3200">
+                <a:latin typeface="Bahnschrift"/>
+              </a:rPr>
+              <a:t>Egy könyvtárat a "</a:t>
+            </a:r>
+            <a:r>
+              <a:rPr lang="hu-HU" sz="3200" err="1">
+                <a:latin typeface="Bahnschrift"/>
+              </a:rPr>
+              <a:t>git</a:t>
+            </a:r>
+            <a:r>
+              <a:rPr lang="hu-HU" sz="3200">
+                <a:latin typeface="Bahnschrift"/>
+              </a:rPr>
+              <a:t> </a:t>
+            </a:r>
+            <a:r>
+              <a:rPr lang="hu-HU" sz="3200" err="1">
+                <a:latin typeface="Bahnschrift"/>
+              </a:rPr>
+              <a:t>init</a:t>
+            </a:r>
+            <a:r>
+              <a:rPr lang="hu-HU" sz="3200">
+                <a:latin typeface="Bahnschrift"/>
+              </a:rPr>
+              <a:t> [név]" </a:t>
+            </a:r>
+            <a:r>
+              <a:rPr lang="hu-HU" sz="3200" err="1">
+                <a:latin typeface="Bahnschrift"/>
+              </a:rPr>
+              <a:t>parancsal</a:t>
+            </a:r>
+            <a:r>
+              <a:rPr lang="hu-HU" sz="3200">
+                <a:latin typeface="Bahnschrift"/>
+              </a:rPr>
+              <a:t> lehet létrehozni</a:t>
+            </a:r>
+            <a:endParaRPr lang="hu-HU" sz="3200"/>
+          </a:p>
+        </p:txBody>
+      </p:sp>
+      <p:sp>
+        <p:nvSpPr>
+          <p:cNvPr id="4" name="Szöveg helye 3"/>
+          <p:cNvSpPr>
+            <a:spLocks noGrp="1"/>
+          </p:cNvSpPr>
+          <p:nvPr>
+            <p:ph type="body" sz="half" idx="2"/>
+          </p:nvPr>
+        </p:nvSpPr>
+        <p:spPr/>
+        <p:txBody>
+          <a:bodyPr vert="horz" lIns="91440" tIns="45720" rIns="91440" bIns="45720" rtlCol="0" anchor="t">
+            <a:normAutofit/>
+          </a:bodyPr>
+          <a:lstStyle/>
+          <a:p>
+            <a:r>
+              <a:rPr lang="hu-HU" sz="3200">
+                <a:latin typeface="Bahnschrift"/>
+              </a:rPr>
+              <a:t>Könyvtár</a:t>
+            </a:r>
+          </a:p>
+        </p:txBody>
+      </p:sp>
+      <p:pic>
+        <p:nvPicPr>
+          <p:cNvPr id="6" name="Kép 5" descr="A képen szöveg, képernyőkép, Betűtípus, sor látható&#10;&#10;Automatikusan generált leírás">
             <a:extLst>
               <a:ext uri="{FF2B5EF4-FFF2-40B4-BE49-F238E27FC236}">
-                <a16:creationId xmlns:a16="http://schemas.microsoft.com/office/drawing/2014/main" id="{29A2153F-B67C-4BDB-8725-86A2B8035916}"/>
+                <a16:creationId xmlns:a16="http://schemas.microsoft.com/office/drawing/2014/main" id="{9D71660F-7D2B-4BF1-2C7B-E89DD4B5690A}"/>
+              </a:ext>
+            </a:extLst>
+          </p:cNvPr>
+          <p:cNvPicPr>
+            <a:picLocks noChangeAspect="1"/>
+          </p:cNvPicPr>
+          <p:nvPr/>
+        </p:nvPicPr>
+        <p:blipFill>
+          <a:blip r:embed="rId2"/>
+          <a:stretch>
+            <a:fillRect/>
+          </a:stretch>
+        </p:blipFill>
+        <p:spPr>
+          <a:xfrm>
+            <a:off x="5123460" y="4794538"/>
+            <a:ext cx="6635833" cy="1009650"/>
+          </a:xfrm>
+          <a:prstGeom prst="rect">
+            <a:avLst/>
+          </a:prstGeom>
+          <a:ln w="127000" cap="sq">
+            <a:solidFill>
+              <a:srgbClr val="000000"/>
+            </a:solidFill>
+            <a:miter lim="800000"/>
+          </a:ln>
+          <a:effectLst>
+            <a:outerShdw blurRad="57150" dist="50800" dir="2700000" algn="tl" rotWithShape="0">
+              <a:srgbClr val="000000">
+                <a:alpha val="40000"/>
+              </a:srgbClr>
+            </a:outerShdw>
+          </a:effectLst>
+        </p:spPr>
+      </p:pic>
+    </p:spTree>
+    <p:extLst>
+      <p:ext uri="{BB962C8B-B14F-4D97-AF65-F5344CB8AC3E}">
+        <p14:creationId xmlns:p14="http://schemas.microsoft.com/office/powerpoint/2010/main" val="885698651"/>
+      </p:ext>
+    </p:extLst>
+  </p:cSld>
+  <p:clrMapOvr>
+    <a:masterClrMapping/>
+  </p:clrMapOvr>
+  <p:transition spd="slow">
+    <p:cover/>
+  </p:transition>
+  <p:timing>
+    <p:tnLst>
+      <p:par>
+        <p:cTn id="1" dur="indefinite" restart="never" nodeType="tmRoot">
+          <p:childTnLst>
+            <p:seq concurrent="1" nextAc="seek">
+              <p:cTn id="2" dur="indefinite" nodeType="mainSeq">
+                <p:childTnLst>
+                  <p:par>
+                    <p:cTn id="3" fill="hold">
+                      <p:stCondLst>
+                        <p:cond delay="indefinite"/>
+                      </p:stCondLst>
+                      <p:childTnLst>
+                        <p:par>
+                          <p:cTn id="4" fill="hold">
+                            <p:stCondLst>
+                              <p:cond delay="0"/>
+                            </p:stCondLst>
+                            <p:childTnLst>
+                              <p:par>
+                                <p:cTn id="5" presetID="2" presetClass="entr" presetSubtype="2" fill="hold" grpId="0" nodeType="clickEffect">
+                                  <p:stCondLst>
+                                    <p:cond delay="0"/>
+                                  </p:stCondLst>
+                                  <p:childTnLst>
+                                    <p:set>
+                                      <p:cBhvr>
+                                        <p:cTn id="6" dur="1" fill="hold">
+                                          <p:stCondLst>
+                                            <p:cond delay="0"/>
+                                          </p:stCondLst>
+                                        </p:cTn>
+                                        <p:tgtEl>
+                                          <p:spTgt spid="3">
+                                            <p:txEl>
+                                              <p:pRg st="0" end="0"/>
+                                            </p:txEl>
+                                          </p:spTgt>
+                                        </p:tgtEl>
+                                        <p:attrNameLst>
+                                          <p:attrName>style.visibility</p:attrName>
+                                        </p:attrNameLst>
+                                      </p:cBhvr>
+                                      <p:to>
+                                        <p:strVal val="visible"/>
+                                      </p:to>
+                                    </p:set>
+                                    <p:anim calcmode="lin" valueType="num">
+                                      <p:cBhvr additive="base">
+                                        <p:cTn id="7" dur="1000" fill="hold"/>
+                                        <p:tgtEl>
+                                          <p:spTgt spid="3">
+                                            <p:txEl>
+                                              <p:pRg st="0" end="0"/>
+                                            </p:txEl>
+                                          </p:spTgt>
+                                        </p:tgtEl>
+                                        <p:attrNameLst>
+                                          <p:attrName>ppt_x</p:attrName>
+                                        </p:attrNameLst>
+                                      </p:cBhvr>
+                                      <p:tavLst>
+                                        <p:tav tm="0">
+                                          <p:val>
+                                            <p:strVal val="1+#ppt_w/2"/>
+                                          </p:val>
+                                        </p:tav>
+                                        <p:tav tm="100000">
+                                          <p:val>
+                                            <p:strVal val="#ppt_x"/>
+                                          </p:val>
+                                        </p:tav>
+                                      </p:tavLst>
+                                    </p:anim>
+                                    <p:anim calcmode="lin" valueType="num">
+                                      <p:cBhvr additive="base">
+                                        <p:cTn id="8" dur="1000" fill="hold"/>
+                                        <p:tgtEl>
+                                          <p:spTgt spid="3">
+                                            <p:txEl>
+                                              <p:pRg st="0" end="0"/>
+                                            </p:txEl>
+                                          </p:spTgt>
+                                        </p:tgtEl>
+                                        <p:attrNameLst>
+                                          <p:attrName>ppt_y</p:attrName>
+                                        </p:attrNameLst>
+                                      </p:cBhvr>
+                                      <p:tavLst>
+                                        <p:tav tm="0">
+                                          <p:val>
+                                            <p:strVal val="#ppt_y"/>
+                                          </p:val>
+                                        </p:tav>
+                                        <p:tav tm="100000">
+                                          <p:val>
+                                            <p:strVal val="#ppt_y"/>
+                                          </p:val>
+                                        </p:tav>
+                                      </p:tavLst>
+                                    </p:anim>
+                                  </p:childTnLst>
+                                </p:cTn>
+                              </p:par>
+                            </p:childTnLst>
+                          </p:cTn>
+                        </p:par>
+                        <p:par>
+                          <p:cTn id="9" fill="hold">
+                            <p:stCondLst>
+                              <p:cond delay="1000"/>
+                            </p:stCondLst>
+                            <p:childTnLst>
+                              <p:par>
+                                <p:cTn id="10" presetID="2" presetClass="entr" presetSubtype="2" fill="hold" grpId="0" nodeType="afterEffect">
+                                  <p:stCondLst>
+                                    <p:cond delay="2000"/>
+                                  </p:stCondLst>
+                                  <p:childTnLst>
+                                    <p:set>
+                                      <p:cBhvr>
+                                        <p:cTn id="11" dur="1" fill="hold">
+                                          <p:stCondLst>
+                                            <p:cond delay="0"/>
+                                          </p:stCondLst>
+                                        </p:cTn>
+                                        <p:tgtEl>
+                                          <p:spTgt spid="3">
+                                            <p:txEl>
+                                              <p:pRg st="1" end="1"/>
+                                            </p:txEl>
+                                          </p:spTgt>
+                                        </p:tgtEl>
+                                        <p:attrNameLst>
+                                          <p:attrName>style.visibility</p:attrName>
+                                        </p:attrNameLst>
+                                      </p:cBhvr>
+                                      <p:to>
+                                        <p:strVal val="visible"/>
+                                      </p:to>
+                                    </p:set>
+                                    <p:anim calcmode="lin" valueType="num">
+                                      <p:cBhvr additive="base">
+                                        <p:cTn id="12" dur="1000" fill="hold"/>
+                                        <p:tgtEl>
+                                          <p:spTgt spid="3">
+                                            <p:txEl>
+                                              <p:pRg st="1" end="1"/>
+                                            </p:txEl>
+                                          </p:spTgt>
+                                        </p:tgtEl>
+                                        <p:attrNameLst>
+                                          <p:attrName>ppt_x</p:attrName>
+                                        </p:attrNameLst>
+                                      </p:cBhvr>
+                                      <p:tavLst>
+                                        <p:tav tm="0">
+                                          <p:val>
+                                            <p:strVal val="1+#ppt_w/2"/>
+                                          </p:val>
+                                        </p:tav>
+                                        <p:tav tm="100000">
+                                          <p:val>
+                                            <p:strVal val="#ppt_x"/>
+                                          </p:val>
+                                        </p:tav>
+                                      </p:tavLst>
+                                    </p:anim>
+                                    <p:anim calcmode="lin" valueType="num">
+                                      <p:cBhvr additive="base">
+                                        <p:cTn id="13" dur="1000" fill="hold"/>
+                                        <p:tgtEl>
+                                          <p:spTgt spid="3">
+                                            <p:txEl>
+                                              <p:pRg st="1" end="1"/>
+                                            </p:txEl>
+                                          </p:spTgt>
+                                        </p:tgtEl>
+                                        <p:attrNameLst>
+                                          <p:attrName>ppt_y</p:attrName>
+                                        </p:attrNameLst>
+                                      </p:cBhvr>
+                                      <p:tavLst>
+                                        <p:tav tm="0">
+                                          <p:val>
+                                            <p:strVal val="#ppt_y"/>
+                                          </p:val>
+                                        </p:tav>
+                                        <p:tav tm="100000">
+                                          <p:val>
+                                            <p:strVal val="#ppt_y"/>
+                                          </p:val>
+                                        </p:tav>
+                                      </p:tavLst>
+                                    </p:anim>
+                                  </p:childTnLst>
+                                </p:cTn>
+                              </p:par>
+                              <p:par>
+                                <p:cTn id="14" presetID="2" presetClass="entr" presetSubtype="4" fill="hold" nodeType="withEffect">
+                                  <p:stCondLst>
+                                    <p:cond delay="2000"/>
+                                  </p:stCondLst>
+                                  <p:childTnLst>
+                                    <p:set>
+                                      <p:cBhvr>
+                                        <p:cTn id="15" dur="1" fill="hold">
+                                          <p:stCondLst>
+                                            <p:cond delay="0"/>
+                                          </p:stCondLst>
+                                        </p:cTn>
+                                        <p:tgtEl>
+                                          <p:spTgt spid="6"/>
+                                        </p:tgtEl>
+                                        <p:attrNameLst>
+                                          <p:attrName>style.visibility</p:attrName>
+                                        </p:attrNameLst>
+                                      </p:cBhvr>
+                                      <p:to>
+                                        <p:strVal val="visible"/>
+                                      </p:to>
+                                    </p:set>
+                                    <p:anim calcmode="lin" valueType="num">
+                                      <p:cBhvr additive="base">
+                                        <p:cTn id="16" dur="1000" fill="hold"/>
+                                        <p:tgtEl>
+                                          <p:spTgt spid="6"/>
+                                        </p:tgtEl>
+                                        <p:attrNameLst>
+                                          <p:attrName>ppt_x</p:attrName>
+                                        </p:attrNameLst>
+                                      </p:cBhvr>
+                                      <p:tavLst>
+                                        <p:tav tm="0">
+                                          <p:val>
+                                            <p:strVal val="#ppt_x"/>
+                                          </p:val>
+                                        </p:tav>
+                                        <p:tav tm="100000">
+                                          <p:val>
+                                            <p:strVal val="#ppt_x"/>
+                                          </p:val>
+                                        </p:tav>
+                                      </p:tavLst>
+                                    </p:anim>
+                                    <p:anim calcmode="lin" valueType="num">
+                                      <p:cBhvr additive="base">
+                                        <p:cTn id="17" dur="1000" fill="hold"/>
+                                        <p:tgtEl>
+                                          <p:spTgt spid="6"/>
+                                        </p:tgtEl>
+                                        <p:attrNameLst>
+                                          <p:attrName>ppt_y</p:attrName>
+                                        </p:attrNameLst>
+                                      </p:cBhvr>
+                                      <p:tavLst>
+                                        <p:tav tm="0">
+                                          <p:val>
+                                            <p:strVal val="1+#ppt_h/2"/>
+                                          </p:val>
+                                        </p:tav>
+                                        <p:tav tm="100000">
+                                          <p:val>
+                                            <p:strVal val="#ppt_y"/>
+                                          </p:val>
+                                        </p:tav>
+                                      </p:tavLst>
+                                    </p:anim>
+                                  </p:childTnLst>
+                                </p:cTn>
+                              </p:par>
+                            </p:childTnLst>
+                          </p:cTn>
+                        </p:par>
+                      </p:childTnLst>
+                    </p:cTn>
+                  </p:par>
+                </p:childTnLst>
+              </p:cTn>
+              <p:prevCondLst>
+                <p:cond evt="onPrev" delay="0">
+                  <p:tgtEl>
+                    <p:sldTgt/>
+                  </p:tgtEl>
+                </p:cond>
+              </p:prevCondLst>
+              <p:nextCondLst>
+                <p:cond evt="onNext" delay="0">
+                  <p:tgtEl>
+                    <p:sldTgt/>
+                  </p:tgtEl>
+                </p:cond>
+              </p:nextCondLst>
+            </p:seq>
+          </p:childTnLst>
+        </p:cTn>
+      </p:par>
+    </p:tnLst>
+    <p:bldLst>
+      <p:bldP spid="3" grpId="0" build="p"/>
+    </p:bldLst>
+  </p:timing>
+</p:sld>
+</file>
+
+<file path=ppt/slides/slide5.xml><?xml version="1.0" encoding="utf-8"?>
+<p:sld xmlns:a="http://schemas.openxmlformats.org/drawingml/2006/main" xmlns:r="http://schemas.openxmlformats.org/officeDocument/2006/relationships" xmlns:p="http://schemas.openxmlformats.org/presentationml/2006/main">
+  <p:cSld>
+    <p:spTree>
+      <p:nvGrpSpPr>
+        <p:cNvPr id="1" name=""/>
+        <p:cNvGrpSpPr/>
+        <p:nvPr/>
+      </p:nvGrpSpPr>
+      <p:grpSpPr>
+        <a:xfrm>
+          <a:off x="0" y="0"/>
+          <a:ext cx="0" cy="0"/>
+          <a:chOff x="0" y="0"/>
+          <a:chExt cx="0" cy="0"/>
+        </a:xfrm>
+      </p:grpSpPr>
+      <p:sp>
+        <p:nvSpPr>
+          <p:cNvPr id="2" name="Cím 1">
+            <a:extLst>
+              <a:ext uri="{FF2B5EF4-FFF2-40B4-BE49-F238E27FC236}">
+                <a16:creationId xmlns:a16="http://schemas.microsoft.com/office/drawing/2014/main" id="{461296C9-DC8F-6D5A-505C-105A0C5D194C}"/>
+              </a:ext>
+            </a:extLst>
+          </p:cNvPr>
+          <p:cNvSpPr>
+            <a:spLocks noGrp="1"/>
+          </p:cNvSpPr>
+          <p:nvPr>
+            <p:ph type="title"/>
+          </p:nvPr>
+        </p:nvSpPr>
+        <p:spPr/>
+        <p:txBody>
+          <a:bodyPr/>
+          <a:lstStyle/>
+          <a:p>
+            <a:r>
+              <a:rPr lang="hu-HU" sz="4400" err="1">
+                <a:latin typeface="Bahnschrift SemiBold"/>
+              </a:rPr>
+              <a:t>Commit</a:t>
+            </a:r>
+            <a:endParaRPr lang="hu-HU" sz="4400" err="1"/>
+          </a:p>
+        </p:txBody>
+      </p:sp>
+      <p:sp>
+        <p:nvSpPr>
+          <p:cNvPr id="3" name="Tartalom helye 2">
+            <a:extLst>
+              <a:ext uri="{FF2B5EF4-FFF2-40B4-BE49-F238E27FC236}">
+                <a16:creationId xmlns:a16="http://schemas.microsoft.com/office/drawing/2014/main" id="{37C2DEEA-D873-B184-957B-35A7097D459C}"/>
               </a:ext>
             </a:extLst>
           </p:cNvPr>
@@ -16250,11 +19166,242 @@
             <p:ph idx="1"/>
           </p:nvPr>
         </p:nvSpPr>
+        <p:spPr>
+          <a:xfrm>
+            <a:off x="5208944" y="802809"/>
+            <a:ext cx="6275035" cy="1707136"/>
+          </a:xfrm>
+        </p:spPr>
+        <p:txBody>
+          <a:bodyPr vert="horz" lIns="91440" tIns="45720" rIns="91440" bIns="45720" rtlCol="0" anchor="ctr">
+            <a:noAutofit/>
+          </a:bodyPr>
+          <a:lstStyle/>
+          <a:p>
+            <a:pPr marL="0" indent="0">
+              <a:buNone/>
+            </a:pPr>
+            <a:r>
+              <a:rPr lang="hu-HU" sz="3200">
+                <a:latin typeface="Bahnschrift"/>
+              </a:rPr>
+              <a:t>Egy konkrét fájl hozzáadása:</a:t>
+            </a:r>
+            <a:endParaRPr lang="hu-HU"/>
+          </a:p>
+          <a:p>
+            <a:endParaRPr lang="hu-HU" sz="3200"/>
+          </a:p>
+          <a:p>
+            <a:endParaRPr lang="hu-HU"/>
+          </a:p>
+        </p:txBody>
+      </p:sp>
+      <p:sp>
+        <p:nvSpPr>
+          <p:cNvPr id="4" name="Szöveg helye 3">
+            <a:extLst>
+              <a:ext uri="{FF2B5EF4-FFF2-40B4-BE49-F238E27FC236}">
+                <a16:creationId xmlns:a16="http://schemas.microsoft.com/office/drawing/2014/main" id="{A534DE23-E6DB-D9FF-AE2B-8DED38F88F95}"/>
+              </a:ext>
+            </a:extLst>
+          </p:cNvPr>
+          <p:cNvSpPr>
+            <a:spLocks noGrp="1"/>
+          </p:cNvSpPr>
+          <p:nvPr>
+            <p:ph type="body" sz="half" idx="2"/>
+          </p:nvPr>
+        </p:nvSpPr>
         <p:spPr/>
         <p:txBody>
-          <a:bodyPr/>
+          <a:bodyPr vert="horz" lIns="91440" tIns="45720" rIns="91440" bIns="45720" rtlCol="0" anchor="t">
+            <a:normAutofit/>
+          </a:bodyPr>
           <a:lstStyle/>
           <a:p>
+            <a:r>
+              <a:rPr lang="hu-HU" sz="3200">
+                <a:latin typeface="Bahnschrift"/>
+              </a:rPr>
+              <a:t>Rögzítés</a:t>
+            </a:r>
+            <a:endParaRPr lang="hu-HU" sz="3200"/>
+          </a:p>
+        </p:txBody>
+      </p:sp>
+      <p:pic>
+        <p:nvPicPr>
+          <p:cNvPr id="5" name="Kép 4">
+            <a:extLst>
+              <a:ext uri="{FF2B5EF4-FFF2-40B4-BE49-F238E27FC236}">
+                <a16:creationId xmlns:a16="http://schemas.microsoft.com/office/drawing/2014/main" id="{793F2585-96DC-8F75-53E5-23FEEED5AD62}"/>
+              </a:ext>
+            </a:extLst>
+          </p:cNvPr>
+          <p:cNvPicPr>
+            <a:picLocks noChangeAspect="1"/>
+          </p:cNvPicPr>
+          <p:nvPr/>
+        </p:nvPicPr>
+        <p:blipFill>
+          <a:blip r:embed="rId2"/>
+          <a:stretch>
+            <a:fillRect/>
+          </a:stretch>
+        </p:blipFill>
+        <p:spPr>
+          <a:xfrm>
+            <a:off x="5552621" y="1663041"/>
+            <a:ext cx="2789669" cy="690639"/>
+          </a:xfrm>
+          <a:prstGeom prst="rect">
+            <a:avLst/>
+          </a:prstGeom>
+          <a:ln w="38100" cap="sq">
+            <a:solidFill>
+              <a:srgbClr val="000000"/>
+            </a:solidFill>
+            <a:prstDash val="solid"/>
+            <a:miter lim="800000"/>
+          </a:ln>
+          <a:effectLst>
+            <a:outerShdw blurRad="50800" dist="38100" dir="2700000" algn="tl" rotWithShape="0">
+              <a:srgbClr val="000000">
+                <a:alpha val="43000"/>
+              </a:srgbClr>
+            </a:outerShdw>
+          </a:effectLst>
+        </p:spPr>
+      </p:pic>
+      <p:pic>
+        <p:nvPicPr>
+          <p:cNvPr id="6" name="Kép 5">
+            <a:extLst>
+              <a:ext uri="{FF2B5EF4-FFF2-40B4-BE49-F238E27FC236}">
+                <a16:creationId xmlns:a16="http://schemas.microsoft.com/office/drawing/2014/main" id="{75AEBEB6-8166-F035-F0C0-F8672C3D09C8}"/>
+              </a:ext>
+            </a:extLst>
+          </p:cNvPr>
+          <p:cNvPicPr>
+            <a:picLocks noChangeAspect="1"/>
+          </p:cNvPicPr>
+          <p:nvPr/>
+        </p:nvPicPr>
+        <p:blipFill>
+          <a:blip r:embed="rId3"/>
+          <a:stretch>
+            <a:fillRect/>
+          </a:stretch>
+        </p:blipFill>
+        <p:spPr>
+          <a:xfrm>
+            <a:off x="5554841" y="4652412"/>
+            <a:ext cx="3840349" cy="700744"/>
+          </a:xfrm>
+          <a:prstGeom prst="rect">
+            <a:avLst/>
+          </a:prstGeom>
+          <a:ln w="38100" cap="sq">
+            <a:solidFill>
+              <a:srgbClr val="000000"/>
+            </a:solidFill>
+            <a:prstDash val="solid"/>
+            <a:miter lim="800000"/>
+          </a:ln>
+          <a:effectLst>
+            <a:outerShdw blurRad="50800" dist="38100" dir="2700000" algn="tl" rotWithShape="0">
+              <a:srgbClr val="000000">
+                <a:alpha val="43000"/>
+              </a:srgbClr>
+            </a:outerShdw>
+          </a:effectLst>
+        </p:spPr>
+      </p:pic>
+      <p:sp>
+        <p:nvSpPr>
+          <p:cNvPr id="7" name="Szövegdoboz 6">
+            <a:extLst>
+              <a:ext uri="{FF2B5EF4-FFF2-40B4-BE49-F238E27FC236}">
+                <a16:creationId xmlns:a16="http://schemas.microsoft.com/office/drawing/2014/main" id="{EC4634E0-D85B-DF4D-F064-0D6E93ABC254}"/>
+              </a:ext>
+            </a:extLst>
+          </p:cNvPr>
+          <p:cNvSpPr txBox="1"/>
+          <p:nvPr/>
+        </p:nvSpPr>
+        <p:spPr>
+          <a:xfrm>
+            <a:off x="5205350" y="2513609"/>
+            <a:ext cx="6462155" cy="2142125"/>
+          </a:xfrm>
+          <a:prstGeom prst="rect">
+            <a:avLst/>
+          </a:prstGeom>
+          <a:noFill/>
+        </p:spPr>
+        <p:txBody>
+          <a:bodyPr rot="0" spcFirstLastPara="0" vertOverflow="overflow" horzOverflow="overflow" vert="horz" wrap="square" lIns="91440" tIns="45720" rIns="91440" bIns="45720" numCol="1" spcCol="0" rtlCol="0" fromWordArt="0" anchor="t" anchorCtr="0" forceAA="0" compatLnSpc="1">
+            <a:prstTxWarp prst="textNoShape">
+              <a:avLst/>
+            </a:prstTxWarp>
+            <a:spAutoFit/>
+          </a:bodyPr>
+          <a:lstStyle/>
+          <a:p>
+            <a:pPr>
+              <a:lnSpc>
+                <a:spcPct val="120000"/>
+              </a:lnSpc>
+              <a:spcBef>
+                <a:spcPts val="1000"/>
+              </a:spcBef>
+            </a:pPr>
+            <a:r>
+              <a:rPr lang="hu-HU" sz="3200" err="1">
+                <a:solidFill>
+                  <a:schemeClr val="bg2"/>
+                </a:solidFill>
+                <a:latin typeface="Bahnschrift"/>
+              </a:rPr>
+              <a:t>Commitolás</a:t>
+            </a:r>
+            <a:r>
+              <a:rPr lang="hu-HU" sz="3200">
+                <a:solidFill>
+                  <a:schemeClr val="bg2"/>
+                </a:solidFill>
+                <a:latin typeface="Bahnschrift"/>
+              </a:rPr>
+              <a:t>: Miután a változtatásokat hozzáadtad, </a:t>
+            </a:r>
+            <a:r>
+              <a:rPr lang="hu-HU" sz="3200" err="1">
+                <a:solidFill>
+                  <a:schemeClr val="bg2"/>
+                </a:solidFill>
+                <a:latin typeface="Bahnschrift"/>
+              </a:rPr>
+              <a:t>commitolhatod</a:t>
+            </a:r>
+            <a:r>
+              <a:rPr lang="hu-HU" sz="3200">
+                <a:solidFill>
+                  <a:schemeClr val="bg2"/>
+                </a:solidFill>
+                <a:latin typeface="Bahnschrift"/>
+              </a:rPr>
+              <a:t> őket egy üzenettel.</a:t>
+            </a:r>
+            <a:endParaRPr lang="en-US" sz="3200">
+              <a:solidFill>
+                <a:schemeClr val="bg2"/>
+              </a:solidFill>
+              <a:latin typeface="Bahnschrift"/>
+            </a:endParaRPr>
+          </a:p>
+          <a:p>
+            <a:pPr algn="l"/>
             <a:endParaRPr lang="hu-HU"/>
           </a:p>
         </p:txBody>
@@ -16262,13 +19409,1921 @@
     </p:spTree>
     <p:extLst>
       <p:ext uri="{BB962C8B-B14F-4D97-AF65-F5344CB8AC3E}">
-        <p14:creationId xmlns:p14="http://schemas.microsoft.com/office/powerpoint/2010/main" val="2944726833"/>
+        <p14:creationId xmlns:p14="http://schemas.microsoft.com/office/powerpoint/2010/main" val="3882558835"/>
       </p:ext>
     </p:extLst>
   </p:cSld>
   <p:clrMapOvr>
     <a:masterClrMapping/>
   </p:clrMapOvr>
+  <p:transition spd="slow">
+    <p:cover/>
+  </p:transition>
+  <p:timing>
+    <p:tnLst>
+      <p:par>
+        <p:cTn id="1" dur="indefinite" restart="never" nodeType="tmRoot">
+          <p:childTnLst>
+            <p:seq concurrent="1" nextAc="seek">
+              <p:cTn id="2" dur="indefinite" nodeType="mainSeq">
+                <p:childTnLst>
+                  <p:par>
+                    <p:cTn id="3" fill="hold">
+                      <p:stCondLst>
+                        <p:cond delay="indefinite"/>
+                      </p:stCondLst>
+                      <p:childTnLst>
+                        <p:par>
+                          <p:cTn id="4" fill="hold">
+                            <p:stCondLst>
+                              <p:cond delay="0"/>
+                            </p:stCondLst>
+                            <p:childTnLst>
+                              <p:par>
+                                <p:cTn id="5" presetID="2" presetClass="entr" presetSubtype="4" fill="hold" grpId="0" nodeType="clickEffect">
+                                  <p:stCondLst>
+                                    <p:cond delay="0"/>
+                                  </p:stCondLst>
+                                  <p:childTnLst>
+                                    <p:set>
+                                      <p:cBhvr>
+                                        <p:cTn id="6" dur="1" fill="hold">
+                                          <p:stCondLst>
+                                            <p:cond delay="0"/>
+                                          </p:stCondLst>
+                                        </p:cTn>
+                                        <p:tgtEl>
+                                          <p:spTgt spid="3">
+                                            <p:txEl>
+                                              <p:pRg st="0" end="0"/>
+                                            </p:txEl>
+                                          </p:spTgt>
+                                        </p:tgtEl>
+                                        <p:attrNameLst>
+                                          <p:attrName>style.visibility</p:attrName>
+                                        </p:attrNameLst>
+                                      </p:cBhvr>
+                                      <p:to>
+                                        <p:strVal val="visible"/>
+                                      </p:to>
+                                    </p:set>
+                                    <p:anim calcmode="lin" valueType="num">
+                                      <p:cBhvr additive="base">
+                                        <p:cTn id="7" dur="1000" fill="hold"/>
+                                        <p:tgtEl>
+                                          <p:spTgt spid="3">
+                                            <p:txEl>
+                                              <p:pRg st="0" end="0"/>
+                                            </p:txEl>
+                                          </p:spTgt>
+                                        </p:tgtEl>
+                                        <p:attrNameLst>
+                                          <p:attrName>ppt_x</p:attrName>
+                                        </p:attrNameLst>
+                                      </p:cBhvr>
+                                      <p:tavLst>
+                                        <p:tav tm="0">
+                                          <p:val>
+                                            <p:strVal val="#ppt_x"/>
+                                          </p:val>
+                                        </p:tav>
+                                        <p:tav tm="100000">
+                                          <p:val>
+                                            <p:strVal val="#ppt_x"/>
+                                          </p:val>
+                                        </p:tav>
+                                      </p:tavLst>
+                                    </p:anim>
+                                    <p:anim calcmode="lin" valueType="num">
+                                      <p:cBhvr additive="base">
+                                        <p:cTn id="8" dur="1000" fill="hold"/>
+                                        <p:tgtEl>
+                                          <p:spTgt spid="3">
+                                            <p:txEl>
+                                              <p:pRg st="0" end="0"/>
+                                            </p:txEl>
+                                          </p:spTgt>
+                                        </p:tgtEl>
+                                        <p:attrNameLst>
+                                          <p:attrName>ppt_y</p:attrName>
+                                        </p:attrNameLst>
+                                      </p:cBhvr>
+                                      <p:tavLst>
+                                        <p:tav tm="0">
+                                          <p:val>
+                                            <p:strVal val="1+#ppt_h/2"/>
+                                          </p:val>
+                                        </p:tav>
+                                        <p:tav tm="100000">
+                                          <p:val>
+                                            <p:strVal val="#ppt_y"/>
+                                          </p:val>
+                                        </p:tav>
+                                      </p:tavLst>
+                                    </p:anim>
+                                  </p:childTnLst>
+                                </p:cTn>
+                              </p:par>
+                              <p:par>
+                                <p:cTn id="9" presetID="2" presetClass="entr" presetSubtype="4" fill="hold" nodeType="withEffect">
+                                  <p:stCondLst>
+                                    <p:cond delay="0"/>
+                                  </p:stCondLst>
+                                  <p:childTnLst>
+                                    <p:set>
+                                      <p:cBhvr>
+                                        <p:cTn id="10" dur="1" fill="hold">
+                                          <p:stCondLst>
+                                            <p:cond delay="0"/>
+                                          </p:stCondLst>
+                                        </p:cTn>
+                                        <p:tgtEl>
+                                          <p:spTgt spid="5"/>
+                                        </p:tgtEl>
+                                        <p:attrNameLst>
+                                          <p:attrName>style.visibility</p:attrName>
+                                        </p:attrNameLst>
+                                      </p:cBhvr>
+                                      <p:to>
+                                        <p:strVal val="visible"/>
+                                      </p:to>
+                                    </p:set>
+                                    <p:anim calcmode="lin" valueType="num">
+                                      <p:cBhvr additive="base">
+                                        <p:cTn id="11" dur="1000" fill="hold"/>
+                                        <p:tgtEl>
+                                          <p:spTgt spid="5"/>
+                                        </p:tgtEl>
+                                        <p:attrNameLst>
+                                          <p:attrName>ppt_x</p:attrName>
+                                        </p:attrNameLst>
+                                      </p:cBhvr>
+                                      <p:tavLst>
+                                        <p:tav tm="0">
+                                          <p:val>
+                                            <p:strVal val="#ppt_x"/>
+                                          </p:val>
+                                        </p:tav>
+                                        <p:tav tm="100000">
+                                          <p:val>
+                                            <p:strVal val="#ppt_x"/>
+                                          </p:val>
+                                        </p:tav>
+                                      </p:tavLst>
+                                    </p:anim>
+                                    <p:anim calcmode="lin" valueType="num">
+                                      <p:cBhvr additive="base">
+                                        <p:cTn id="12" dur="1000" fill="hold"/>
+                                        <p:tgtEl>
+                                          <p:spTgt spid="5"/>
+                                        </p:tgtEl>
+                                        <p:attrNameLst>
+                                          <p:attrName>ppt_y</p:attrName>
+                                        </p:attrNameLst>
+                                      </p:cBhvr>
+                                      <p:tavLst>
+                                        <p:tav tm="0">
+                                          <p:val>
+                                            <p:strVal val="1+#ppt_h/2"/>
+                                          </p:val>
+                                        </p:tav>
+                                        <p:tav tm="100000">
+                                          <p:val>
+                                            <p:strVal val="#ppt_y"/>
+                                          </p:val>
+                                        </p:tav>
+                                      </p:tavLst>
+                                    </p:anim>
+                                  </p:childTnLst>
+                                </p:cTn>
+                              </p:par>
+                            </p:childTnLst>
+                          </p:cTn>
+                        </p:par>
+                        <p:par>
+                          <p:cTn id="13" fill="hold">
+                            <p:stCondLst>
+                              <p:cond delay="1000"/>
+                            </p:stCondLst>
+                            <p:childTnLst>
+                              <p:par>
+                                <p:cTn id="14" presetID="2" presetClass="entr" presetSubtype="4" fill="hold" grpId="0" nodeType="afterEffect">
+                                  <p:stCondLst>
+                                    <p:cond delay="2000"/>
+                                  </p:stCondLst>
+                                  <p:childTnLst>
+                                    <p:set>
+                                      <p:cBhvr>
+                                        <p:cTn id="15" dur="1" fill="hold">
+                                          <p:stCondLst>
+                                            <p:cond delay="0"/>
+                                          </p:stCondLst>
+                                        </p:cTn>
+                                        <p:tgtEl>
+                                          <p:spTgt spid="7"/>
+                                        </p:tgtEl>
+                                        <p:attrNameLst>
+                                          <p:attrName>style.visibility</p:attrName>
+                                        </p:attrNameLst>
+                                      </p:cBhvr>
+                                      <p:to>
+                                        <p:strVal val="visible"/>
+                                      </p:to>
+                                    </p:set>
+                                    <p:anim calcmode="lin" valueType="num">
+                                      <p:cBhvr additive="base">
+                                        <p:cTn id="16" dur="1000" fill="hold"/>
+                                        <p:tgtEl>
+                                          <p:spTgt spid="7"/>
+                                        </p:tgtEl>
+                                        <p:attrNameLst>
+                                          <p:attrName>ppt_x</p:attrName>
+                                        </p:attrNameLst>
+                                      </p:cBhvr>
+                                      <p:tavLst>
+                                        <p:tav tm="0">
+                                          <p:val>
+                                            <p:strVal val="#ppt_x"/>
+                                          </p:val>
+                                        </p:tav>
+                                        <p:tav tm="100000">
+                                          <p:val>
+                                            <p:strVal val="#ppt_x"/>
+                                          </p:val>
+                                        </p:tav>
+                                      </p:tavLst>
+                                    </p:anim>
+                                    <p:anim calcmode="lin" valueType="num">
+                                      <p:cBhvr additive="base">
+                                        <p:cTn id="17" dur="1000" fill="hold"/>
+                                        <p:tgtEl>
+                                          <p:spTgt spid="7"/>
+                                        </p:tgtEl>
+                                        <p:attrNameLst>
+                                          <p:attrName>ppt_y</p:attrName>
+                                        </p:attrNameLst>
+                                      </p:cBhvr>
+                                      <p:tavLst>
+                                        <p:tav tm="0">
+                                          <p:val>
+                                            <p:strVal val="1+#ppt_h/2"/>
+                                          </p:val>
+                                        </p:tav>
+                                        <p:tav tm="100000">
+                                          <p:val>
+                                            <p:strVal val="#ppt_y"/>
+                                          </p:val>
+                                        </p:tav>
+                                      </p:tavLst>
+                                    </p:anim>
+                                  </p:childTnLst>
+                                </p:cTn>
+                              </p:par>
+                            </p:childTnLst>
+                          </p:cTn>
+                        </p:par>
+                        <p:par>
+                          <p:cTn id="18" fill="hold">
+                            <p:stCondLst>
+                              <p:cond delay="4000"/>
+                            </p:stCondLst>
+                            <p:childTnLst>
+                              <p:par>
+                                <p:cTn id="19" presetID="2" presetClass="entr" presetSubtype="4" fill="hold" nodeType="afterEffect">
+                                  <p:stCondLst>
+                                    <p:cond delay="0"/>
+                                  </p:stCondLst>
+                                  <p:childTnLst>
+                                    <p:set>
+                                      <p:cBhvr>
+                                        <p:cTn id="20" dur="1" fill="hold">
+                                          <p:stCondLst>
+                                            <p:cond delay="0"/>
+                                          </p:stCondLst>
+                                        </p:cTn>
+                                        <p:tgtEl>
+                                          <p:spTgt spid="6"/>
+                                        </p:tgtEl>
+                                        <p:attrNameLst>
+                                          <p:attrName>style.visibility</p:attrName>
+                                        </p:attrNameLst>
+                                      </p:cBhvr>
+                                      <p:to>
+                                        <p:strVal val="visible"/>
+                                      </p:to>
+                                    </p:set>
+                                    <p:anim calcmode="lin" valueType="num">
+                                      <p:cBhvr additive="base">
+                                        <p:cTn id="21" dur="1000" fill="hold"/>
+                                        <p:tgtEl>
+                                          <p:spTgt spid="6"/>
+                                        </p:tgtEl>
+                                        <p:attrNameLst>
+                                          <p:attrName>ppt_x</p:attrName>
+                                        </p:attrNameLst>
+                                      </p:cBhvr>
+                                      <p:tavLst>
+                                        <p:tav tm="0">
+                                          <p:val>
+                                            <p:strVal val="#ppt_x"/>
+                                          </p:val>
+                                        </p:tav>
+                                        <p:tav tm="100000">
+                                          <p:val>
+                                            <p:strVal val="#ppt_x"/>
+                                          </p:val>
+                                        </p:tav>
+                                      </p:tavLst>
+                                    </p:anim>
+                                    <p:anim calcmode="lin" valueType="num">
+                                      <p:cBhvr additive="base">
+                                        <p:cTn id="22" dur="1000" fill="hold"/>
+                                        <p:tgtEl>
+                                          <p:spTgt spid="6"/>
+                                        </p:tgtEl>
+                                        <p:attrNameLst>
+                                          <p:attrName>ppt_y</p:attrName>
+                                        </p:attrNameLst>
+                                      </p:cBhvr>
+                                      <p:tavLst>
+                                        <p:tav tm="0">
+                                          <p:val>
+                                            <p:strVal val="1+#ppt_h/2"/>
+                                          </p:val>
+                                        </p:tav>
+                                        <p:tav tm="100000">
+                                          <p:val>
+                                            <p:strVal val="#ppt_y"/>
+                                          </p:val>
+                                        </p:tav>
+                                      </p:tavLst>
+                                    </p:anim>
+                                  </p:childTnLst>
+                                </p:cTn>
+                              </p:par>
+                            </p:childTnLst>
+                          </p:cTn>
+                        </p:par>
+                      </p:childTnLst>
+                    </p:cTn>
+                  </p:par>
+                </p:childTnLst>
+              </p:cTn>
+              <p:prevCondLst>
+                <p:cond evt="onPrev" delay="0">
+                  <p:tgtEl>
+                    <p:sldTgt/>
+                  </p:tgtEl>
+                </p:cond>
+              </p:prevCondLst>
+              <p:nextCondLst>
+                <p:cond evt="onNext" delay="0">
+                  <p:tgtEl>
+                    <p:sldTgt/>
+                  </p:tgtEl>
+                </p:cond>
+              </p:nextCondLst>
+            </p:seq>
+          </p:childTnLst>
+        </p:cTn>
+      </p:par>
+    </p:tnLst>
+    <p:bldLst>
+      <p:bldP spid="3" grpId="0" build="p"/>
+      <p:bldP spid="7" grpId="0"/>
+    </p:bldLst>
+  </p:timing>
+</p:sld>
+</file>
+
+<file path=ppt/slides/slide6.xml><?xml version="1.0" encoding="utf-8"?>
+<p:sld xmlns:a="http://schemas.openxmlformats.org/drawingml/2006/main" xmlns:r="http://schemas.openxmlformats.org/officeDocument/2006/relationships" xmlns:p="http://schemas.openxmlformats.org/presentationml/2006/main">
+  <p:cSld>
+    <p:spTree>
+      <p:nvGrpSpPr>
+        <p:cNvPr id="1" name=""/>
+        <p:cNvGrpSpPr/>
+        <p:nvPr/>
+      </p:nvGrpSpPr>
+      <p:grpSpPr>
+        <a:xfrm>
+          <a:off x="0" y="0"/>
+          <a:ext cx="0" cy="0"/>
+          <a:chOff x="0" y="0"/>
+          <a:chExt cx="0" cy="0"/>
+        </a:xfrm>
+      </p:grpSpPr>
+      <p:sp>
+        <p:nvSpPr>
+          <p:cNvPr id="2" name="Cím 1">
+            <a:extLst>
+              <a:ext uri="{FF2B5EF4-FFF2-40B4-BE49-F238E27FC236}">
+                <a16:creationId xmlns:a16="http://schemas.microsoft.com/office/drawing/2014/main" id="{4977722A-EC43-8CBC-09DA-2598D9F96E59}"/>
+              </a:ext>
+            </a:extLst>
+          </p:cNvPr>
+          <p:cNvSpPr>
+            <a:spLocks noGrp="1"/>
+          </p:cNvSpPr>
+          <p:nvPr>
+            <p:ph type="title"/>
+          </p:nvPr>
+        </p:nvSpPr>
+        <p:spPr/>
+        <p:txBody>
+          <a:bodyPr/>
+          <a:lstStyle/>
+          <a:p>
+            <a:r>
+              <a:rPr lang="hu-HU" sz="4400" err="1">
+                <a:latin typeface="Bahnschrift SemiBold"/>
+              </a:rPr>
+              <a:t>Branch</a:t>
+            </a:r>
+            <a:r>
+              <a:rPr lang="hu-HU" sz="4400">
+                <a:latin typeface="Bahnschrift SemiBold"/>
+              </a:rPr>
+              <a:t> I.</a:t>
+            </a:r>
+            <a:endParaRPr lang="hu-HU" err="1"/>
+          </a:p>
+        </p:txBody>
+      </p:sp>
+      <p:sp>
+        <p:nvSpPr>
+          <p:cNvPr id="3" name="Tartalom helye 2">
+            <a:extLst>
+              <a:ext uri="{FF2B5EF4-FFF2-40B4-BE49-F238E27FC236}">
+                <a16:creationId xmlns:a16="http://schemas.microsoft.com/office/drawing/2014/main" id="{2D396B7E-FE12-B074-41B8-52F0D728ABF9}"/>
+              </a:ext>
+            </a:extLst>
+          </p:cNvPr>
+          <p:cNvSpPr>
+            <a:spLocks noGrp="1"/>
+          </p:cNvSpPr>
+          <p:nvPr>
+            <p:ph idx="1"/>
+          </p:nvPr>
+        </p:nvSpPr>
+        <p:spPr>
+          <a:xfrm>
+            <a:off x="5109983" y="837064"/>
+            <a:ext cx="6275035" cy="3359243"/>
+          </a:xfrm>
+        </p:spPr>
+        <p:txBody>
+          <a:bodyPr vert="horz" lIns="91440" tIns="45720" rIns="91440" bIns="45720" rtlCol="0" anchor="ctr">
+            <a:noAutofit/>
+          </a:bodyPr>
+          <a:lstStyle/>
+          <a:p>
+            <a:r>
+              <a:rPr lang="hu-HU" sz="3200">
+                <a:latin typeface="Bahnschrift"/>
+              </a:rPr>
+              <a:t>Egy ág az alap (helyi) könyvtár egy másik, különböző verziója</a:t>
+            </a:r>
+          </a:p>
+          <a:p>
+            <a:r>
+              <a:rPr lang="hu-HU" sz="3200">
+                <a:latin typeface="Bahnschrift"/>
+              </a:rPr>
+              <a:t>Parancs: "</a:t>
+            </a:r>
+            <a:r>
+              <a:rPr lang="hu-HU" sz="3200" err="1">
+                <a:latin typeface="Bahnschrift"/>
+              </a:rPr>
+              <a:t>git</a:t>
+            </a:r>
+            <a:r>
+              <a:rPr lang="hu-HU" sz="3200">
+                <a:latin typeface="Bahnschrift"/>
+              </a:rPr>
+              <a:t> </a:t>
+            </a:r>
+            <a:r>
+              <a:rPr lang="hu-HU" sz="3200" err="1">
+                <a:latin typeface="Bahnschrift"/>
+              </a:rPr>
+              <a:t>branch</a:t>
+            </a:r>
+            <a:r>
+              <a:rPr lang="hu-HU" sz="3200">
+                <a:latin typeface="Bahnschrift"/>
+              </a:rPr>
+              <a:t> [név]"</a:t>
+            </a:r>
+            <a:endParaRPr lang="hu-HU" sz="3200"/>
+          </a:p>
+        </p:txBody>
+      </p:sp>
+      <p:sp>
+        <p:nvSpPr>
+          <p:cNvPr id="4" name="Szöveg helye 3">
+            <a:extLst>
+              <a:ext uri="{FF2B5EF4-FFF2-40B4-BE49-F238E27FC236}">
+                <a16:creationId xmlns:a16="http://schemas.microsoft.com/office/drawing/2014/main" id="{4E949E2C-9989-A5CA-D52E-7F4638AEA676}"/>
+              </a:ext>
+            </a:extLst>
+          </p:cNvPr>
+          <p:cNvSpPr>
+            <a:spLocks noGrp="1"/>
+          </p:cNvSpPr>
+          <p:nvPr>
+            <p:ph type="body" sz="half" idx="2"/>
+          </p:nvPr>
+        </p:nvSpPr>
+        <p:spPr/>
+        <p:txBody>
+          <a:bodyPr vert="horz" lIns="91440" tIns="45720" rIns="91440" bIns="45720" rtlCol="0" anchor="t">
+            <a:normAutofit/>
+          </a:bodyPr>
+          <a:lstStyle/>
+          <a:p>
+            <a:r>
+              <a:rPr lang="hu-HU" sz="3200">
+                <a:latin typeface="Bahnschrift"/>
+              </a:rPr>
+              <a:t>Ág</a:t>
+            </a:r>
+            <a:endParaRPr lang="hu-HU"/>
+          </a:p>
+        </p:txBody>
+      </p:sp>
+      <p:pic>
+        <p:nvPicPr>
+          <p:cNvPr id="5" name="Kép 4" descr="A képen szöveg, képernyőkép, Betűtípus látható&#10;&#10;Automatikusan generált leírás">
+            <a:extLst>
+              <a:ext uri="{FF2B5EF4-FFF2-40B4-BE49-F238E27FC236}">
+                <a16:creationId xmlns:a16="http://schemas.microsoft.com/office/drawing/2014/main" id="{DA710F1C-B578-985A-A2EB-05E7FC865B29}"/>
+              </a:ext>
+            </a:extLst>
+          </p:cNvPr>
+          <p:cNvPicPr>
+            <a:picLocks noChangeAspect="1"/>
+          </p:cNvPicPr>
+          <p:nvPr/>
+        </p:nvPicPr>
+        <p:blipFill>
+          <a:blip r:embed="rId2"/>
+          <a:srcRect t="14035" r="173" b="-877"/>
+          <a:stretch/>
+        </p:blipFill>
+        <p:spPr>
+          <a:xfrm>
+            <a:off x="5402069" y="4307803"/>
+            <a:ext cx="5690400" cy="985086"/>
+          </a:xfrm>
+          <a:prstGeom prst="rect">
+            <a:avLst/>
+          </a:prstGeom>
+          <a:ln w="127000" cap="sq">
+            <a:solidFill>
+              <a:srgbClr val="000000"/>
+            </a:solidFill>
+            <a:miter lim="800000"/>
+          </a:ln>
+          <a:effectLst>
+            <a:outerShdw blurRad="57150" dist="50800" dir="2700000" algn="tl" rotWithShape="0">
+              <a:srgbClr val="000000">
+                <a:alpha val="40000"/>
+              </a:srgbClr>
+            </a:outerShdw>
+          </a:effectLst>
+        </p:spPr>
+      </p:pic>
+    </p:spTree>
+    <p:extLst>
+      <p:ext uri="{BB962C8B-B14F-4D97-AF65-F5344CB8AC3E}">
+        <p14:creationId xmlns:p14="http://schemas.microsoft.com/office/powerpoint/2010/main" val="1541073927"/>
+      </p:ext>
+    </p:extLst>
+  </p:cSld>
+  <p:clrMapOvr>
+    <a:masterClrMapping/>
+  </p:clrMapOvr>
+  <p:transition spd="slow">
+    <p:cover/>
+  </p:transition>
+  <p:timing>
+    <p:tnLst>
+      <p:par>
+        <p:cTn id="1" dur="indefinite" restart="never" nodeType="tmRoot">
+          <p:childTnLst>
+            <p:seq concurrent="1" nextAc="seek">
+              <p:cTn id="2" dur="indefinite" nodeType="mainSeq">
+                <p:childTnLst>
+                  <p:par>
+                    <p:cTn id="3" fill="hold">
+                      <p:stCondLst>
+                        <p:cond delay="indefinite"/>
+                      </p:stCondLst>
+                      <p:childTnLst>
+                        <p:par>
+                          <p:cTn id="4" fill="hold">
+                            <p:stCondLst>
+                              <p:cond delay="0"/>
+                            </p:stCondLst>
+                            <p:childTnLst>
+                              <p:par>
+                                <p:cTn id="5" presetID="2" presetClass="entr" presetSubtype="4" fill="hold" grpId="0" nodeType="clickEffect">
+                                  <p:stCondLst>
+                                    <p:cond delay="0"/>
+                                  </p:stCondLst>
+                                  <p:childTnLst>
+                                    <p:set>
+                                      <p:cBhvr>
+                                        <p:cTn id="6" dur="1" fill="hold">
+                                          <p:stCondLst>
+                                            <p:cond delay="0"/>
+                                          </p:stCondLst>
+                                        </p:cTn>
+                                        <p:tgtEl>
+                                          <p:spTgt spid="3">
+                                            <p:txEl>
+                                              <p:pRg st="0" end="0"/>
+                                            </p:txEl>
+                                          </p:spTgt>
+                                        </p:tgtEl>
+                                        <p:attrNameLst>
+                                          <p:attrName>style.visibility</p:attrName>
+                                        </p:attrNameLst>
+                                      </p:cBhvr>
+                                      <p:to>
+                                        <p:strVal val="visible"/>
+                                      </p:to>
+                                    </p:set>
+                                    <p:anim calcmode="lin" valueType="num">
+                                      <p:cBhvr additive="base">
+                                        <p:cTn id="7" dur="1000" fill="hold"/>
+                                        <p:tgtEl>
+                                          <p:spTgt spid="3">
+                                            <p:txEl>
+                                              <p:pRg st="0" end="0"/>
+                                            </p:txEl>
+                                          </p:spTgt>
+                                        </p:tgtEl>
+                                        <p:attrNameLst>
+                                          <p:attrName>ppt_x</p:attrName>
+                                        </p:attrNameLst>
+                                      </p:cBhvr>
+                                      <p:tavLst>
+                                        <p:tav tm="0">
+                                          <p:val>
+                                            <p:strVal val="#ppt_x"/>
+                                          </p:val>
+                                        </p:tav>
+                                        <p:tav tm="100000">
+                                          <p:val>
+                                            <p:strVal val="#ppt_x"/>
+                                          </p:val>
+                                        </p:tav>
+                                      </p:tavLst>
+                                    </p:anim>
+                                    <p:anim calcmode="lin" valueType="num">
+                                      <p:cBhvr additive="base">
+                                        <p:cTn id="8" dur="1000" fill="hold"/>
+                                        <p:tgtEl>
+                                          <p:spTgt spid="3">
+                                            <p:txEl>
+                                              <p:pRg st="0" end="0"/>
+                                            </p:txEl>
+                                          </p:spTgt>
+                                        </p:tgtEl>
+                                        <p:attrNameLst>
+                                          <p:attrName>ppt_y</p:attrName>
+                                        </p:attrNameLst>
+                                      </p:cBhvr>
+                                      <p:tavLst>
+                                        <p:tav tm="0">
+                                          <p:val>
+                                            <p:strVal val="1+#ppt_h/2"/>
+                                          </p:val>
+                                        </p:tav>
+                                        <p:tav tm="100000">
+                                          <p:val>
+                                            <p:strVal val="#ppt_y"/>
+                                          </p:val>
+                                        </p:tav>
+                                      </p:tavLst>
+                                    </p:anim>
+                                  </p:childTnLst>
+                                </p:cTn>
+                              </p:par>
+                            </p:childTnLst>
+                          </p:cTn>
+                        </p:par>
+                        <p:par>
+                          <p:cTn id="9" fill="hold">
+                            <p:stCondLst>
+                              <p:cond delay="1000"/>
+                            </p:stCondLst>
+                            <p:childTnLst>
+                              <p:par>
+                                <p:cTn id="10" presetID="2" presetClass="entr" presetSubtype="4" fill="hold" grpId="0" nodeType="afterEffect">
+                                  <p:stCondLst>
+                                    <p:cond delay="2000"/>
+                                  </p:stCondLst>
+                                  <p:childTnLst>
+                                    <p:set>
+                                      <p:cBhvr>
+                                        <p:cTn id="11" dur="1" fill="hold">
+                                          <p:stCondLst>
+                                            <p:cond delay="0"/>
+                                          </p:stCondLst>
+                                        </p:cTn>
+                                        <p:tgtEl>
+                                          <p:spTgt spid="3">
+                                            <p:txEl>
+                                              <p:pRg st="1" end="1"/>
+                                            </p:txEl>
+                                          </p:spTgt>
+                                        </p:tgtEl>
+                                        <p:attrNameLst>
+                                          <p:attrName>style.visibility</p:attrName>
+                                        </p:attrNameLst>
+                                      </p:cBhvr>
+                                      <p:to>
+                                        <p:strVal val="visible"/>
+                                      </p:to>
+                                    </p:set>
+                                    <p:anim calcmode="lin" valueType="num">
+                                      <p:cBhvr additive="base">
+                                        <p:cTn id="12" dur="1000" fill="hold"/>
+                                        <p:tgtEl>
+                                          <p:spTgt spid="3">
+                                            <p:txEl>
+                                              <p:pRg st="1" end="1"/>
+                                            </p:txEl>
+                                          </p:spTgt>
+                                        </p:tgtEl>
+                                        <p:attrNameLst>
+                                          <p:attrName>ppt_x</p:attrName>
+                                        </p:attrNameLst>
+                                      </p:cBhvr>
+                                      <p:tavLst>
+                                        <p:tav tm="0">
+                                          <p:val>
+                                            <p:strVal val="#ppt_x"/>
+                                          </p:val>
+                                        </p:tav>
+                                        <p:tav tm="100000">
+                                          <p:val>
+                                            <p:strVal val="#ppt_x"/>
+                                          </p:val>
+                                        </p:tav>
+                                      </p:tavLst>
+                                    </p:anim>
+                                    <p:anim calcmode="lin" valueType="num">
+                                      <p:cBhvr additive="base">
+                                        <p:cTn id="13" dur="1000" fill="hold"/>
+                                        <p:tgtEl>
+                                          <p:spTgt spid="3">
+                                            <p:txEl>
+                                              <p:pRg st="1" end="1"/>
+                                            </p:txEl>
+                                          </p:spTgt>
+                                        </p:tgtEl>
+                                        <p:attrNameLst>
+                                          <p:attrName>ppt_y</p:attrName>
+                                        </p:attrNameLst>
+                                      </p:cBhvr>
+                                      <p:tavLst>
+                                        <p:tav tm="0">
+                                          <p:val>
+                                            <p:strVal val="1+#ppt_h/2"/>
+                                          </p:val>
+                                        </p:tav>
+                                        <p:tav tm="100000">
+                                          <p:val>
+                                            <p:strVal val="#ppt_y"/>
+                                          </p:val>
+                                        </p:tav>
+                                      </p:tavLst>
+                                    </p:anim>
+                                  </p:childTnLst>
+                                </p:cTn>
+                              </p:par>
+                            </p:childTnLst>
+                          </p:cTn>
+                        </p:par>
+                        <p:par>
+                          <p:cTn id="14" fill="hold">
+                            <p:stCondLst>
+                              <p:cond delay="4000"/>
+                            </p:stCondLst>
+                            <p:childTnLst>
+                              <p:par>
+                                <p:cTn id="15" presetID="2" presetClass="entr" presetSubtype="4" fill="hold" nodeType="afterEffect">
+                                  <p:stCondLst>
+                                    <p:cond delay="2000"/>
+                                  </p:stCondLst>
+                                  <p:childTnLst>
+                                    <p:set>
+                                      <p:cBhvr>
+                                        <p:cTn id="16" dur="1" fill="hold">
+                                          <p:stCondLst>
+                                            <p:cond delay="0"/>
+                                          </p:stCondLst>
+                                        </p:cTn>
+                                        <p:tgtEl>
+                                          <p:spTgt spid="5"/>
+                                        </p:tgtEl>
+                                        <p:attrNameLst>
+                                          <p:attrName>style.visibility</p:attrName>
+                                        </p:attrNameLst>
+                                      </p:cBhvr>
+                                      <p:to>
+                                        <p:strVal val="visible"/>
+                                      </p:to>
+                                    </p:set>
+                                    <p:anim calcmode="lin" valueType="num">
+                                      <p:cBhvr additive="base">
+                                        <p:cTn id="17" dur="1000" fill="hold"/>
+                                        <p:tgtEl>
+                                          <p:spTgt spid="5"/>
+                                        </p:tgtEl>
+                                        <p:attrNameLst>
+                                          <p:attrName>ppt_x</p:attrName>
+                                        </p:attrNameLst>
+                                      </p:cBhvr>
+                                      <p:tavLst>
+                                        <p:tav tm="0">
+                                          <p:val>
+                                            <p:strVal val="#ppt_x"/>
+                                          </p:val>
+                                        </p:tav>
+                                        <p:tav tm="100000">
+                                          <p:val>
+                                            <p:strVal val="#ppt_x"/>
+                                          </p:val>
+                                        </p:tav>
+                                      </p:tavLst>
+                                    </p:anim>
+                                    <p:anim calcmode="lin" valueType="num">
+                                      <p:cBhvr additive="base">
+                                        <p:cTn id="18" dur="1000" fill="hold"/>
+                                        <p:tgtEl>
+                                          <p:spTgt spid="5"/>
+                                        </p:tgtEl>
+                                        <p:attrNameLst>
+                                          <p:attrName>ppt_y</p:attrName>
+                                        </p:attrNameLst>
+                                      </p:cBhvr>
+                                      <p:tavLst>
+                                        <p:tav tm="0">
+                                          <p:val>
+                                            <p:strVal val="1+#ppt_h/2"/>
+                                          </p:val>
+                                        </p:tav>
+                                        <p:tav tm="100000">
+                                          <p:val>
+                                            <p:strVal val="#ppt_y"/>
+                                          </p:val>
+                                        </p:tav>
+                                      </p:tavLst>
+                                    </p:anim>
+                                  </p:childTnLst>
+                                </p:cTn>
+                              </p:par>
+                            </p:childTnLst>
+                          </p:cTn>
+                        </p:par>
+                      </p:childTnLst>
+                    </p:cTn>
+                  </p:par>
+                </p:childTnLst>
+              </p:cTn>
+              <p:prevCondLst>
+                <p:cond evt="onPrev" delay="0">
+                  <p:tgtEl>
+                    <p:sldTgt/>
+                  </p:tgtEl>
+                </p:cond>
+              </p:prevCondLst>
+              <p:nextCondLst>
+                <p:cond evt="onNext" delay="0">
+                  <p:tgtEl>
+                    <p:sldTgt/>
+                  </p:tgtEl>
+                </p:cond>
+              </p:nextCondLst>
+            </p:seq>
+          </p:childTnLst>
+        </p:cTn>
+      </p:par>
+    </p:tnLst>
+    <p:bldLst>
+      <p:bldP spid="3" grpId="0" build="p"/>
+    </p:bldLst>
+  </p:timing>
+</p:sld>
+</file>
+
+<file path=ppt/slides/slide7.xml><?xml version="1.0" encoding="utf-8"?>
+<p:sld xmlns:a="http://schemas.openxmlformats.org/drawingml/2006/main" xmlns:r="http://schemas.openxmlformats.org/officeDocument/2006/relationships" xmlns:p="http://schemas.openxmlformats.org/presentationml/2006/main">
+  <p:cSld>
+    <p:spTree>
+      <p:nvGrpSpPr>
+        <p:cNvPr id="1" name=""/>
+        <p:cNvGrpSpPr/>
+        <p:nvPr/>
+      </p:nvGrpSpPr>
+      <p:grpSpPr>
+        <a:xfrm>
+          <a:off x="0" y="0"/>
+          <a:ext cx="0" cy="0"/>
+          <a:chOff x="0" y="0"/>
+          <a:chExt cx="0" cy="0"/>
+        </a:xfrm>
+      </p:grpSpPr>
+      <p:sp>
+        <p:nvSpPr>
+          <p:cNvPr id="2" name="Cím 1">
+            <a:extLst>
+              <a:ext uri="{FF2B5EF4-FFF2-40B4-BE49-F238E27FC236}">
+                <a16:creationId xmlns:a16="http://schemas.microsoft.com/office/drawing/2014/main" id="{4977722A-EC43-8CBC-09DA-2598D9F96E59}"/>
+              </a:ext>
+            </a:extLst>
+          </p:cNvPr>
+          <p:cNvSpPr>
+            <a:spLocks noGrp="1"/>
+          </p:cNvSpPr>
+          <p:nvPr>
+            <p:ph type="title"/>
+          </p:nvPr>
+        </p:nvSpPr>
+        <p:spPr/>
+        <p:txBody>
+          <a:bodyPr/>
+          <a:lstStyle/>
+          <a:p>
+            <a:r>
+              <a:rPr lang="hu-HU" sz="4400" err="1">
+                <a:latin typeface="Bahnschrift SemiBold"/>
+              </a:rPr>
+              <a:t>Branch</a:t>
+            </a:r>
+            <a:r>
+              <a:rPr lang="hu-HU" sz="4400">
+                <a:latin typeface="Bahnschrift SemiBold"/>
+              </a:rPr>
+              <a:t> II.</a:t>
+            </a:r>
+            <a:endParaRPr lang="hu-HU"/>
+          </a:p>
+        </p:txBody>
+      </p:sp>
+      <p:sp>
+        <p:nvSpPr>
+          <p:cNvPr id="3" name="Tartalom helye 2">
+            <a:extLst>
+              <a:ext uri="{FF2B5EF4-FFF2-40B4-BE49-F238E27FC236}">
+                <a16:creationId xmlns:a16="http://schemas.microsoft.com/office/drawing/2014/main" id="{2D396B7E-FE12-B074-41B8-52F0D728ABF9}"/>
+              </a:ext>
+            </a:extLst>
+          </p:cNvPr>
+          <p:cNvSpPr>
+            <a:spLocks noGrp="1"/>
+          </p:cNvSpPr>
+          <p:nvPr>
+            <p:ph idx="1"/>
+          </p:nvPr>
+        </p:nvSpPr>
+        <p:spPr>
+          <a:xfrm>
+            <a:off x="5109983" y="451117"/>
+            <a:ext cx="6275035" cy="3794670"/>
+          </a:xfrm>
+        </p:spPr>
+        <p:txBody>
+          <a:bodyPr>
+            <a:normAutofit/>
+          </a:bodyPr>
+          <a:lstStyle/>
+          <a:p>
+            <a:r>
+              <a:rPr lang="hu-HU" sz="3200">
+                <a:latin typeface="Bahnschrift"/>
+              </a:rPr>
+              <a:t>Egy ág belépéséhez a "</a:t>
+            </a:r>
+            <a:r>
+              <a:rPr lang="hu-HU" sz="3200" err="1">
+                <a:latin typeface="Bahnschrift"/>
+              </a:rPr>
+              <a:t>git</a:t>
+            </a:r>
+            <a:r>
+              <a:rPr lang="hu-HU" sz="3200">
+                <a:latin typeface="Bahnschrift"/>
+              </a:rPr>
+              <a:t> </a:t>
+            </a:r>
+            <a:r>
+              <a:rPr lang="hu-HU" sz="3200" err="1">
+                <a:latin typeface="Bahnschrift"/>
+              </a:rPr>
+              <a:t>checkout</a:t>
+            </a:r>
+            <a:r>
+              <a:rPr lang="hu-HU" sz="3200">
+                <a:latin typeface="Bahnschrift"/>
+              </a:rPr>
+              <a:t> [név]" parancs szükséges</a:t>
+            </a:r>
+            <a:endParaRPr lang="hu-HU" sz="3200"/>
+          </a:p>
+        </p:txBody>
+      </p:sp>
+      <p:sp>
+        <p:nvSpPr>
+          <p:cNvPr id="4" name="Szöveg helye 3">
+            <a:extLst>
+              <a:ext uri="{FF2B5EF4-FFF2-40B4-BE49-F238E27FC236}">
+                <a16:creationId xmlns:a16="http://schemas.microsoft.com/office/drawing/2014/main" id="{4E949E2C-9989-A5CA-D52E-7F4638AEA676}"/>
+              </a:ext>
+            </a:extLst>
+          </p:cNvPr>
+          <p:cNvSpPr>
+            <a:spLocks noGrp="1"/>
+          </p:cNvSpPr>
+          <p:nvPr>
+            <p:ph type="body" sz="half" idx="2"/>
+          </p:nvPr>
+        </p:nvSpPr>
+        <p:spPr/>
+        <p:txBody>
+          <a:bodyPr vert="horz" lIns="91440" tIns="45720" rIns="91440" bIns="45720" rtlCol="0" anchor="t">
+            <a:normAutofit/>
+          </a:bodyPr>
+          <a:lstStyle/>
+          <a:p>
+            <a:r>
+              <a:rPr lang="hu-HU" sz="3200">
+                <a:latin typeface="Bahnschrift"/>
+              </a:rPr>
+              <a:t>Lépés ágak között</a:t>
+            </a:r>
+            <a:endParaRPr lang="hu-HU" sz="3200"/>
+          </a:p>
+        </p:txBody>
+      </p:sp>
+      <p:pic>
+        <p:nvPicPr>
+          <p:cNvPr id="6" name="Kép 5" descr="A képen szöveg, képernyőkép, Betűtípus, sor látható&#10;&#10;Automatikusan generált leírás">
+            <a:extLst>
+              <a:ext uri="{FF2B5EF4-FFF2-40B4-BE49-F238E27FC236}">
+                <a16:creationId xmlns:a16="http://schemas.microsoft.com/office/drawing/2014/main" id="{69370207-4487-344D-1DB7-4BDD0DAC9533}"/>
+              </a:ext>
+            </a:extLst>
+          </p:cNvPr>
+          <p:cNvPicPr>
+            <a:picLocks noChangeAspect="1"/>
+          </p:cNvPicPr>
+          <p:nvPr/>
+        </p:nvPicPr>
+        <p:blipFill>
+          <a:blip r:embed="rId2"/>
+          <a:stretch>
+            <a:fillRect/>
+          </a:stretch>
+        </p:blipFill>
+        <p:spPr>
+          <a:xfrm>
+            <a:off x="5111140" y="3763597"/>
+            <a:ext cx="6268182" cy="1216269"/>
+          </a:xfrm>
+          <a:prstGeom prst="rect">
+            <a:avLst/>
+          </a:prstGeom>
+          <a:ln w="127000" cap="sq">
+            <a:solidFill>
+              <a:srgbClr val="000000"/>
+            </a:solidFill>
+            <a:miter lim="800000"/>
+          </a:ln>
+          <a:effectLst>
+            <a:outerShdw blurRad="57150" dist="50800" dir="2700000" algn="tl" rotWithShape="0">
+              <a:srgbClr val="000000">
+                <a:alpha val="40000"/>
+              </a:srgbClr>
+            </a:outerShdw>
+          </a:effectLst>
+        </p:spPr>
+      </p:pic>
+    </p:spTree>
+    <p:extLst>
+      <p:ext uri="{BB962C8B-B14F-4D97-AF65-F5344CB8AC3E}">
+        <p14:creationId xmlns:p14="http://schemas.microsoft.com/office/powerpoint/2010/main" val="3778959671"/>
+      </p:ext>
+    </p:extLst>
+  </p:cSld>
+  <p:clrMapOvr>
+    <a:masterClrMapping/>
+  </p:clrMapOvr>
+  <p:transition spd="slow">
+    <p:cover/>
+  </p:transition>
+  <p:timing>
+    <p:tnLst>
+      <p:par>
+        <p:cTn id="1" dur="indefinite" restart="never" nodeType="tmRoot">
+          <p:childTnLst>
+            <p:seq concurrent="1" nextAc="seek">
+              <p:cTn id="2" dur="indefinite" nodeType="mainSeq">
+                <p:childTnLst>
+                  <p:par>
+                    <p:cTn id="3" fill="hold">
+                      <p:stCondLst>
+                        <p:cond delay="indefinite"/>
+                      </p:stCondLst>
+                      <p:childTnLst>
+                        <p:par>
+                          <p:cTn id="4" fill="hold">
+                            <p:stCondLst>
+                              <p:cond delay="0"/>
+                            </p:stCondLst>
+                            <p:childTnLst>
+                              <p:par>
+                                <p:cTn id="5" presetID="2" presetClass="entr" presetSubtype="4" fill="hold" grpId="0" nodeType="clickEffect">
+                                  <p:stCondLst>
+                                    <p:cond delay="0"/>
+                                  </p:stCondLst>
+                                  <p:childTnLst>
+                                    <p:set>
+                                      <p:cBhvr>
+                                        <p:cTn id="6" dur="1" fill="hold">
+                                          <p:stCondLst>
+                                            <p:cond delay="0"/>
+                                          </p:stCondLst>
+                                        </p:cTn>
+                                        <p:tgtEl>
+                                          <p:spTgt spid="3">
+                                            <p:txEl>
+                                              <p:pRg st="0" end="0"/>
+                                            </p:txEl>
+                                          </p:spTgt>
+                                        </p:tgtEl>
+                                        <p:attrNameLst>
+                                          <p:attrName>style.visibility</p:attrName>
+                                        </p:attrNameLst>
+                                      </p:cBhvr>
+                                      <p:to>
+                                        <p:strVal val="visible"/>
+                                      </p:to>
+                                    </p:set>
+                                    <p:anim calcmode="lin" valueType="num">
+                                      <p:cBhvr additive="base">
+                                        <p:cTn id="7" dur="1000" fill="hold"/>
+                                        <p:tgtEl>
+                                          <p:spTgt spid="3">
+                                            <p:txEl>
+                                              <p:pRg st="0" end="0"/>
+                                            </p:txEl>
+                                          </p:spTgt>
+                                        </p:tgtEl>
+                                        <p:attrNameLst>
+                                          <p:attrName>ppt_x</p:attrName>
+                                        </p:attrNameLst>
+                                      </p:cBhvr>
+                                      <p:tavLst>
+                                        <p:tav tm="0">
+                                          <p:val>
+                                            <p:strVal val="#ppt_x"/>
+                                          </p:val>
+                                        </p:tav>
+                                        <p:tav tm="100000">
+                                          <p:val>
+                                            <p:strVal val="#ppt_x"/>
+                                          </p:val>
+                                        </p:tav>
+                                      </p:tavLst>
+                                    </p:anim>
+                                    <p:anim calcmode="lin" valueType="num">
+                                      <p:cBhvr additive="base">
+                                        <p:cTn id="8" dur="1000" fill="hold"/>
+                                        <p:tgtEl>
+                                          <p:spTgt spid="3">
+                                            <p:txEl>
+                                              <p:pRg st="0" end="0"/>
+                                            </p:txEl>
+                                          </p:spTgt>
+                                        </p:tgtEl>
+                                        <p:attrNameLst>
+                                          <p:attrName>ppt_y</p:attrName>
+                                        </p:attrNameLst>
+                                      </p:cBhvr>
+                                      <p:tavLst>
+                                        <p:tav tm="0">
+                                          <p:val>
+                                            <p:strVal val="1+#ppt_h/2"/>
+                                          </p:val>
+                                        </p:tav>
+                                        <p:tav tm="100000">
+                                          <p:val>
+                                            <p:strVal val="#ppt_y"/>
+                                          </p:val>
+                                        </p:tav>
+                                      </p:tavLst>
+                                    </p:anim>
+                                  </p:childTnLst>
+                                </p:cTn>
+                              </p:par>
+                              <p:par>
+                                <p:cTn id="9" presetID="2" presetClass="entr" presetSubtype="4" fill="hold" nodeType="withEffect">
+                                  <p:stCondLst>
+                                    <p:cond delay="0"/>
+                                  </p:stCondLst>
+                                  <p:childTnLst>
+                                    <p:set>
+                                      <p:cBhvr>
+                                        <p:cTn id="10" dur="1" fill="hold">
+                                          <p:stCondLst>
+                                            <p:cond delay="0"/>
+                                          </p:stCondLst>
+                                        </p:cTn>
+                                        <p:tgtEl>
+                                          <p:spTgt spid="6"/>
+                                        </p:tgtEl>
+                                        <p:attrNameLst>
+                                          <p:attrName>style.visibility</p:attrName>
+                                        </p:attrNameLst>
+                                      </p:cBhvr>
+                                      <p:to>
+                                        <p:strVal val="visible"/>
+                                      </p:to>
+                                    </p:set>
+                                    <p:anim calcmode="lin" valueType="num">
+                                      <p:cBhvr additive="base">
+                                        <p:cTn id="11" dur="1000" fill="hold"/>
+                                        <p:tgtEl>
+                                          <p:spTgt spid="6"/>
+                                        </p:tgtEl>
+                                        <p:attrNameLst>
+                                          <p:attrName>ppt_x</p:attrName>
+                                        </p:attrNameLst>
+                                      </p:cBhvr>
+                                      <p:tavLst>
+                                        <p:tav tm="0">
+                                          <p:val>
+                                            <p:strVal val="#ppt_x"/>
+                                          </p:val>
+                                        </p:tav>
+                                        <p:tav tm="100000">
+                                          <p:val>
+                                            <p:strVal val="#ppt_x"/>
+                                          </p:val>
+                                        </p:tav>
+                                      </p:tavLst>
+                                    </p:anim>
+                                    <p:anim calcmode="lin" valueType="num">
+                                      <p:cBhvr additive="base">
+                                        <p:cTn id="12" dur="1000" fill="hold"/>
+                                        <p:tgtEl>
+                                          <p:spTgt spid="6"/>
+                                        </p:tgtEl>
+                                        <p:attrNameLst>
+                                          <p:attrName>ppt_y</p:attrName>
+                                        </p:attrNameLst>
+                                      </p:cBhvr>
+                                      <p:tavLst>
+                                        <p:tav tm="0">
+                                          <p:val>
+                                            <p:strVal val="1+#ppt_h/2"/>
+                                          </p:val>
+                                        </p:tav>
+                                        <p:tav tm="100000">
+                                          <p:val>
+                                            <p:strVal val="#ppt_y"/>
+                                          </p:val>
+                                        </p:tav>
+                                      </p:tavLst>
+                                    </p:anim>
+                                  </p:childTnLst>
+                                </p:cTn>
+                              </p:par>
+                            </p:childTnLst>
+                          </p:cTn>
+                        </p:par>
+                      </p:childTnLst>
+                    </p:cTn>
+                  </p:par>
+                </p:childTnLst>
+              </p:cTn>
+              <p:prevCondLst>
+                <p:cond evt="onPrev" delay="0">
+                  <p:tgtEl>
+                    <p:sldTgt/>
+                  </p:tgtEl>
+                </p:cond>
+              </p:prevCondLst>
+              <p:nextCondLst>
+                <p:cond evt="onNext" delay="0">
+                  <p:tgtEl>
+                    <p:sldTgt/>
+                  </p:tgtEl>
+                </p:cond>
+              </p:nextCondLst>
+            </p:seq>
+          </p:childTnLst>
+        </p:cTn>
+      </p:par>
+    </p:tnLst>
+    <p:bldLst>
+      <p:bldP spid="3" grpId="0" build="p"/>
+    </p:bldLst>
+  </p:timing>
+</p:sld>
+</file>
+
+<file path=ppt/slides/slide8.xml><?xml version="1.0" encoding="utf-8"?>
+<p:sld xmlns:a="http://schemas.openxmlformats.org/drawingml/2006/main" xmlns:r="http://schemas.openxmlformats.org/officeDocument/2006/relationships" xmlns:p="http://schemas.openxmlformats.org/presentationml/2006/main">
+  <p:cSld>
+    <p:spTree>
+      <p:nvGrpSpPr>
+        <p:cNvPr id="1" name=""/>
+        <p:cNvGrpSpPr/>
+        <p:nvPr/>
+      </p:nvGrpSpPr>
+      <p:grpSpPr>
+        <a:xfrm>
+          <a:off x="0" y="0"/>
+          <a:ext cx="0" cy="0"/>
+          <a:chOff x="0" y="0"/>
+          <a:chExt cx="0" cy="0"/>
+        </a:xfrm>
+      </p:grpSpPr>
+      <p:sp>
+        <p:nvSpPr>
+          <p:cNvPr id="2" name="Cím 1"/>
+          <p:cNvSpPr>
+            <a:spLocks noGrp="1"/>
+          </p:cNvSpPr>
+          <p:nvPr>
+            <p:ph type="title"/>
+          </p:nvPr>
+        </p:nvSpPr>
+        <p:spPr>
+          <a:xfrm>
+            <a:off x="3350900" y="2235151"/>
+            <a:ext cx="5490224" cy="1689390"/>
+          </a:xfrm>
+        </p:spPr>
+        <p:txBody>
+          <a:bodyPr/>
+          <a:lstStyle/>
+          <a:p>
+            <a:r>
+              <a:rPr lang="hu-HU">
+                <a:latin typeface="Bahnschrift SemiBold"/>
+              </a:rPr>
+              <a:t>További parancsok</a:t>
+            </a:r>
+            <a:endParaRPr lang="hu-HU"/>
+          </a:p>
+        </p:txBody>
+      </p:sp>
+    </p:spTree>
+    <p:extLst>
+      <p:ext uri="{BB962C8B-B14F-4D97-AF65-F5344CB8AC3E}">
+        <p14:creationId xmlns:p14="http://schemas.microsoft.com/office/powerpoint/2010/main" val="389115106"/>
+      </p:ext>
+    </p:extLst>
+  </p:cSld>
+  <p:clrMapOvr>
+    <a:masterClrMapping/>
+  </p:clrMapOvr>
+  <p:transition spd="slow">
+    <p:cover/>
+  </p:transition>
+</p:sld>
+</file>
+
+<file path=ppt/slides/slide9.xml><?xml version="1.0" encoding="utf-8"?>
+<p:sld xmlns:a="http://schemas.openxmlformats.org/drawingml/2006/main" xmlns:r="http://schemas.openxmlformats.org/officeDocument/2006/relationships" xmlns:p="http://schemas.openxmlformats.org/presentationml/2006/main">
+  <p:cSld>
+    <p:spTree>
+      <p:nvGrpSpPr>
+        <p:cNvPr id="1" name=""/>
+        <p:cNvGrpSpPr/>
+        <p:nvPr/>
+      </p:nvGrpSpPr>
+      <p:grpSpPr>
+        <a:xfrm>
+          <a:off x="0" y="0"/>
+          <a:ext cx="0" cy="0"/>
+          <a:chOff x="0" y="0"/>
+          <a:chExt cx="0" cy="0"/>
+        </a:xfrm>
+      </p:grpSpPr>
+      <p:sp>
+        <p:nvSpPr>
+          <p:cNvPr id="2" name="Cím 1">
+            <a:extLst>
+              <a:ext uri="{FF2B5EF4-FFF2-40B4-BE49-F238E27FC236}">
+                <a16:creationId xmlns:a16="http://schemas.microsoft.com/office/drawing/2014/main" id="{4977722A-EC43-8CBC-09DA-2598D9F96E59}"/>
+              </a:ext>
+            </a:extLst>
+          </p:cNvPr>
+          <p:cNvSpPr>
+            <a:spLocks noGrp="1"/>
+          </p:cNvSpPr>
+          <p:nvPr>
+            <p:ph type="title"/>
+          </p:nvPr>
+        </p:nvSpPr>
+        <p:spPr/>
+        <p:txBody>
+          <a:bodyPr/>
+          <a:lstStyle/>
+          <a:p>
+            <a:r>
+              <a:rPr lang="hu-HU" sz="4400" err="1">
+                <a:latin typeface="Bahnschrift SemiBold"/>
+              </a:rPr>
+              <a:t>Clone</a:t>
+            </a:r>
+            <a:endParaRPr lang="hu-HU" sz="4400" err="1"/>
+          </a:p>
+        </p:txBody>
+      </p:sp>
+      <p:sp>
+        <p:nvSpPr>
+          <p:cNvPr id="3" name="Tartalom helye 2">
+            <a:extLst>
+              <a:ext uri="{FF2B5EF4-FFF2-40B4-BE49-F238E27FC236}">
+                <a16:creationId xmlns:a16="http://schemas.microsoft.com/office/drawing/2014/main" id="{2D396B7E-FE12-B074-41B8-52F0D728ABF9}"/>
+              </a:ext>
+            </a:extLst>
+          </p:cNvPr>
+          <p:cNvSpPr>
+            <a:spLocks noGrp="1"/>
+          </p:cNvSpPr>
+          <p:nvPr>
+            <p:ph idx="1"/>
+          </p:nvPr>
+        </p:nvSpPr>
+        <p:spPr>
+          <a:xfrm>
+            <a:off x="5109983" y="451117"/>
+            <a:ext cx="6275035" cy="3794670"/>
+          </a:xfrm>
+        </p:spPr>
+        <p:txBody>
+          <a:bodyPr>
+            <a:normAutofit/>
+          </a:bodyPr>
+          <a:lstStyle/>
+          <a:p>
+            <a:r>
+              <a:rPr lang="hu-HU" sz="3200">
+                <a:latin typeface="Bahnschrift"/>
+              </a:rPr>
+              <a:t>Más könyvtárakat le lehet tölteni URL-t használva</a:t>
+            </a:r>
+          </a:p>
+          <a:p>
+            <a:r>
+              <a:rPr lang="hu-HU" sz="3200">
+                <a:latin typeface="Bahnschrift"/>
+              </a:rPr>
+              <a:t>Parancs: "</a:t>
+            </a:r>
+            <a:r>
+              <a:rPr lang="hu-HU" sz="3200" err="1">
+                <a:latin typeface="Bahnschrift"/>
+              </a:rPr>
+              <a:t>git</a:t>
+            </a:r>
+            <a:r>
+              <a:rPr lang="hu-HU" sz="3200">
+                <a:latin typeface="Bahnschrift"/>
+              </a:rPr>
+              <a:t> </a:t>
+            </a:r>
+            <a:r>
+              <a:rPr lang="hu-HU" sz="3200" err="1">
+                <a:latin typeface="Bahnschrift"/>
+              </a:rPr>
+              <a:t>clone</a:t>
+            </a:r>
+            <a:r>
+              <a:rPr lang="hu-HU" sz="3200">
+                <a:latin typeface="Bahnschrift"/>
+              </a:rPr>
+              <a:t> [</a:t>
+            </a:r>
+            <a:r>
+              <a:rPr lang="hu-HU" sz="3200" err="1">
+                <a:latin typeface="Bahnschrift"/>
+              </a:rPr>
+              <a:t>url</a:t>
+            </a:r>
+            <a:r>
+              <a:rPr lang="hu-HU" sz="3200">
+                <a:latin typeface="Bahnschrift"/>
+              </a:rPr>
+              <a:t>]"</a:t>
+            </a:r>
+            <a:endParaRPr lang="hu-HU" sz="3200"/>
+          </a:p>
+          <a:p>
+            <a:endParaRPr lang="hu-HU" sz="3200"/>
+          </a:p>
+        </p:txBody>
+      </p:sp>
+      <p:sp>
+        <p:nvSpPr>
+          <p:cNvPr id="4" name="Szöveg helye 3">
+            <a:extLst>
+              <a:ext uri="{FF2B5EF4-FFF2-40B4-BE49-F238E27FC236}">
+                <a16:creationId xmlns:a16="http://schemas.microsoft.com/office/drawing/2014/main" id="{4E949E2C-9989-A5CA-D52E-7F4638AEA676}"/>
+              </a:ext>
+            </a:extLst>
+          </p:cNvPr>
+          <p:cNvSpPr>
+            <a:spLocks noGrp="1"/>
+          </p:cNvSpPr>
+          <p:nvPr>
+            <p:ph type="body" sz="half" idx="2"/>
+          </p:nvPr>
+        </p:nvSpPr>
+        <p:spPr/>
+        <p:txBody>
+          <a:bodyPr vert="horz" lIns="91440" tIns="45720" rIns="91440" bIns="45720" rtlCol="0" anchor="t">
+            <a:normAutofit/>
+          </a:bodyPr>
+          <a:lstStyle/>
+          <a:p>
+            <a:r>
+              <a:rPr lang="hu-HU" sz="3200">
+                <a:latin typeface="Bahnschrift"/>
+              </a:rPr>
+              <a:t>Klónozás, másolás</a:t>
+            </a:r>
+            <a:endParaRPr lang="hu-HU"/>
+          </a:p>
+        </p:txBody>
+      </p:sp>
+      <p:pic>
+        <p:nvPicPr>
+          <p:cNvPr id="5" name="Kép 4" descr="A képen szöveg, elektronika, képernyőkép, szoftver látható&#10;&#10;Automatikusan generált leírás">
+            <a:extLst>
+              <a:ext uri="{FF2B5EF4-FFF2-40B4-BE49-F238E27FC236}">
+                <a16:creationId xmlns:a16="http://schemas.microsoft.com/office/drawing/2014/main" id="{ABC2E97A-A411-0995-8814-AB728F34B555}"/>
+              </a:ext>
+            </a:extLst>
+          </p:cNvPr>
+          <p:cNvPicPr>
+            <a:picLocks noChangeAspect="1"/>
+          </p:cNvPicPr>
+          <p:nvPr/>
+        </p:nvPicPr>
+        <p:blipFill>
+          <a:blip r:embed="rId2"/>
+          <a:stretch>
+            <a:fillRect/>
+          </a:stretch>
+        </p:blipFill>
+        <p:spPr>
+          <a:xfrm>
+            <a:off x="4799866" y="3433275"/>
+            <a:ext cx="6890728" cy="2091837"/>
+          </a:xfrm>
+          <a:prstGeom prst="rect">
+            <a:avLst/>
+          </a:prstGeom>
+        </p:spPr>
+      </p:pic>
+    </p:spTree>
+    <p:extLst>
+      <p:ext uri="{BB962C8B-B14F-4D97-AF65-F5344CB8AC3E}">
+        <p14:creationId xmlns:p14="http://schemas.microsoft.com/office/powerpoint/2010/main" val="2809971274"/>
+      </p:ext>
+    </p:extLst>
+  </p:cSld>
+  <p:clrMapOvr>
+    <a:masterClrMapping/>
+  </p:clrMapOvr>
+  <p:transition spd="slow">
+    <p:cover/>
+  </p:transition>
+  <p:timing>
+    <p:tnLst>
+      <p:par>
+        <p:cTn id="1" dur="indefinite" restart="never" nodeType="tmRoot">
+          <p:childTnLst>
+            <p:seq concurrent="1" nextAc="seek">
+              <p:cTn id="2" dur="indefinite" nodeType="mainSeq">
+                <p:childTnLst>
+                  <p:par>
+                    <p:cTn id="3" fill="hold">
+                      <p:stCondLst>
+                        <p:cond delay="indefinite"/>
+                      </p:stCondLst>
+                      <p:childTnLst>
+                        <p:par>
+                          <p:cTn id="4" fill="hold">
+                            <p:stCondLst>
+                              <p:cond delay="0"/>
+                            </p:stCondLst>
+                            <p:childTnLst>
+                              <p:par>
+                                <p:cTn id="5" presetID="2" presetClass="entr" presetSubtype="4" fill="hold" grpId="0" nodeType="clickEffect">
+                                  <p:stCondLst>
+                                    <p:cond delay="0"/>
+                                  </p:stCondLst>
+                                  <p:childTnLst>
+                                    <p:set>
+                                      <p:cBhvr>
+                                        <p:cTn id="6" dur="1" fill="hold">
+                                          <p:stCondLst>
+                                            <p:cond delay="0"/>
+                                          </p:stCondLst>
+                                        </p:cTn>
+                                        <p:tgtEl>
+                                          <p:spTgt spid="3">
+                                            <p:txEl>
+                                              <p:pRg st="0" end="0"/>
+                                            </p:txEl>
+                                          </p:spTgt>
+                                        </p:tgtEl>
+                                        <p:attrNameLst>
+                                          <p:attrName>style.visibility</p:attrName>
+                                        </p:attrNameLst>
+                                      </p:cBhvr>
+                                      <p:to>
+                                        <p:strVal val="visible"/>
+                                      </p:to>
+                                    </p:set>
+                                    <p:anim calcmode="lin" valueType="num">
+                                      <p:cBhvr additive="base">
+                                        <p:cTn id="7" dur="1000" fill="hold"/>
+                                        <p:tgtEl>
+                                          <p:spTgt spid="3">
+                                            <p:txEl>
+                                              <p:pRg st="0" end="0"/>
+                                            </p:txEl>
+                                          </p:spTgt>
+                                        </p:tgtEl>
+                                        <p:attrNameLst>
+                                          <p:attrName>ppt_x</p:attrName>
+                                        </p:attrNameLst>
+                                      </p:cBhvr>
+                                      <p:tavLst>
+                                        <p:tav tm="0">
+                                          <p:val>
+                                            <p:strVal val="#ppt_x"/>
+                                          </p:val>
+                                        </p:tav>
+                                        <p:tav tm="100000">
+                                          <p:val>
+                                            <p:strVal val="#ppt_x"/>
+                                          </p:val>
+                                        </p:tav>
+                                      </p:tavLst>
+                                    </p:anim>
+                                    <p:anim calcmode="lin" valueType="num">
+                                      <p:cBhvr additive="base">
+                                        <p:cTn id="8" dur="1000" fill="hold"/>
+                                        <p:tgtEl>
+                                          <p:spTgt spid="3">
+                                            <p:txEl>
+                                              <p:pRg st="0" end="0"/>
+                                            </p:txEl>
+                                          </p:spTgt>
+                                        </p:tgtEl>
+                                        <p:attrNameLst>
+                                          <p:attrName>ppt_y</p:attrName>
+                                        </p:attrNameLst>
+                                      </p:cBhvr>
+                                      <p:tavLst>
+                                        <p:tav tm="0">
+                                          <p:val>
+                                            <p:strVal val="1+#ppt_h/2"/>
+                                          </p:val>
+                                        </p:tav>
+                                        <p:tav tm="100000">
+                                          <p:val>
+                                            <p:strVal val="#ppt_y"/>
+                                          </p:val>
+                                        </p:tav>
+                                      </p:tavLst>
+                                    </p:anim>
+                                  </p:childTnLst>
+                                </p:cTn>
+                              </p:par>
+                            </p:childTnLst>
+                          </p:cTn>
+                        </p:par>
+                        <p:par>
+                          <p:cTn id="9" fill="hold">
+                            <p:stCondLst>
+                              <p:cond delay="1000"/>
+                            </p:stCondLst>
+                            <p:childTnLst>
+                              <p:par>
+                                <p:cTn id="10" presetID="2" presetClass="entr" presetSubtype="4" fill="hold" grpId="0" nodeType="afterEffect">
+                                  <p:stCondLst>
+                                    <p:cond delay="2000"/>
+                                  </p:stCondLst>
+                                  <p:childTnLst>
+                                    <p:set>
+                                      <p:cBhvr>
+                                        <p:cTn id="11" dur="1" fill="hold">
+                                          <p:stCondLst>
+                                            <p:cond delay="0"/>
+                                          </p:stCondLst>
+                                        </p:cTn>
+                                        <p:tgtEl>
+                                          <p:spTgt spid="3">
+                                            <p:txEl>
+                                              <p:pRg st="1" end="1"/>
+                                            </p:txEl>
+                                          </p:spTgt>
+                                        </p:tgtEl>
+                                        <p:attrNameLst>
+                                          <p:attrName>style.visibility</p:attrName>
+                                        </p:attrNameLst>
+                                      </p:cBhvr>
+                                      <p:to>
+                                        <p:strVal val="visible"/>
+                                      </p:to>
+                                    </p:set>
+                                    <p:anim calcmode="lin" valueType="num">
+                                      <p:cBhvr additive="base">
+                                        <p:cTn id="12" dur="1000" fill="hold"/>
+                                        <p:tgtEl>
+                                          <p:spTgt spid="3">
+                                            <p:txEl>
+                                              <p:pRg st="1" end="1"/>
+                                            </p:txEl>
+                                          </p:spTgt>
+                                        </p:tgtEl>
+                                        <p:attrNameLst>
+                                          <p:attrName>ppt_x</p:attrName>
+                                        </p:attrNameLst>
+                                      </p:cBhvr>
+                                      <p:tavLst>
+                                        <p:tav tm="0">
+                                          <p:val>
+                                            <p:strVal val="#ppt_x"/>
+                                          </p:val>
+                                        </p:tav>
+                                        <p:tav tm="100000">
+                                          <p:val>
+                                            <p:strVal val="#ppt_x"/>
+                                          </p:val>
+                                        </p:tav>
+                                      </p:tavLst>
+                                    </p:anim>
+                                    <p:anim calcmode="lin" valueType="num">
+                                      <p:cBhvr additive="base">
+                                        <p:cTn id="13" dur="1000" fill="hold"/>
+                                        <p:tgtEl>
+                                          <p:spTgt spid="3">
+                                            <p:txEl>
+                                              <p:pRg st="1" end="1"/>
+                                            </p:txEl>
+                                          </p:spTgt>
+                                        </p:tgtEl>
+                                        <p:attrNameLst>
+                                          <p:attrName>ppt_y</p:attrName>
+                                        </p:attrNameLst>
+                                      </p:cBhvr>
+                                      <p:tavLst>
+                                        <p:tav tm="0">
+                                          <p:val>
+                                            <p:strVal val="1+#ppt_h/2"/>
+                                          </p:val>
+                                        </p:tav>
+                                        <p:tav tm="100000">
+                                          <p:val>
+                                            <p:strVal val="#ppt_y"/>
+                                          </p:val>
+                                        </p:tav>
+                                      </p:tavLst>
+                                    </p:anim>
+                                  </p:childTnLst>
+                                </p:cTn>
+                              </p:par>
+                            </p:childTnLst>
+                          </p:cTn>
+                        </p:par>
+                        <p:par>
+                          <p:cTn id="14" fill="hold">
+                            <p:stCondLst>
+                              <p:cond delay="4000"/>
+                            </p:stCondLst>
+                            <p:childTnLst>
+                              <p:par>
+                                <p:cTn id="15" presetID="2" presetClass="entr" presetSubtype="4" fill="hold" nodeType="afterEffect">
+                                  <p:stCondLst>
+                                    <p:cond delay="0"/>
+                                  </p:stCondLst>
+                                  <p:childTnLst>
+                                    <p:set>
+                                      <p:cBhvr>
+                                        <p:cTn id="16" dur="1" fill="hold">
+                                          <p:stCondLst>
+                                            <p:cond delay="0"/>
+                                          </p:stCondLst>
+                                        </p:cTn>
+                                        <p:tgtEl>
+                                          <p:spTgt spid="5"/>
+                                        </p:tgtEl>
+                                        <p:attrNameLst>
+                                          <p:attrName>style.visibility</p:attrName>
+                                        </p:attrNameLst>
+                                      </p:cBhvr>
+                                      <p:to>
+                                        <p:strVal val="visible"/>
+                                      </p:to>
+                                    </p:set>
+                                    <p:anim calcmode="lin" valueType="num">
+                                      <p:cBhvr additive="base">
+                                        <p:cTn id="17" dur="1000" fill="hold"/>
+                                        <p:tgtEl>
+                                          <p:spTgt spid="5"/>
+                                        </p:tgtEl>
+                                        <p:attrNameLst>
+                                          <p:attrName>ppt_x</p:attrName>
+                                        </p:attrNameLst>
+                                      </p:cBhvr>
+                                      <p:tavLst>
+                                        <p:tav tm="0">
+                                          <p:val>
+                                            <p:strVal val="#ppt_x"/>
+                                          </p:val>
+                                        </p:tav>
+                                        <p:tav tm="100000">
+                                          <p:val>
+                                            <p:strVal val="#ppt_x"/>
+                                          </p:val>
+                                        </p:tav>
+                                      </p:tavLst>
+                                    </p:anim>
+                                    <p:anim calcmode="lin" valueType="num">
+                                      <p:cBhvr additive="base">
+                                        <p:cTn id="18" dur="1000" fill="hold"/>
+                                        <p:tgtEl>
+                                          <p:spTgt spid="5"/>
+                                        </p:tgtEl>
+                                        <p:attrNameLst>
+                                          <p:attrName>ppt_y</p:attrName>
+                                        </p:attrNameLst>
+                                      </p:cBhvr>
+                                      <p:tavLst>
+                                        <p:tav tm="0">
+                                          <p:val>
+                                            <p:strVal val="1+#ppt_h/2"/>
+                                          </p:val>
+                                        </p:tav>
+                                        <p:tav tm="100000">
+                                          <p:val>
+                                            <p:strVal val="#ppt_y"/>
+                                          </p:val>
+                                        </p:tav>
+                                      </p:tavLst>
+                                    </p:anim>
+                                  </p:childTnLst>
+                                </p:cTn>
+                              </p:par>
+                            </p:childTnLst>
+                          </p:cTn>
+                        </p:par>
+                      </p:childTnLst>
+                    </p:cTn>
+                  </p:par>
+                </p:childTnLst>
+              </p:cTn>
+              <p:prevCondLst>
+                <p:cond evt="onPrev" delay="0">
+                  <p:tgtEl>
+                    <p:sldTgt/>
+                  </p:tgtEl>
+                </p:cond>
+              </p:prevCondLst>
+              <p:nextCondLst>
+                <p:cond evt="onNext" delay="0">
+                  <p:tgtEl>
+                    <p:sldTgt/>
+                  </p:tgtEl>
+                </p:cond>
+              </p:nextCondLst>
+            </p:seq>
+          </p:childTnLst>
+        </p:cTn>
+      </p:par>
+    </p:tnLst>
+    <p:bldLst>
+      <p:bldP spid="3" grpId="0" build="p"/>
+    </p:bldLst>
+  </p:timing>
 </p:sld>
 </file>
 

--- a/FOPS_Git.pptx
+++ b/FOPS_Git.pptx
@@ -127,12 +127,12 @@
 <file path=ppt/revisionInfo.xml><?xml version="1.0" encoding="utf-8"?>
 <p1510:revInfo xmlns:a="http://schemas.openxmlformats.org/drawingml/2006/main" xmlns:r="http://schemas.openxmlformats.org/officeDocument/2006/relationships" xmlns:p1510="http://schemas.microsoft.com/office/powerpoint/2015/10/main">
   <p1510:revLst>
+    <p1510:client id="{89AFED0A-C672-3FD0-B4E8-FE1C8A8A6CBB}" v="11" dt="2024-10-21T17:08:45.737"/>
     <p1510:client id="{04F6685B-28AD-6A86-7DA6-D6D725FF40A4}" v="20" dt="2024-10-21T17:11:53.299"/>
     <p1510:client id="{13D068F5-38B1-9FAB-857E-EF01EB6C97ED}" v="29" dt="2024-10-21T17:28:25.495"/>
     <p1510:client id="{50052912-925E-830A-F533-F27F887840A6}" v="756" dt="2024-10-21T17:04:08.217"/>
     <p1510:client id="{548DDE2A-AFBB-7014-6A00-FACAA2E58FC7}" v="87" dt="2024-10-21T17:17:09.928"/>
     <p1510:client id="{6CF9AD3C-433C-1848-9998-91B31793A4B4}" v="139" dt="2024-10-21T16:24:12.823"/>
-    <p1510:client id="{89AFED0A-C672-3FD0-B4E8-FE1C8A8A6CBB}" v="11" dt="2024-10-21T17:08:45.737"/>
   </p1510:revLst>
 </p1510:revInfo>
 </file>
@@ -16258,11 +16258,11 @@
           <a:lstStyle/>
           <a:p>
             <a:r>
-              <a:rPr lang="hu-HU"/>
+              <a:rPr lang="hu-HU" dirty="0"/>
               <a:t>A </a:t>
             </a:r>
             <a:r>
-              <a:rPr lang="hu-HU" err="1"/>
+              <a:rPr lang="hu-HU" dirty="0" err="1"/>
               <a:t>Git</a:t>
             </a:r>
             <a:r>

--- a/FOPS_Git.pptx
+++ b/FOPS_Git.pptx
@@ -127,8 +127,8 @@
 <file path=ppt/revisionInfo.xml><?xml version="1.0" encoding="utf-8"?>
 <p1510:revInfo xmlns:a="http://schemas.openxmlformats.org/drawingml/2006/main" xmlns:r="http://schemas.openxmlformats.org/officeDocument/2006/relationships" xmlns:p1510="http://schemas.microsoft.com/office/powerpoint/2015/10/main">
   <p1510:revLst>
+    <p1510:client id="{04F6685B-28AD-6A86-7DA6-D6D725FF40A4}" v="20" dt="2024-10-21T17:11:53.299"/>
     <p1510:client id="{89AFED0A-C672-3FD0-B4E8-FE1C8A8A6CBB}" v="11" dt="2024-10-21T17:08:45.737"/>
-    <p1510:client id="{04F6685B-28AD-6A86-7DA6-D6D725FF40A4}" v="20" dt="2024-10-21T17:11:53.299"/>
     <p1510:client id="{13D068F5-38B1-9FAB-857E-EF01EB6C97ED}" v="29" dt="2024-10-21T17:28:25.495"/>
     <p1510:client id="{50052912-925E-830A-F533-F27F887840A6}" v="756" dt="2024-10-21T17:04:08.217"/>
     <p1510:client id="{548DDE2A-AFBB-7014-6A00-FACAA2E58FC7}" v="87" dt="2024-10-21T17:17:09.928"/>
@@ -17867,31 +17867,35 @@
           <a:lstStyle/>
           <a:p>
             <a:r>
-              <a:rPr lang="hu-HU">
+              <a:rPr lang="hu-HU" dirty="0">
                 <a:hlinkClick r:id="rId2"/>
               </a:rPr>
               <a:t>https://hu.wikipedia.org/wiki/Linus_Torvalds</a:t>
             </a:r>
             <a:r>
-              <a:rPr lang="hu-HU"/>
+              <a:rPr lang="hu-HU" dirty="0"/>
               <a:t> | 2. Dia</a:t>
             </a:r>
           </a:p>
           <a:p>
             <a:r>
-              <a:rPr lang="hu-HU">
+              <a:rPr lang="hu-HU" dirty="0">
                 <a:latin typeface="Bahnschrift"/>
                 <a:hlinkClick r:id="rId3"/>
               </a:rPr>
               <a:t>https://www.w3schools.com/git/git_getstarted.asp</a:t>
             </a:r>
             <a:r>
-              <a:rPr lang="hu-HU">
+              <a:rPr lang="hu-HU" dirty="0">
                 <a:latin typeface="Bahnschrift"/>
               </a:rPr>
               <a:t> | 4, 6, 9, 11, 12 Dia</a:t>
             </a:r>
-            <a:endParaRPr lang="hu-HU"/>
+          </a:p>
+          <a:p>
+            <a:endParaRPr lang="hu-HU" dirty="0">
+              <a:latin typeface="Bahnschrift"/>
+            </a:endParaRPr>
           </a:p>
         </p:txBody>
       </p:sp>

--- a/FOPS_Git.pptx
+++ b/FOPS_Git.pptx
@@ -127,8 +127,8 @@
 <file path=ppt/revisionInfo.xml><?xml version="1.0" encoding="utf-8"?>
 <p1510:revInfo xmlns:a="http://schemas.openxmlformats.org/drawingml/2006/main" xmlns:r="http://schemas.openxmlformats.org/officeDocument/2006/relationships" xmlns:p1510="http://schemas.microsoft.com/office/powerpoint/2015/10/main">
   <p1510:revLst>
+    <p1510:client id="{89AFED0A-C672-3FD0-B4E8-FE1C8A8A6CBB}" v="11" dt="2024-10-21T17:08:45.737"/>
     <p1510:client id="{04F6685B-28AD-6A86-7DA6-D6D725FF40A4}" v="20" dt="2024-10-21T17:11:53.299"/>
-    <p1510:client id="{89AFED0A-C672-3FD0-B4E8-FE1C8A8A6CBB}" v="11" dt="2024-10-21T17:08:45.737"/>
     <p1510:client id="{13D068F5-38B1-9FAB-857E-EF01EB6C97ED}" v="29" dt="2024-10-21T17:28:25.495"/>
     <p1510:client id="{50052912-925E-830A-F533-F27F887840A6}" v="756" dt="2024-10-21T17:04:08.217"/>
     <p1510:client id="{548DDE2A-AFBB-7014-6A00-FACAA2E58FC7}" v="87" dt="2024-10-21T17:17:09.928"/>
@@ -17892,11 +17892,6 @@
               <a:t> | 4, 6, 9, 11, 12 Dia</a:t>
             </a:r>
           </a:p>
-          <a:p>
-            <a:endParaRPr lang="hu-HU" dirty="0">
-              <a:latin typeface="Bahnschrift"/>
-            </a:endParaRPr>
-          </a:p>
         </p:txBody>
       </p:sp>
       <p:sp>

--- a/FOPS_Git.pptx
+++ b/FOPS_Git.pptx
@@ -5990,7 +5990,12 @@
             <p:ph type="dt" sz="half" idx="10"/>
           </p:nvPr>
         </p:nvSpPr>
-        <p:spPr/>
+        <p:spPr>
+          <a:xfrm>
+            <a:off x="795243" y="1621432"/>
+            <a:ext cx="3657600" cy="320040"/>
+          </a:xfrm>
+        </p:spPr>
         <p:txBody>
           <a:bodyPr/>
           <a:lstStyle/>
@@ -6059,7 +6064,7 @@
         </p:nvGrpSpPr>
         <p:grpSpPr>
           <a:xfrm>
-            <a:off x="749299" y="188185"/>
+            <a:off x="739870" y="1489577"/>
             <a:ext cx="3674476" cy="3470421"/>
             <a:chOff x="697883" y="1816768"/>
             <a:chExt cx="3674476" cy="3470421"/>
@@ -6213,7 +6218,7 @@
         </p:nvSpPr>
         <p:spPr>
           <a:xfrm>
-            <a:off x="854075" y="777040"/>
+            <a:off x="844646" y="2078432"/>
             <a:ext cx="3500828" cy="2470065"/>
           </a:xfrm>
           <a:prstGeom prst="rect">
@@ -6261,7 +6266,7 @@
         </p:nvSpPr>
         <p:spPr>
           <a:xfrm>
-            <a:off x="836123" y="825884"/>
+            <a:off x="826694" y="2127276"/>
             <a:ext cx="3500828" cy="2470065"/>
           </a:xfrm>
         </p:spPr>
@@ -7528,7 +7533,9 @@
             <a:prstGeom prst="triangle">
               <a:avLst/>
             </a:prstGeom>
-            <a:grpFill/>
+            <a:solidFill>
+              <a:schemeClr val="accent2"/>
+            </a:solidFill>
             <a:ln>
               <a:noFill/>
             </a:ln>
@@ -16526,215 +16533,6 @@
   <p:transition spd="slow">
     <p:cover/>
   </p:transition>
-  <p:timing>
-    <p:tnLst>
-      <p:par>
-        <p:cTn id="1" dur="indefinite" restart="never" nodeType="tmRoot">
-          <p:childTnLst>
-            <p:seq concurrent="1" nextAc="seek">
-              <p:cTn id="2" dur="indefinite" nodeType="mainSeq">
-                <p:childTnLst>
-                  <p:par>
-                    <p:cTn id="3" fill="hold">
-                      <p:stCondLst>
-                        <p:cond delay="indefinite"/>
-                      </p:stCondLst>
-                      <p:childTnLst>
-                        <p:par>
-                          <p:cTn id="4" fill="hold">
-                            <p:stCondLst>
-                              <p:cond delay="0"/>
-                            </p:stCondLst>
-                            <p:childTnLst>
-                              <p:par>
-                                <p:cTn id="5" presetID="2" presetClass="entr" presetSubtype="4" fill="hold" grpId="0" nodeType="clickEffect">
-                                  <p:stCondLst>
-                                    <p:cond delay="0"/>
-                                  </p:stCondLst>
-                                  <p:childTnLst>
-                                    <p:set>
-                                      <p:cBhvr>
-                                        <p:cTn id="6" dur="1" fill="hold">
-                                          <p:stCondLst>
-                                            <p:cond delay="0"/>
-                                          </p:stCondLst>
-                                        </p:cTn>
-                                        <p:tgtEl>
-                                          <p:spTgt spid="3">
-                                            <p:txEl>
-                                              <p:pRg st="0" end="0"/>
-                                            </p:txEl>
-                                          </p:spTgt>
-                                        </p:tgtEl>
-                                        <p:attrNameLst>
-                                          <p:attrName>style.visibility</p:attrName>
-                                        </p:attrNameLst>
-                                      </p:cBhvr>
-                                      <p:to>
-                                        <p:strVal val="visible"/>
-                                      </p:to>
-                                    </p:set>
-                                    <p:anim calcmode="lin" valueType="num">
-                                      <p:cBhvr additive="base">
-                                        <p:cTn id="7" dur="1000" fill="hold"/>
-                                        <p:tgtEl>
-                                          <p:spTgt spid="3">
-                                            <p:txEl>
-                                              <p:pRg st="0" end="0"/>
-                                            </p:txEl>
-                                          </p:spTgt>
-                                        </p:tgtEl>
-                                        <p:attrNameLst>
-                                          <p:attrName>ppt_x</p:attrName>
-                                        </p:attrNameLst>
-                                      </p:cBhvr>
-                                      <p:tavLst>
-                                        <p:tav tm="0">
-                                          <p:val>
-                                            <p:strVal val="#ppt_x"/>
-                                          </p:val>
-                                        </p:tav>
-                                        <p:tav tm="100000">
-                                          <p:val>
-                                            <p:strVal val="#ppt_x"/>
-                                          </p:val>
-                                        </p:tav>
-                                      </p:tavLst>
-                                    </p:anim>
-                                    <p:anim calcmode="lin" valueType="num">
-                                      <p:cBhvr additive="base">
-                                        <p:cTn id="8" dur="1000" fill="hold"/>
-                                        <p:tgtEl>
-                                          <p:spTgt spid="3">
-                                            <p:txEl>
-                                              <p:pRg st="0" end="0"/>
-                                            </p:txEl>
-                                          </p:spTgt>
-                                        </p:tgtEl>
-                                        <p:attrNameLst>
-                                          <p:attrName>ppt_y</p:attrName>
-                                        </p:attrNameLst>
-                                      </p:cBhvr>
-                                      <p:tavLst>
-                                        <p:tav tm="0">
-                                          <p:val>
-                                            <p:strVal val="1+#ppt_h/2"/>
-                                          </p:val>
-                                        </p:tav>
-                                        <p:tav tm="100000">
-                                          <p:val>
-                                            <p:strVal val="#ppt_y"/>
-                                          </p:val>
-                                        </p:tav>
-                                      </p:tavLst>
-                                    </p:anim>
-                                  </p:childTnLst>
-                                </p:cTn>
-                              </p:par>
-                              <p:par>
-                                <p:cTn id="9" presetID="2" presetClass="entr" presetSubtype="4" fill="hold" nodeType="withEffect">
-                                  <p:stCondLst>
-                                    <p:cond delay="0"/>
-                                  </p:stCondLst>
-                                  <p:childTnLst>
-                                    <p:set>
-                                      <p:cBhvr>
-                                        <p:cTn id="10" dur="1" fill="hold">
-                                          <p:stCondLst>
-                                            <p:cond delay="0"/>
-                                          </p:stCondLst>
-                                        </p:cTn>
-                                        <p:tgtEl>
-                                          <p:spTgt spid="6"/>
-                                        </p:tgtEl>
-                                        <p:attrNameLst>
-                                          <p:attrName>style.visibility</p:attrName>
-                                        </p:attrNameLst>
-                                      </p:cBhvr>
-                                      <p:to>
-                                        <p:strVal val="visible"/>
-                                      </p:to>
-                                    </p:set>
-                                    <p:anim calcmode="lin" valueType="num">
-                                      <p:cBhvr additive="base">
-                                        <p:cTn id="11" dur="1000" fill="hold"/>
-                                        <p:tgtEl>
-                                          <p:spTgt spid="6"/>
-                                        </p:tgtEl>
-                                        <p:attrNameLst>
-                                          <p:attrName>ppt_x</p:attrName>
-                                        </p:attrNameLst>
-                                      </p:cBhvr>
-                                      <p:tavLst>
-                                        <p:tav tm="0">
-                                          <p:val>
-                                            <p:strVal val="#ppt_x"/>
-                                          </p:val>
-                                        </p:tav>
-                                        <p:tav tm="100000">
-                                          <p:val>
-                                            <p:strVal val="#ppt_x"/>
-                                          </p:val>
-                                        </p:tav>
-                                      </p:tavLst>
-                                    </p:anim>
-                                    <p:anim calcmode="lin" valueType="num">
-                                      <p:cBhvr additive="base">
-                                        <p:cTn id="12" dur="1000" fill="hold"/>
-                                        <p:tgtEl>
-                                          <p:spTgt spid="6"/>
-                                        </p:tgtEl>
-                                        <p:attrNameLst>
-                                          <p:attrName>ppt_y</p:attrName>
-                                        </p:attrNameLst>
-                                      </p:cBhvr>
-                                      <p:tavLst>
-                                        <p:tav tm="0">
-                                          <p:val>
-                                            <p:strVal val="1+#ppt_h/2"/>
-                                          </p:val>
-                                        </p:tav>
-                                        <p:tav tm="100000">
-                                          <p:val>
-                                            <p:strVal val="#ppt_y"/>
-                                          </p:val>
-                                        </p:tav>
-                                      </p:tavLst>
-                                    </p:anim>
-                                  </p:childTnLst>
-                                </p:cTn>
-                              </p:par>
-                            </p:childTnLst>
-                          </p:cTn>
-                        </p:par>
-                      </p:childTnLst>
-                    </p:cTn>
-                  </p:par>
-                </p:childTnLst>
-              </p:cTn>
-              <p:prevCondLst>
-                <p:cond evt="onPrev" delay="0">
-                  <p:tgtEl>
-                    <p:sldTgt/>
-                  </p:tgtEl>
-                </p:cond>
-              </p:prevCondLst>
-              <p:nextCondLst>
-                <p:cond evt="onNext" delay="0">
-                  <p:tgtEl>
-                    <p:sldTgt/>
-                  </p:tgtEl>
-                </p:cond>
-              </p:nextCondLst>
-            </p:seq>
-          </p:childTnLst>
-        </p:cTn>
-      </p:par>
-    </p:tnLst>
-    <p:bldLst>
-      <p:bldP spid="3" grpId="0" build="p"/>
-    </p:bldLst>
-  </p:timing>
 </p:sld>
 </file>
 
@@ -16960,318 +16758,6 @@
   <p:transition spd="slow">
     <p:cover/>
   </p:transition>
-  <p:timing>
-    <p:tnLst>
-      <p:par>
-        <p:cTn id="1" dur="indefinite" restart="never" nodeType="tmRoot">
-          <p:childTnLst>
-            <p:seq concurrent="1" nextAc="seek">
-              <p:cTn id="2" dur="indefinite" nodeType="mainSeq">
-                <p:childTnLst>
-                  <p:par>
-                    <p:cTn id="3" fill="hold">
-                      <p:stCondLst>
-                        <p:cond delay="indefinite"/>
-                      </p:stCondLst>
-                      <p:childTnLst>
-                        <p:par>
-                          <p:cTn id="4" fill="hold">
-                            <p:stCondLst>
-                              <p:cond delay="0"/>
-                            </p:stCondLst>
-                            <p:childTnLst>
-                              <p:par>
-                                <p:cTn id="5" presetID="2" presetClass="entr" presetSubtype="4" fill="hold" grpId="0" nodeType="clickEffect">
-                                  <p:stCondLst>
-                                    <p:cond delay="0"/>
-                                  </p:stCondLst>
-                                  <p:childTnLst>
-                                    <p:set>
-                                      <p:cBhvr>
-                                        <p:cTn id="6" dur="1" fill="hold">
-                                          <p:stCondLst>
-                                            <p:cond delay="0"/>
-                                          </p:stCondLst>
-                                        </p:cTn>
-                                        <p:tgtEl>
-                                          <p:spTgt spid="3">
-                                            <p:txEl>
-                                              <p:pRg st="0" end="0"/>
-                                            </p:txEl>
-                                          </p:spTgt>
-                                        </p:tgtEl>
-                                        <p:attrNameLst>
-                                          <p:attrName>style.visibility</p:attrName>
-                                        </p:attrNameLst>
-                                      </p:cBhvr>
-                                      <p:to>
-                                        <p:strVal val="visible"/>
-                                      </p:to>
-                                    </p:set>
-                                    <p:anim calcmode="lin" valueType="num">
-                                      <p:cBhvr additive="base">
-                                        <p:cTn id="7" dur="1000" fill="hold"/>
-                                        <p:tgtEl>
-                                          <p:spTgt spid="3">
-                                            <p:txEl>
-                                              <p:pRg st="0" end="0"/>
-                                            </p:txEl>
-                                          </p:spTgt>
-                                        </p:tgtEl>
-                                        <p:attrNameLst>
-                                          <p:attrName>ppt_x</p:attrName>
-                                        </p:attrNameLst>
-                                      </p:cBhvr>
-                                      <p:tavLst>
-                                        <p:tav tm="0">
-                                          <p:val>
-                                            <p:strVal val="#ppt_x"/>
-                                          </p:val>
-                                        </p:tav>
-                                        <p:tav tm="100000">
-                                          <p:val>
-                                            <p:strVal val="#ppt_x"/>
-                                          </p:val>
-                                        </p:tav>
-                                      </p:tavLst>
-                                    </p:anim>
-                                    <p:anim calcmode="lin" valueType="num">
-                                      <p:cBhvr additive="base">
-                                        <p:cTn id="8" dur="1000" fill="hold"/>
-                                        <p:tgtEl>
-                                          <p:spTgt spid="3">
-                                            <p:txEl>
-                                              <p:pRg st="0" end="0"/>
-                                            </p:txEl>
-                                          </p:spTgt>
-                                        </p:tgtEl>
-                                        <p:attrNameLst>
-                                          <p:attrName>ppt_y</p:attrName>
-                                        </p:attrNameLst>
-                                      </p:cBhvr>
-                                      <p:tavLst>
-                                        <p:tav tm="0">
-                                          <p:val>
-                                            <p:strVal val="1+#ppt_h/2"/>
-                                          </p:val>
-                                        </p:tav>
-                                        <p:tav tm="100000">
-                                          <p:val>
-                                            <p:strVal val="#ppt_y"/>
-                                          </p:val>
-                                        </p:tav>
-                                      </p:tavLst>
-                                    </p:anim>
-                                  </p:childTnLst>
-                                </p:cTn>
-                              </p:par>
-                            </p:childTnLst>
-                          </p:cTn>
-                        </p:par>
-                        <p:par>
-                          <p:cTn id="9" fill="hold">
-                            <p:stCondLst>
-                              <p:cond delay="1000"/>
-                            </p:stCondLst>
-                            <p:childTnLst>
-                              <p:par>
-                                <p:cTn id="10" presetID="2" presetClass="entr" presetSubtype="4" fill="hold" grpId="0" nodeType="afterEffect">
-                                  <p:stCondLst>
-                                    <p:cond delay="2000"/>
-                                  </p:stCondLst>
-                                  <p:childTnLst>
-                                    <p:set>
-                                      <p:cBhvr>
-                                        <p:cTn id="11" dur="1" fill="hold">
-                                          <p:stCondLst>
-                                            <p:cond delay="0"/>
-                                          </p:stCondLst>
-                                        </p:cTn>
-                                        <p:tgtEl>
-                                          <p:spTgt spid="3">
-                                            <p:txEl>
-                                              <p:pRg st="1" end="1"/>
-                                            </p:txEl>
-                                          </p:spTgt>
-                                        </p:tgtEl>
-                                        <p:attrNameLst>
-                                          <p:attrName>style.visibility</p:attrName>
-                                        </p:attrNameLst>
-                                      </p:cBhvr>
-                                      <p:to>
-                                        <p:strVal val="visible"/>
-                                      </p:to>
-                                    </p:set>
-                                    <p:anim calcmode="lin" valueType="num">
-                                      <p:cBhvr additive="base">
-                                        <p:cTn id="12" dur="1000" fill="hold"/>
-                                        <p:tgtEl>
-                                          <p:spTgt spid="3">
-                                            <p:txEl>
-                                              <p:pRg st="1" end="1"/>
-                                            </p:txEl>
-                                          </p:spTgt>
-                                        </p:tgtEl>
-                                        <p:attrNameLst>
-                                          <p:attrName>ppt_x</p:attrName>
-                                        </p:attrNameLst>
-                                      </p:cBhvr>
-                                      <p:tavLst>
-                                        <p:tav tm="0">
-                                          <p:val>
-                                            <p:strVal val="#ppt_x"/>
-                                          </p:val>
-                                        </p:tav>
-                                        <p:tav tm="100000">
-                                          <p:val>
-                                            <p:strVal val="#ppt_x"/>
-                                          </p:val>
-                                        </p:tav>
-                                      </p:tavLst>
-                                    </p:anim>
-                                    <p:anim calcmode="lin" valueType="num">
-                                      <p:cBhvr additive="base">
-                                        <p:cTn id="13" dur="1000" fill="hold"/>
-                                        <p:tgtEl>
-                                          <p:spTgt spid="3">
-                                            <p:txEl>
-                                              <p:pRg st="1" end="1"/>
-                                            </p:txEl>
-                                          </p:spTgt>
-                                        </p:tgtEl>
-                                        <p:attrNameLst>
-                                          <p:attrName>ppt_y</p:attrName>
-                                        </p:attrNameLst>
-                                      </p:cBhvr>
-                                      <p:tavLst>
-                                        <p:tav tm="0">
-                                          <p:val>
-                                            <p:strVal val="1+#ppt_h/2"/>
-                                          </p:val>
-                                        </p:tav>
-                                        <p:tav tm="100000">
-                                          <p:val>
-                                            <p:strVal val="#ppt_y"/>
-                                          </p:val>
-                                        </p:tav>
-                                      </p:tavLst>
-                                    </p:anim>
-                                  </p:childTnLst>
-                                </p:cTn>
-                              </p:par>
-                            </p:childTnLst>
-                          </p:cTn>
-                        </p:par>
-                        <p:par>
-                          <p:cTn id="14" fill="hold">
-                            <p:stCondLst>
-                              <p:cond delay="4000"/>
-                            </p:stCondLst>
-                            <p:childTnLst>
-                              <p:par>
-                                <p:cTn id="15" presetID="2" presetClass="entr" presetSubtype="4" fill="hold" nodeType="afterEffect">
-                                  <p:stCondLst>
-                                    <p:cond delay="2000"/>
-                                  </p:stCondLst>
-                                  <p:childTnLst>
-                                    <p:set>
-                                      <p:cBhvr>
-                                        <p:cTn id="16" dur="1" fill="hold">
-                                          <p:stCondLst>
-                                            <p:cond delay="0"/>
-                                          </p:stCondLst>
-                                        </p:cTn>
-                                        <p:tgtEl>
-                                          <p:spTgt spid="7"/>
-                                        </p:tgtEl>
-                                        <p:attrNameLst>
-                                          <p:attrName>style.visibility</p:attrName>
-                                        </p:attrNameLst>
-                                      </p:cBhvr>
-                                      <p:to>
-                                        <p:strVal val="visible"/>
-                                      </p:to>
-                                    </p:set>
-                                    <p:anim calcmode="lin" valueType="num">
-                                      <p:cBhvr additive="base">
-                                        <p:cTn id="17" dur="1000" fill="hold"/>
-                                        <p:tgtEl>
-                                          <p:spTgt spid="7"/>
-                                        </p:tgtEl>
-                                        <p:attrNameLst>
-                                          <p:attrName>ppt_x</p:attrName>
-                                        </p:attrNameLst>
-                                      </p:cBhvr>
-                                      <p:tavLst>
-                                        <p:tav tm="0">
-                                          <p:val>
-                                            <p:strVal val="#ppt_x"/>
-                                          </p:val>
-                                        </p:tav>
-                                        <p:tav tm="100000">
-                                          <p:val>
-                                            <p:strVal val="#ppt_x"/>
-                                          </p:val>
-                                        </p:tav>
-                                      </p:tavLst>
-                                    </p:anim>
-                                    <p:anim calcmode="lin" valueType="num">
-                                      <p:cBhvr additive="base">
-                                        <p:cTn id="18" dur="1000" fill="hold"/>
-                                        <p:tgtEl>
-                                          <p:spTgt spid="7"/>
-                                        </p:tgtEl>
-                                        <p:attrNameLst>
-                                          <p:attrName>ppt_y</p:attrName>
-                                        </p:attrNameLst>
-                                      </p:cBhvr>
-                                      <p:tavLst>
-                                        <p:tav tm="0">
-                                          <p:val>
-                                            <p:strVal val="1+#ppt_h/2"/>
-                                          </p:val>
-                                        </p:tav>
-                                        <p:tav tm="100000">
-                                          <p:val>
-                                            <p:strVal val="#ppt_y"/>
-                                          </p:val>
-                                        </p:tav>
-                                      </p:tavLst>
-                                    </p:anim>
-                                  </p:childTnLst>
-                                </p:cTn>
-                              </p:par>
-                            </p:childTnLst>
-                          </p:cTn>
-                        </p:par>
-                      </p:childTnLst>
-                    </p:cTn>
-                  </p:par>
-                </p:childTnLst>
-              </p:cTn>
-              <p:prevCondLst>
-                <p:cond evt="onPrev" delay="0">
-                  <p:tgtEl>
-                    <p:sldTgt/>
-                  </p:tgtEl>
-                </p:cond>
-              </p:prevCondLst>
-              <p:nextCondLst>
-                <p:cond evt="onNext" delay="0">
-                  <p:tgtEl>
-                    <p:sldTgt/>
-                  </p:tgtEl>
-                </p:cond>
-              </p:nextCondLst>
-            </p:seq>
-          </p:childTnLst>
-        </p:cTn>
-      </p:par>
-    </p:tnLst>
-    <p:bldLst>
-      <p:bldP spid="3" grpId="0" build="p"/>
-    </p:bldLst>
-  </p:timing>
 </p:sld>
 </file>
 
@@ -17497,318 +16983,6 @@
   <p:transition spd="slow">
     <p:cover/>
   </p:transition>
-  <p:timing>
-    <p:tnLst>
-      <p:par>
-        <p:cTn id="1" dur="indefinite" restart="never" nodeType="tmRoot">
-          <p:childTnLst>
-            <p:seq concurrent="1" nextAc="seek">
-              <p:cTn id="2" dur="indefinite" nodeType="mainSeq">
-                <p:childTnLst>
-                  <p:par>
-                    <p:cTn id="3" fill="hold">
-                      <p:stCondLst>
-                        <p:cond delay="indefinite"/>
-                      </p:stCondLst>
-                      <p:childTnLst>
-                        <p:par>
-                          <p:cTn id="4" fill="hold">
-                            <p:stCondLst>
-                              <p:cond delay="0"/>
-                            </p:stCondLst>
-                            <p:childTnLst>
-                              <p:par>
-                                <p:cTn id="5" presetID="2" presetClass="entr" presetSubtype="4" fill="hold" grpId="0" nodeType="clickEffect">
-                                  <p:stCondLst>
-                                    <p:cond delay="0"/>
-                                  </p:stCondLst>
-                                  <p:childTnLst>
-                                    <p:set>
-                                      <p:cBhvr>
-                                        <p:cTn id="6" dur="1" fill="hold">
-                                          <p:stCondLst>
-                                            <p:cond delay="0"/>
-                                          </p:stCondLst>
-                                        </p:cTn>
-                                        <p:tgtEl>
-                                          <p:spTgt spid="3">
-                                            <p:txEl>
-                                              <p:pRg st="0" end="0"/>
-                                            </p:txEl>
-                                          </p:spTgt>
-                                        </p:tgtEl>
-                                        <p:attrNameLst>
-                                          <p:attrName>style.visibility</p:attrName>
-                                        </p:attrNameLst>
-                                      </p:cBhvr>
-                                      <p:to>
-                                        <p:strVal val="visible"/>
-                                      </p:to>
-                                    </p:set>
-                                    <p:anim calcmode="lin" valueType="num">
-                                      <p:cBhvr additive="base">
-                                        <p:cTn id="7" dur="1000" fill="hold"/>
-                                        <p:tgtEl>
-                                          <p:spTgt spid="3">
-                                            <p:txEl>
-                                              <p:pRg st="0" end="0"/>
-                                            </p:txEl>
-                                          </p:spTgt>
-                                        </p:tgtEl>
-                                        <p:attrNameLst>
-                                          <p:attrName>ppt_x</p:attrName>
-                                        </p:attrNameLst>
-                                      </p:cBhvr>
-                                      <p:tavLst>
-                                        <p:tav tm="0">
-                                          <p:val>
-                                            <p:strVal val="#ppt_x"/>
-                                          </p:val>
-                                        </p:tav>
-                                        <p:tav tm="100000">
-                                          <p:val>
-                                            <p:strVal val="#ppt_x"/>
-                                          </p:val>
-                                        </p:tav>
-                                      </p:tavLst>
-                                    </p:anim>
-                                    <p:anim calcmode="lin" valueType="num">
-                                      <p:cBhvr additive="base">
-                                        <p:cTn id="8" dur="1000" fill="hold"/>
-                                        <p:tgtEl>
-                                          <p:spTgt spid="3">
-                                            <p:txEl>
-                                              <p:pRg st="0" end="0"/>
-                                            </p:txEl>
-                                          </p:spTgt>
-                                        </p:tgtEl>
-                                        <p:attrNameLst>
-                                          <p:attrName>ppt_y</p:attrName>
-                                        </p:attrNameLst>
-                                      </p:cBhvr>
-                                      <p:tavLst>
-                                        <p:tav tm="0">
-                                          <p:val>
-                                            <p:strVal val="1+#ppt_h/2"/>
-                                          </p:val>
-                                        </p:tav>
-                                        <p:tav tm="100000">
-                                          <p:val>
-                                            <p:strVal val="#ppt_y"/>
-                                          </p:val>
-                                        </p:tav>
-                                      </p:tavLst>
-                                    </p:anim>
-                                  </p:childTnLst>
-                                </p:cTn>
-                              </p:par>
-                            </p:childTnLst>
-                          </p:cTn>
-                        </p:par>
-                        <p:par>
-                          <p:cTn id="9" fill="hold">
-                            <p:stCondLst>
-                              <p:cond delay="1000"/>
-                            </p:stCondLst>
-                            <p:childTnLst>
-                              <p:par>
-                                <p:cTn id="10" presetID="2" presetClass="entr" presetSubtype="4" fill="hold" grpId="0" nodeType="afterEffect">
-                                  <p:stCondLst>
-                                    <p:cond delay="2000"/>
-                                  </p:stCondLst>
-                                  <p:childTnLst>
-                                    <p:set>
-                                      <p:cBhvr>
-                                        <p:cTn id="11" dur="1" fill="hold">
-                                          <p:stCondLst>
-                                            <p:cond delay="0"/>
-                                          </p:stCondLst>
-                                        </p:cTn>
-                                        <p:tgtEl>
-                                          <p:spTgt spid="3">
-                                            <p:txEl>
-                                              <p:pRg st="1" end="1"/>
-                                            </p:txEl>
-                                          </p:spTgt>
-                                        </p:tgtEl>
-                                        <p:attrNameLst>
-                                          <p:attrName>style.visibility</p:attrName>
-                                        </p:attrNameLst>
-                                      </p:cBhvr>
-                                      <p:to>
-                                        <p:strVal val="visible"/>
-                                      </p:to>
-                                    </p:set>
-                                    <p:anim calcmode="lin" valueType="num">
-                                      <p:cBhvr additive="base">
-                                        <p:cTn id="12" dur="1000" fill="hold"/>
-                                        <p:tgtEl>
-                                          <p:spTgt spid="3">
-                                            <p:txEl>
-                                              <p:pRg st="1" end="1"/>
-                                            </p:txEl>
-                                          </p:spTgt>
-                                        </p:tgtEl>
-                                        <p:attrNameLst>
-                                          <p:attrName>ppt_x</p:attrName>
-                                        </p:attrNameLst>
-                                      </p:cBhvr>
-                                      <p:tavLst>
-                                        <p:tav tm="0">
-                                          <p:val>
-                                            <p:strVal val="#ppt_x"/>
-                                          </p:val>
-                                        </p:tav>
-                                        <p:tav tm="100000">
-                                          <p:val>
-                                            <p:strVal val="#ppt_x"/>
-                                          </p:val>
-                                        </p:tav>
-                                      </p:tavLst>
-                                    </p:anim>
-                                    <p:anim calcmode="lin" valueType="num">
-                                      <p:cBhvr additive="base">
-                                        <p:cTn id="13" dur="1000" fill="hold"/>
-                                        <p:tgtEl>
-                                          <p:spTgt spid="3">
-                                            <p:txEl>
-                                              <p:pRg st="1" end="1"/>
-                                            </p:txEl>
-                                          </p:spTgt>
-                                        </p:tgtEl>
-                                        <p:attrNameLst>
-                                          <p:attrName>ppt_y</p:attrName>
-                                        </p:attrNameLst>
-                                      </p:cBhvr>
-                                      <p:tavLst>
-                                        <p:tav tm="0">
-                                          <p:val>
-                                            <p:strVal val="1+#ppt_h/2"/>
-                                          </p:val>
-                                        </p:tav>
-                                        <p:tav tm="100000">
-                                          <p:val>
-                                            <p:strVal val="#ppt_y"/>
-                                          </p:val>
-                                        </p:tav>
-                                      </p:tavLst>
-                                    </p:anim>
-                                  </p:childTnLst>
-                                </p:cTn>
-                              </p:par>
-                            </p:childTnLst>
-                          </p:cTn>
-                        </p:par>
-                        <p:par>
-                          <p:cTn id="14" fill="hold">
-                            <p:stCondLst>
-                              <p:cond delay="4000"/>
-                            </p:stCondLst>
-                            <p:childTnLst>
-                              <p:par>
-                                <p:cTn id="15" presetID="2" presetClass="entr" presetSubtype="4" fill="hold" nodeType="afterEffect">
-                                  <p:stCondLst>
-                                    <p:cond delay="2000"/>
-                                  </p:stCondLst>
-                                  <p:childTnLst>
-                                    <p:set>
-                                      <p:cBhvr>
-                                        <p:cTn id="16" dur="1" fill="hold">
-                                          <p:stCondLst>
-                                            <p:cond delay="0"/>
-                                          </p:stCondLst>
-                                        </p:cTn>
-                                        <p:tgtEl>
-                                          <p:spTgt spid="5"/>
-                                        </p:tgtEl>
-                                        <p:attrNameLst>
-                                          <p:attrName>style.visibility</p:attrName>
-                                        </p:attrNameLst>
-                                      </p:cBhvr>
-                                      <p:to>
-                                        <p:strVal val="visible"/>
-                                      </p:to>
-                                    </p:set>
-                                    <p:anim calcmode="lin" valueType="num">
-                                      <p:cBhvr additive="base">
-                                        <p:cTn id="17" dur="1000" fill="hold"/>
-                                        <p:tgtEl>
-                                          <p:spTgt spid="5"/>
-                                        </p:tgtEl>
-                                        <p:attrNameLst>
-                                          <p:attrName>ppt_x</p:attrName>
-                                        </p:attrNameLst>
-                                      </p:cBhvr>
-                                      <p:tavLst>
-                                        <p:tav tm="0">
-                                          <p:val>
-                                            <p:strVal val="#ppt_x"/>
-                                          </p:val>
-                                        </p:tav>
-                                        <p:tav tm="100000">
-                                          <p:val>
-                                            <p:strVal val="#ppt_x"/>
-                                          </p:val>
-                                        </p:tav>
-                                      </p:tavLst>
-                                    </p:anim>
-                                    <p:anim calcmode="lin" valueType="num">
-                                      <p:cBhvr additive="base">
-                                        <p:cTn id="18" dur="1000" fill="hold"/>
-                                        <p:tgtEl>
-                                          <p:spTgt spid="5"/>
-                                        </p:tgtEl>
-                                        <p:attrNameLst>
-                                          <p:attrName>ppt_y</p:attrName>
-                                        </p:attrNameLst>
-                                      </p:cBhvr>
-                                      <p:tavLst>
-                                        <p:tav tm="0">
-                                          <p:val>
-                                            <p:strVal val="1+#ppt_h/2"/>
-                                          </p:val>
-                                        </p:tav>
-                                        <p:tav tm="100000">
-                                          <p:val>
-                                            <p:strVal val="#ppt_y"/>
-                                          </p:val>
-                                        </p:tav>
-                                      </p:tavLst>
-                                    </p:anim>
-                                  </p:childTnLst>
-                                </p:cTn>
-                              </p:par>
-                            </p:childTnLst>
-                          </p:cTn>
-                        </p:par>
-                      </p:childTnLst>
-                    </p:cTn>
-                  </p:par>
-                </p:childTnLst>
-              </p:cTn>
-              <p:prevCondLst>
-                <p:cond evt="onPrev" delay="0">
-                  <p:tgtEl>
-                    <p:sldTgt/>
-                  </p:tgtEl>
-                </p:cond>
-              </p:prevCondLst>
-              <p:nextCondLst>
-                <p:cond evt="onNext" delay="0">
-                  <p:tgtEl>
-                    <p:sldTgt/>
-                  </p:tgtEl>
-                </p:cond>
-              </p:nextCondLst>
-            </p:seq>
-          </p:childTnLst>
-        </p:cTn>
-      </p:par>
-    </p:tnLst>
-    <p:bldLst>
-      <p:bldP spid="3" grpId="0" build="p"/>
-    </p:bldLst>
-  </p:timing>
 </p:sld>
 </file>
 
@@ -17892,6 +17066,11 @@
               <a:t> | 4, 6, 9, 11, 12 Dia</a:t>
             </a:r>
           </a:p>
+          <a:p>
+            <a:endParaRPr lang="hu-HU" dirty="0">
+              <a:latin typeface="Bahnschrift"/>
+            </a:endParaRPr>
+          </a:p>
         </p:txBody>
       </p:sp>
       <p:sp>
@@ -17972,31 +17151,31 @@
         </p:nvSpPr>
         <p:spPr>
           <a:xfrm>
-            <a:off x="4971909" y="519878"/>
-            <a:ext cx="6281873" cy="3070084"/>
+            <a:off x="7180027" y="1556220"/>
+            <a:ext cx="3675740" cy="3070084"/>
           </a:xfrm>
         </p:spPr>
         <p:txBody>
           <a:bodyPr>
-            <a:normAutofit/>
+            <a:normAutofit fontScale="92500" lnSpcReduction="20000"/>
           </a:bodyPr>
           <a:lstStyle/>
           <a:p>
             <a:r>
-              <a:rPr lang="hu-HU" sz="3200"/>
+              <a:rPr lang="hu-HU" sz="3200" dirty="0"/>
               <a:t>Egy nyílt forráskódú verziókezelő szoftver</a:t>
             </a:r>
           </a:p>
           <a:p>
             <a:r>
-              <a:rPr lang="hu-HU" sz="3200"/>
+              <a:rPr lang="hu-HU" sz="3200" dirty="0"/>
               <a:t>Eredeti fejlesztője Linus </a:t>
             </a:r>
             <a:r>
-              <a:rPr lang="hu-HU" sz="3200" err="1"/>
+              <a:rPr lang="hu-HU" sz="3200" dirty="0" err="1"/>
               <a:t>Torvalds</a:t>
             </a:r>
-            <a:endParaRPr lang="hu-HU" sz="3200"/>
+            <a:endParaRPr lang="hu-HU" sz="3200" dirty="0"/>
           </a:p>
         </p:txBody>
       </p:sp>
@@ -18053,7 +17232,7 @@
         </p:blipFill>
         <p:spPr bwMode="auto">
           <a:xfrm>
-            <a:off x="1551496" y="3760508"/>
+            <a:off x="4713337" y="1615392"/>
             <a:ext cx="2070082" cy="2880000"/>
           </a:xfrm>
           <a:prstGeom prst="rect">
@@ -18090,7 +17269,7 @@
         </p:nvSpPr>
         <p:spPr>
           <a:xfrm>
-            <a:off x="3699732" y="4877342"/>
+            <a:off x="5115342" y="4560072"/>
             <a:ext cx="1276865" cy="646331"/>
           </a:xfrm>
           <a:prstGeom prst="rect">
@@ -18104,8 +17283,9 @@
           </a:bodyPr>
           <a:lstStyle/>
           <a:p>
+            <a:pPr algn="ctr"/>
             <a:r>
-              <a:rPr lang="hu-HU">
+              <a:rPr lang="hu-HU" dirty="0">
                 <a:solidFill>
                   <a:schemeClr val="bg1"/>
                 </a:solidFill>
@@ -18114,7 +17294,7 @@
               <a:t>Linus </a:t>
             </a:r>
             <a:r>
-              <a:rPr lang="hu-HU" err="1">
+              <a:rPr lang="hu-HU" dirty="0" err="1">
                 <a:solidFill>
                   <a:schemeClr val="bg1"/>
                 </a:solidFill>
@@ -18122,7 +17302,7 @@
               </a:rPr>
               <a:t>Torvalds</a:t>
             </a:r>
-            <a:endParaRPr lang="hu-HU">
+            <a:endParaRPr lang="hu-HU" dirty="0">
               <a:solidFill>
                 <a:schemeClr val="bg1"/>
               </a:solidFill>
@@ -18144,392 +17324,6 @@
   <p:transition spd="slow">
     <p:cover/>
   </p:transition>
-  <p:timing>
-    <p:tnLst>
-      <p:par>
-        <p:cTn id="1" dur="indefinite" restart="never" nodeType="tmRoot">
-          <p:childTnLst>
-            <p:seq concurrent="1" nextAc="seek">
-              <p:cTn id="2" dur="indefinite" nodeType="mainSeq">
-                <p:childTnLst>
-                  <p:par>
-                    <p:cTn id="3" fill="hold">
-                      <p:stCondLst>
-                        <p:cond delay="indefinite"/>
-                      </p:stCondLst>
-                      <p:childTnLst>
-                        <p:par>
-                          <p:cTn id="4" fill="hold">
-                            <p:stCondLst>
-                              <p:cond delay="0"/>
-                            </p:stCondLst>
-                            <p:childTnLst>
-                              <p:par>
-                                <p:cTn id="5" presetID="2" presetClass="entr" presetSubtype="4" fill="hold" grpId="0" nodeType="clickEffect">
-                                  <p:stCondLst>
-                                    <p:cond delay="0"/>
-                                  </p:stCondLst>
-                                  <p:childTnLst>
-                                    <p:set>
-                                      <p:cBhvr>
-                                        <p:cTn id="6" dur="1" fill="hold">
-                                          <p:stCondLst>
-                                            <p:cond delay="0"/>
-                                          </p:stCondLst>
-                                        </p:cTn>
-                                        <p:tgtEl>
-                                          <p:spTgt spid="2">
-                                            <p:txEl>
-                                              <p:pRg st="0" end="0"/>
-                                            </p:txEl>
-                                          </p:spTgt>
-                                        </p:tgtEl>
-                                        <p:attrNameLst>
-                                          <p:attrName>style.visibility</p:attrName>
-                                        </p:attrNameLst>
-                                      </p:cBhvr>
-                                      <p:to>
-                                        <p:strVal val="visible"/>
-                                      </p:to>
-                                    </p:set>
-                                    <p:anim calcmode="lin" valueType="num">
-                                      <p:cBhvr additive="base">
-                                        <p:cTn id="7" dur="1000" fill="hold"/>
-                                        <p:tgtEl>
-                                          <p:spTgt spid="2">
-                                            <p:txEl>
-                                              <p:pRg st="0" end="0"/>
-                                            </p:txEl>
-                                          </p:spTgt>
-                                        </p:tgtEl>
-                                        <p:attrNameLst>
-                                          <p:attrName>ppt_x</p:attrName>
-                                        </p:attrNameLst>
-                                      </p:cBhvr>
-                                      <p:tavLst>
-                                        <p:tav tm="0">
-                                          <p:val>
-                                            <p:strVal val="#ppt_x"/>
-                                          </p:val>
-                                        </p:tav>
-                                        <p:tav tm="100000">
-                                          <p:val>
-                                            <p:strVal val="#ppt_x"/>
-                                          </p:val>
-                                        </p:tav>
-                                      </p:tavLst>
-                                    </p:anim>
-                                    <p:anim calcmode="lin" valueType="num">
-                                      <p:cBhvr additive="base">
-                                        <p:cTn id="8" dur="1000" fill="hold"/>
-                                        <p:tgtEl>
-                                          <p:spTgt spid="2">
-                                            <p:txEl>
-                                              <p:pRg st="0" end="0"/>
-                                            </p:txEl>
-                                          </p:spTgt>
-                                        </p:tgtEl>
-                                        <p:attrNameLst>
-                                          <p:attrName>ppt_y</p:attrName>
-                                        </p:attrNameLst>
-                                      </p:cBhvr>
-                                      <p:tavLst>
-                                        <p:tav tm="0">
-                                          <p:val>
-                                            <p:strVal val="1+#ppt_h/2"/>
-                                          </p:val>
-                                        </p:tav>
-                                        <p:tav tm="100000">
-                                          <p:val>
-                                            <p:strVal val="#ppt_y"/>
-                                          </p:val>
-                                        </p:tav>
-                                      </p:tavLst>
-                                    </p:anim>
-                                  </p:childTnLst>
-                                </p:cTn>
-                              </p:par>
-                            </p:childTnLst>
-                          </p:cTn>
-                        </p:par>
-                        <p:par>
-                          <p:cTn id="9" fill="hold">
-                            <p:stCondLst>
-                              <p:cond delay="1000"/>
-                            </p:stCondLst>
-                            <p:childTnLst>
-                              <p:par>
-                                <p:cTn id="10" presetID="2" presetClass="entr" presetSubtype="4" fill="hold" grpId="0" nodeType="afterEffect">
-                                  <p:stCondLst>
-                                    <p:cond delay="2000"/>
-                                  </p:stCondLst>
-                                  <p:childTnLst>
-                                    <p:set>
-                                      <p:cBhvr>
-                                        <p:cTn id="11" dur="1" fill="hold">
-                                          <p:stCondLst>
-                                            <p:cond delay="0"/>
-                                          </p:stCondLst>
-                                        </p:cTn>
-                                        <p:tgtEl>
-                                          <p:spTgt spid="2">
-                                            <p:txEl>
-                                              <p:pRg st="1" end="1"/>
-                                            </p:txEl>
-                                          </p:spTgt>
-                                        </p:tgtEl>
-                                        <p:attrNameLst>
-                                          <p:attrName>style.visibility</p:attrName>
-                                        </p:attrNameLst>
-                                      </p:cBhvr>
-                                      <p:to>
-                                        <p:strVal val="visible"/>
-                                      </p:to>
-                                    </p:set>
-                                    <p:anim calcmode="lin" valueType="num">
-                                      <p:cBhvr additive="base">
-                                        <p:cTn id="12" dur="1000" fill="hold"/>
-                                        <p:tgtEl>
-                                          <p:spTgt spid="2">
-                                            <p:txEl>
-                                              <p:pRg st="1" end="1"/>
-                                            </p:txEl>
-                                          </p:spTgt>
-                                        </p:tgtEl>
-                                        <p:attrNameLst>
-                                          <p:attrName>ppt_x</p:attrName>
-                                        </p:attrNameLst>
-                                      </p:cBhvr>
-                                      <p:tavLst>
-                                        <p:tav tm="0">
-                                          <p:val>
-                                            <p:strVal val="#ppt_x"/>
-                                          </p:val>
-                                        </p:tav>
-                                        <p:tav tm="100000">
-                                          <p:val>
-                                            <p:strVal val="#ppt_x"/>
-                                          </p:val>
-                                        </p:tav>
-                                      </p:tavLst>
-                                    </p:anim>
-                                    <p:anim calcmode="lin" valueType="num">
-                                      <p:cBhvr additive="base">
-                                        <p:cTn id="13" dur="1000" fill="hold"/>
-                                        <p:tgtEl>
-                                          <p:spTgt spid="2">
-                                            <p:txEl>
-                                              <p:pRg st="1" end="1"/>
-                                            </p:txEl>
-                                          </p:spTgt>
-                                        </p:tgtEl>
-                                        <p:attrNameLst>
-                                          <p:attrName>ppt_y</p:attrName>
-                                        </p:attrNameLst>
-                                      </p:cBhvr>
-                                      <p:tavLst>
-                                        <p:tav tm="0">
-                                          <p:val>
-                                            <p:strVal val="1+#ppt_h/2"/>
-                                          </p:val>
-                                        </p:tav>
-                                        <p:tav tm="100000">
-                                          <p:val>
-                                            <p:strVal val="#ppt_y"/>
-                                          </p:val>
-                                        </p:tav>
-                                      </p:tavLst>
-                                    </p:anim>
-                                  </p:childTnLst>
-                                </p:cTn>
-                              </p:par>
-                              <p:par>
-                                <p:cTn id="14" presetID="2" presetClass="entr" presetSubtype="4" fill="hold" nodeType="withEffect">
-                                  <p:stCondLst>
-                                    <p:cond delay="2000"/>
-                                  </p:stCondLst>
-                                  <p:childTnLst>
-                                    <p:set>
-                                      <p:cBhvr>
-                                        <p:cTn id="15" dur="1" fill="hold">
-                                          <p:stCondLst>
-                                            <p:cond delay="0"/>
-                                          </p:stCondLst>
-                                        </p:cTn>
-                                        <p:tgtEl>
-                                          <p:spTgt spid="1030"/>
-                                        </p:tgtEl>
-                                        <p:attrNameLst>
-                                          <p:attrName>style.visibility</p:attrName>
-                                        </p:attrNameLst>
-                                      </p:cBhvr>
-                                      <p:to>
-                                        <p:strVal val="visible"/>
-                                      </p:to>
-                                    </p:set>
-                                    <p:anim calcmode="lin" valueType="num">
-                                      <p:cBhvr additive="base">
-                                        <p:cTn id="16" dur="1000" fill="hold"/>
-                                        <p:tgtEl>
-                                          <p:spTgt spid="1030"/>
-                                        </p:tgtEl>
-                                        <p:attrNameLst>
-                                          <p:attrName>ppt_x</p:attrName>
-                                        </p:attrNameLst>
-                                      </p:cBhvr>
-                                      <p:tavLst>
-                                        <p:tav tm="0">
-                                          <p:val>
-                                            <p:strVal val="#ppt_x"/>
-                                          </p:val>
-                                        </p:tav>
-                                        <p:tav tm="100000">
-                                          <p:val>
-                                            <p:strVal val="#ppt_x"/>
-                                          </p:val>
-                                        </p:tav>
-                                      </p:tavLst>
-                                    </p:anim>
-                                    <p:anim calcmode="lin" valueType="num">
-                                      <p:cBhvr additive="base">
-                                        <p:cTn id="17" dur="1000" fill="hold"/>
-                                        <p:tgtEl>
-                                          <p:spTgt spid="1030"/>
-                                        </p:tgtEl>
-                                        <p:attrNameLst>
-                                          <p:attrName>ppt_y</p:attrName>
-                                        </p:attrNameLst>
-                                      </p:cBhvr>
-                                      <p:tavLst>
-                                        <p:tav tm="0">
-                                          <p:val>
-                                            <p:strVal val="1+#ppt_h/2"/>
-                                          </p:val>
-                                        </p:tav>
-                                        <p:tav tm="100000">
-                                          <p:val>
-                                            <p:strVal val="#ppt_y"/>
-                                          </p:val>
-                                        </p:tav>
-                                      </p:tavLst>
-                                    </p:anim>
-                                  </p:childTnLst>
-                                </p:cTn>
-                              </p:par>
-                            </p:childTnLst>
-                          </p:cTn>
-                        </p:par>
-                        <p:par>
-                          <p:cTn id="18" fill="hold">
-                            <p:stCondLst>
-                              <p:cond delay="4000"/>
-                            </p:stCondLst>
-                            <p:childTnLst>
-                              <p:par>
-                                <p:cTn id="19" presetID="2" presetClass="entr" presetSubtype="4" fill="hold" grpId="0" nodeType="afterEffect">
-                                  <p:stCondLst>
-                                    <p:cond delay="0"/>
-                                  </p:stCondLst>
-                                  <p:childTnLst>
-                                    <p:set>
-                                      <p:cBhvr>
-                                        <p:cTn id="20" dur="1" fill="hold">
-                                          <p:stCondLst>
-                                            <p:cond delay="0"/>
-                                          </p:stCondLst>
-                                        </p:cTn>
-                                        <p:tgtEl>
-                                          <p:spTgt spid="5"/>
-                                        </p:tgtEl>
-                                        <p:attrNameLst>
-                                          <p:attrName>style.visibility</p:attrName>
-                                        </p:attrNameLst>
-                                      </p:cBhvr>
-                                      <p:to>
-                                        <p:strVal val="visible"/>
-                                      </p:to>
-                                    </p:set>
-                                    <p:anim calcmode="lin" valueType="num">
-                                      <p:cBhvr additive="base">
-                                        <p:cTn id="21" dur="1000" fill="hold"/>
-                                        <p:tgtEl>
-                                          <p:spTgt spid="5"/>
-                                        </p:tgtEl>
-                                        <p:attrNameLst>
-                                          <p:attrName>ppt_x</p:attrName>
-                                        </p:attrNameLst>
-                                      </p:cBhvr>
-                                      <p:tavLst>
-                                        <p:tav tm="0">
-                                          <p:val>
-                                            <p:strVal val="#ppt_x"/>
-                                          </p:val>
-                                        </p:tav>
-                                        <p:tav tm="100000">
-                                          <p:val>
-                                            <p:strVal val="#ppt_x"/>
-                                          </p:val>
-                                        </p:tav>
-                                      </p:tavLst>
-                                    </p:anim>
-                                    <p:anim calcmode="lin" valueType="num">
-                                      <p:cBhvr additive="base">
-                                        <p:cTn id="22" dur="1000" fill="hold"/>
-                                        <p:tgtEl>
-                                          <p:spTgt spid="5"/>
-                                        </p:tgtEl>
-                                        <p:attrNameLst>
-                                          <p:attrName>ppt_y</p:attrName>
-                                        </p:attrNameLst>
-                                      </p:cBhvr>
-                                      <p:tavLst>
-                                        <p:tav tm="0">
-                                          <p:val>
-                                            <p:strVal val="1+#ppt_h/2"/>
-                                          </p:val>
-                                        </p:tav>
-                                        <p:tav tm="100000">
-                                          <p:val>
-                                            <p:strVal val="#ppt_y"/>
-                                          </p:val>
-                                        </p:tav>
-                                      </p:tavLst>
-                                    </p:anim>
-                                  </p:childTnLst>
-                                </p:cTn>
-                              </p:par>
-                            </p:childTnLst>
-                          </p:cTn>
-                        </p:par>
-                      </p:childTnLst>
-                    </p:cTn>
-                  </p:par>
-                </p:childTnLst>
-              </p:cTn>
-              <p:prevCondLst>
-                <p:cond evt="onPrev" delay="0">
-                  <p:tgtEl>
-                    <p:sldTgt/>
-                  </p:tgtEl>
-                </p:cond>
-              </p:prevCondLst>
-              <p:nextCondLst>
-                <p:cond evt="onNext" delay="0">
-                  <p:tgtEl>
-                    <p:sldTgt/>
-                  </p:tgtEl>
-                </p:cond>
-              </p:nextCondLst>
-            </p:seq>
-          </p:childTnLst>
-        </p:cTn>
-      </p:par>
-    </p:tnLst>
-    <p:bldLst>
-      <p:bldP spid="2" grpId="0" build="p"/>
-      <p:bldP spid="5" grpId="0"/>
-    </p:bldLst>
-  </p:timing>
 </p:sld>
 </file>
 
@@ -18795,309 +17589,6 @@
   <p:transition spd="slow">
     <p:cover/>
   </p:transition>
-  <p:timing>
-    <p:tnLst>
-      <p:par>
-        <p:cTn id="1" dur="indefinite" restart="never" nodeType="tmRoot">
-          <p:childTnLst>
-            <p:seq concurrent="1" nextAc="seek">
-              <p:cTn id="2" dur="indefinite" nodeType="mainSeq">
-                <p:childTnLst>
-                  <p:par>
-                    <p:cTn id="3" fill="hold">
-                      <p:stCondLst>
-                        <p:cond delay="indefinite"/>
-                      </p:stCondLst>
-                      <p:childTnLst>
-                        <p:par>
-                          <p:cTn id="4" fill="hold">
-                            <p:stCondLst>
-                              <p:cond delay="0"/>
-                            </p:stCondLst>
-                            <p:childTnLst>
-                              <p:par>
-                                <p:cTn id="5" presetID="2" presetClass="entr" presetSubtype="2" fill="hold" grpId="0" nodeType="clickEffect">
-                                  <p:stCondLst>
-                                    <p:cond delay="0"/>
-                                  </p:stCondLst>
-                                  <p:childTnLst>
-                                    <p:set>
-                                      <p:cBhvr>
-                                        <p:cTn id="6" dur="1" fill="hold">
-                                          <p:stCondLst>
-                                            <p:cond delay="0"/>
-                                          </p:stCondLst>
-                                        </p:cTn>
-                                        <p:tgtEl>
-                                          <p:spTgt spid="3">
-                                            <p:txEl>
-                                              <p:pRg st="0" end="0"/>
-                                            </p:txEl>
-                                          </p:spTgt>
-                                        </p:tgtEl>
-                                        <p:attrNameLst>
-                                          <p:attrName>style.visibility</p:attrName>
-                                        </p:attrNameLst>
-                                      </p:cBhvr>
-                                      <p:to>
-                                        <p:strVal val="visible"/>
-                                      </p:to>
-                                    </p:set>
-                                    <p:anim calcmode="lin" valueType="num">
-                                      <p:cBhvr additive="base">
-                                        <p:cTn id="7" dur="1000" fill="hold"/>
-                                        <p:tgtEl>
-                                          <p:spTgt spid="3">
-                                            <p:txEl>
-                                              <p:pRg st="0" end="0"/>
-                                            </p:txEl>
-                                          </p:spTgt>
-                                        </p:tgtEl>
-                                        <p:attrNameLst>
-                                          <p:attrName>ppt_x</p:attrName>
-                                        </p:attrNameLst>
-                                      </p:cBhvr>
-                                      <p:tavLst>
-                                        <p:tav tm="0">
-                                          <p:val>
-                                            <p:strVal val="1+#ppt_w/2"/>
-                                          </p:val>
-                                        </p:tav>
-                                        <p:tav tm="100000">
-                                          <p:val>
-                                            <p:strVal val="#ppt_x"/>
-                                          </p:val>
-                                        </p:tav>
-                                      </p:tavLst>
-                                    </p:anim>
-                                    <p:anim calcmode="lin" valueType="num">
-                                      <p:cBhvr additive="base">
-                                        <p:cTn id="8" dur="1000" fill="hold"/>
-                                        <p:tgtEl>
-                                          <p:spTgt spid="3">
-                                            <p:txEl>
-                                              <p:pRg st="0" end="0"/>
-                                            </p:txEl>
-                                          </p:spTgt>
-                                        </p:tgtEl>
-                                        <p:attrNameLst>
-                                          <p:attrName>ppt_y</p:attrName>
-                                        </p:attrNameLst>
-                                      </p:cBhvr>
-                                      <p:tavLst>
-                                        <p:tav tm="0">
-                                          <p:val>
-                                            <p:strVal val="#ppt_y"/>
-                                          </p:val>
-                                        </p:tav>
-                                        <p:tav tm="100000">
-                                          <p:val>
-                                            <p:strVal val="#ppt_y"/>
-                                          </p:val>
-                                        </p:tav>
-                                      </p:tavLst>
-                                    </p:anim>
-                                  </p:childTnLst>
-                                </p:cTn>
-                              </p:par>
-                            </p:childTnLst>
-                          </p:cTn>
-                        </p:par>
-                        <p:par>
-                          <p:cTn id="9" fill="hold">
-                            <p:stCondLst>
-                              <p:cond delay="1000"/>
-                            </p:stCondLst>
-                            <p:childTnLst>
-                              <p:par>
-                                <p:cTn id="10" presetID="2" presetClass="entr" presetSubtype="2" fill="hold" grpId="0" nodeType="afterEffect">
-                                  <p:stCondLst>
-                                    <p:cond delay="2000"/>
-                                  </p:stCondLst>
-                                  <p:childTnLst>
-                                    <p:set>
-                                      <p:cBhvr>
-                                        <p:cTn id="11" dur="1" fill="hold">
-                                          <p:stCondLst>
-                                            <p:cond delay="0"/>
-                                          </p:stCondLst>
-                                        </p:cTn>
-                                        <p:tgtEl>
-                                          <p:spTgt spid="3">
-                                            <p:txEl>
-                                              <p:pRg st="1" end="1"/>
-                                            </p:txEl>
-                                          </p:spTgt>
-                                        </p:tgtEl>
-                                        <p:attrNameLst>
-                                          <p:attrName>style.visibility</p:attrName>
-                                        </p:attrNameLst>
-                                      </p:cBhvr>
-                                      <p:to>
-                                        <p:strVal val="visible"/>
-                                      </p:to>
-                                    </p:set>
-                                    <p:anim calcmode="lin" valueType="num">
-                                      <p:cBhvr additive="base">
-                                        <p:cTn id="12" dur="1000" fill="hold"/>
-                                        <p:tgtEl>
-                                          <p:spTgt spid="3">
-                                            <p:txEl>
-                                              <p:pRg st="1" end="1"/>
-                                            </p:txEl>
-                                          </p:spTgt>
-                                        </p:tgtEl>
-                                        <p:attrNameLst>
-                                          <p:attrName>ppt_x</p:attrName>
-                                        </p:attrNameLst>
-                                      </p:cBhvr>
-                                      <p:tavLst>
-                                        <p:tav tm="0">
-                                          <p:val>
-                                            <p:strVal val="1+#ppt_w/2"/>
-                                          </p:val>
-                                        </p:tav>
-                                        <p:tav tm="100000">
-                                          <p:val>
-                                            <p:strVal val="#ppt_x"/>
-                                          </p:val>
-                                        </p:tav>
-                                      </p:tavLst>
-                                    </p:anim>
-                                    <p:anim calcmode="lin" valueType="num">
-                                      <p:cBhvr additive="base">
-                                        <p:cTn id="13" dur="1000" fill="hold"/>
-                                        <p:tgtEl>
-                                          <p:spTgt spid="3">
-                                            <p:txEl>
-                                              <p:pRg st="1" end="1"/>
-                                            </p:txEl>
-                                          </p:spTgt>
-                                        </p:tgtEl>
-                                        <p:attrNameLst>
-                                          <p:attrName>ppt_y</p:attrName>
-                                        </p:attrNameLst>
-                                      </p:cBhvr>
-                                      <p:tavLst>
-                                        <p:tav tm="0">
-                                          <p:val>
-                                            <p:strVal val="#ppt_y"/>
-                                          </p:val>
-                                        </p:tav>
-                                        <p:tav tm="100000">
-                                          <p:val>
-                                            <p:strVal val="#ppt_y"/>
-                                          </p:val>
-                                        </p:tav>
-                                      </p:tavLst>
-                                    </p:anim>
-                                  </p:childTnLst>
-                                </p:cTn>
-                              </p:par>
-                              <p:par>
-                                <p:cTn id="14" presetID="2" presetClass="entr" presetSubtype="4" fill="hold" nodeType="withEffect">
-                                  <p:stCondLst>
-                                    <p:cond delay="2000"/>
-                                  </p:stCondLst>
-                                  <p:childTnLst>
-                                    <p:set>
-                                      <p:cBhvr>
-                                        <p:cTn id="15" dur="1" fill="hold">
-                                          <p:stCondLst>
-                                            <p:cond delay="0"/>
-                                          </p:stCondLst>
-                                        </p:cTn>
-                                        <p:tgtEl>
-                                          <p:spTgt spid="6"/>
-                                        </p:tgtEl>
-                                        <p:attrNameLst>
-                                          <p:attrName>style.visibility</p:attrName>
-                                        </p:attrNameLst>
-                                      </p:cBhvr>
-                                      <p:to>
-                                        <p:strVal val="visible"/>
-                                      </p:to>
-                                    </p:set>
-                                    <p:anim calcmode="lin" valueType="num">
-                                      <p:cBhvr additive="base">
-                                        <p:cTn id="16" dur="1000" fill="hold"/>
-                                        <p:tgtEl>
-                                          <p:spTgt spid="6"/>
-                                        </p:tgtEl>
-                                        <p:attrNameLst>
-                                          <p:attrName>ppt_x</p:attrName>
-                                        </p:attrNameLst>
-                                      </p:cBhvr>
-                                      <p:tavLst>
-                                        <p:tav tm="0">
-                                          <p:val>
-                                            <p:strVal val="#ppt_x"/>
-                                          </p:val>
-                                        </p:tav>
-                                        <p:tav tm="100000">
-                                          <p:val>
-                                            <p:strVal val="#ppt_x"/>
-                                          </p:val>
-                                        </p:tav>
-                                      </p:tavLst>
-                                    </p:anim>
-                                    <p:anim calcmode="lin" valueType="num">
-                                      <p:cBhvr additive="base">
-                                        <p:cTn id="17" dur="1000" fill="hold"/>
-                                        <p:tgtEl>
-                                          <p:spTgt spid="6"/>
-                                        </p:tgtEl>
-                                        <p:attrNameLst>
-                                          <p:attrName>ppt_y</p:attrName>
-                                        </p:attrNameLst>
-                                      </p:cBhvr>
-                                      <p:tavLst>
-                                        <p:tav tm="0">
-                                          <p:val>
-                                            <p:strVal val="1+#ppt_h/2"/>
-                                          </p:val>
-                                        </p:tav>
-                                        <p:tav tm="100000">
-                                          <p:val>
-                                            <p:strVal val="#ppt_y"/>
-                                          </p:val>
-                                        </p:tav>
-                                      </p:tavLst>
-                                    </p:anim>
-                                  </p:childTnLst>
-                                </p:cTn>
-                              </p:par>
-                            </p:childTnLst>
-                          </p:cTn>
-                        </p:par>
-                      </p:childTnLst>
-                    </p:cTn>
-                  </p:par>
-                </p:childTnLst>
-              </p:cTn>
-              <p:prevCondLst>
-                <p:cond evt="onPrev" delay="0">
-                  <p:tgtEl>
-                    <p:sldTgt/>
-                  </p:tgtEl>
-                </p:cond>
-              </p:prevCondLst>
-              <p:nextCondLst>
-                <p:cond evt="onNext" delay="0">
-                  <p:tgtEl>
-                    <p:sldTgt/>
-                  </p:tgtEl>
-                </p:cond>
-              </p:nextCondLst>
-            </p:seq>
-          </p:childTnLst>
-        </p:cTn>
-      </p:par>
-    </p:tnLst>
-    <p:bldLst>
-      <p:bldP spid="3" grpId="0" build="p"/>
-    </p:bldLst>
-  </p:timing>
 </p:sld>
 </file>
 
@@ -19418,380 +17909,6 @@
   <p:transition spd="slow">
     <p:cover/>
   </p:transition>
-  <p:timing>
-    <p:tnLst>
-      <p:par>
-        <p:cTn id="1" dur="indefinite" restart="never" nodeType="tmRoot">
-          <p:childTnLst>
-            <p:seq concurrent="1" nextAc="seek">
-              <p:cTn id="2" dur="indefinite" nodeType="mainSeq">
-                <p:childTnLst>
-                  <p:par>
-                    <p:cTn id="3" fill="hold">
-                      <p:stCondLst>
-                        <p:cond delay="indefinite"/>
-                      </p:stCondLst>
-                      <p:childTnLst>
-                        <p:par>
-                          <p:cTn id="4" fill="hold">
-                            <p:stCondLst>
-                              <p:cond delay="0"/>
-                            </p:stCondLst>
-                            <p:childTnLst>
-                              <p:par>
-                                <p:cTn id="5" presetID="2" presetClass="entr" presetSubtype="4" fill="hold" grpId="0" nodeType="clickEffect">
-                                  <p:stCondLst>
-                                    <p:cond delay="0"/>
-                                  </p:stCondLst>
-                                  <p:childTnLst>
-                                    <p:set>
-                                      <p:cBhvr>
-                                        <p:cTn id="6" dur="1" fill="hold">
-                                          <p:stCondLst>
-                                            <p:cond delay="0"/>
-                                          </p:stCondLst>
-                                        </p:cTn>
-                                        <p:tgtEl>
-                                          <p:spTgt spid="3">
-                                            <p:txEl>
-                                              <p:pRg st="0" end="0"/>
-                                            </p:txEl>
-                                          </p:spTgt>
-                                        </p:tgtEl>
-                                        <p:attrNameLst>
-                                          <p:attrName>style.visibility</p:attrName>
-                                        </p:attrNameLst>
-                                      </p:cBhvr>
-                                      <p:to>
-                                        <p:strVal val="visible"/>
-                                      </p:to>
-                                    </p:set>
-                                    <p:anim calcmode="lin" valueType="num">
-                                      <p:cBhvr additive="base">
-                                        <p:cTn id="7" dur="1000" fill="hold"/>
-                                        <p:tgtEl>
-                                          <p:spTgt spid="3">
-                                            <p:txEl>
-                                              <p:pRg st="0" end="0"/>
-                                            </p:txEl>
-                                          </p:spTgt>
-                                        </p:tgtEl>
-                                        <p:attrNameLst>
-                                          <p:attrName>ppt_x</p:attrName>
-                                        </p:attrNameLst>
-                                      </p:cBhvr>
-                                      <p:tavLst>
-                                        <p:tav tm="0">
-                                          <p:val>
-                                            <p:strVal val="#ppt_x"/>
-                                          </p:val>
-                                        </p:tav>
-                                        <p:tav tm="100000">
-                                          <p:val>
-                                            <p:strVal val="#ppt_x"/>
-                                          </p:val>
-                                        </p:tav>
-                                      </p:tavLst>
-                                    </p:anim>
-                                    <p:anim calcmode="lin" valueType="num">
-                                      <p:cBhvr additive="base">
-                                        <p:cTn id="8" dur="1000" fill="hold"/>
-                                        <p:tgtEl>
-                                          <p:spTgt spid="3">
-                                            <p:txEl>
-                                              <p:pRg st="0" end="0"/>
-                                            </p:txEl>
-                                          </p:spTgt>
-                                        </p:tgtEl>
-                                        <p:attrNameLst>
-                                          <p:attrName>ppt_y</p:attrName>
-                                        </p:attrNameLst>
-                                      </p:cBhvr>
-                                      <p:tavLst>
-                                        <p:tav tm="0">
-                                          <p:val>
-                                            <p:strVal val="1+#ppt_h/2"/>
-                                          </p:val>
-                                        </p:tav>
-                                        <p:tav tm="100000">
-                                          <p:val>
-                                            <p:strVal val="#ppt_y"/>
-                                          </p:val>
-                                        </p:tav>
-                                      </p:tavLst>
-                                    </p:anim>
-                                  </p:childTnLst>
-                                </p:cTn>
-                              </p:par>
-                              <p:par>
-                                <p:cTn id="9" presetID="2" presetClass="entr" presetSubtype="4" fill="hold" nodeType="withEffect">
-                                  <p:stCondLst>
-                                    <p:cond delay="0"/>
-                                  </p:stCondLst>
-                                  <p:childTnLst>
-                                    <p:set>
-                                      <p:cBhvr>
-                                        <p:cTn id="10" dur="1" fill="hold">
-                                          <p:stCondLst>
-                                            <p:cond delay="0"/>
-                                          </p:stCondLst>
-                                        </p:cTn>
-                                        <p:tgtEl>
-                                          <p:spTgt spid="5"/>
-                                        </p:tgtEl>
-                                        <p:attrNameLst>
-                                          <p:attrName>style.visibility</p:attrName>
-                                        </p:attrNameLst>
-                                      </p:cBhvr>
-                                      <p:to>
-                                        <p:strVal val="visible"/>
-                                      </p:to>
-                                    </p:set>
-                                    <p:anim calcmode="lin" valueType="num">
-                                      <p:cBhvr additive="base">
-                                        <p:cTn id="11" dur="1000" fill="hold"/>
-                                        <p:tgtEl>
-                                          <p:spTgt spid="5"/>
-                                        </p:tgtEl>
-                                        <p:attrNameLst>
-                                          <p:attrName>ppt_x</p:attrName>
-                                        </p:attrNameLst>
-                                      </p:cBhvr>
-                                      <p:tavLst>
-                                        <p:tav tm="0">
-                                          <p:val>
-                                            <p:strVal val="#ppt_x"/>
-                                          </p:val>
-                                        </p:tav>
-                                        <p:tav tm="100000">
-                                          <p:val>
-                                            <p:strVal val="#ppt_x"/>
-                                          </p:val>
-                                        </p:tav>
-                                      </p:tavLst>
-                                    </p:anim>
-                                    <p:anim calcmode="lin" valueType="num">
-                                      <p:cBhvr additive="base">
-                                        <p:cTn id="12" dur="1000" fill="hold"/>
-                                        <p:tgtEl>
-                                          <p:spTgt spid="5"/>
-                                        </p:tgtEl>
-                                        <p:attrNameLst>
-                                          <p:attrName>ppt_y</p:attrName>
-                                        </p:attrNameLst>
-                                      </p:cBhvr>
-                                      <p:tavLst>
-                                        <p:tav tm="0">
-                                          <p:val>
-                                            <p:strVal val="1+#ppt_h/2"/>
-                                          </p:val>
-                                        </p:tav>
-                                        <p:tav tm="100000">
-                                          <p:val>
-                                            <p:strVal val="#ppt_y"/>
-                                          </p:val>
-                                        </p:tav>
-                                      </p:tavLst>
-                                    </p:anim>
-                                  </p:childTnLst>
-                                </p:cTn>
-                              </p:par>
-                            </p:childTnLst>
-                          </p:cTn>
-                        </p:par>
-                        <p:par>
-                          <p:cTn id="13" fill="hold">
-                            <p:stCondLst>
-                              <p:cond delay="1000"/>
-                            </p:stCondLst>
-                            <p:childTnLst>
-                              <p:par>
-                                <p:cTn id="14" presetID="2" presetClass="entr" presetSubtype="4" fill="hold" grpId="0" nodeType="afterEffect">
-                                  <p:stCondLst>
-                                    <p:cond delay="2000"/>
-                                  </p:stCondLst>
-                                  <p:childTnLst>
-                                    <p:set>
-                                      <p:cBhvr>
-                                        <p:cTn id="15" dur="1" fill="hold">
-                                          <p:stCondLst>
-                                            <p:cond delay="0"/>
-                                          </p:stCondLst>
-                                        </p:cTn>
-                                        <p:tgtEl>
-                                          <p:spTgt spid="7"/>
-                                        </p:tgtEl>
-                                        <p:attrNameLst>
-                                          <p:attrName>style.visibility</p:attrName>
-                                        </p:attrNameLst>
-                                      </p:cBhvr>
-                                      <p:to>
-                                        <p:strVal val="visible"/>
-                                      </p:to>
-                                    </p:set>
-                                    <p:anim calcmode="lin" valueType="num">
-                                      <p:cBhvr additive="base">
-                                        <p:cTn id="16" dur="1000" fill="hold"/>
-                                        <p:tgtEl>
-                                          <p:spTgt spid="7"/>
-                                        </p:tgtEl>
-                                        <p:attrNameLst>
-                                          <p:attrName>ppt_x</p:attrName>
-                                        </p:attrNameLst>
-                                      </p:cBhvr>
-                                      <p:tavLst>
-                                        <p:tav tm="0">
-                                          <p:val>
-                                            <p:strVal val="#ppt_x"/>
-                                          </p:val>
-                                        </p:tav>
-                                        <p:tav tm="100000">
-                                          <p:val>
-                                            <p:strVal val="#ppt_x"/>
-                                          </p:val>
-                                        </p:tav>
-                                      </p:tavLst>
-                                    </p:anim>
-                                    <p:anim calcmode="lin" valueType="num">
-                                      <p:cBhvr additive="base">
-                                        <p:cTn id="17" dur="1000" fill="hold"/>
-                                        <p:tgtEl>
-                                          <p:spTgt spid="7"/>
-                                        </p:tgtEl>
-                                        <p:attrNameLst>
-                                          <p:attrName>ppt_y</p:attrName>
-                                        </p:attrNameLst>
-                                      </p:cBhvr>
-                                      <p:tavLst>
-                                        <p:tav tm="0">
-                                          <p:val>
-                                            <p:strVal val="1+#ppt_h/2"/>
-                                          </p:val>
-                                        </p:tav>
-                                        <p:tav tm="100000">
-                                          <p:val>
-                                            <p:strVal val="#ppt_y"/>
-                                          </p:val>
-                                        </p:tav>
-                                      </p:tavLst>
-                                    </p:anim>
-                                  </p:childTnLst>
-                                </p:cTn>
-                              </p:par>
-                            </p:childTnLst>
-                          </p:cTn>
-                        </p:par>
-                        <p:par>
-                          <p:cTn id="18" fill="hold">
-                            <p:stCondLst>
-                              <p:cond delay="4000"/>
-                            </p:stCondLst>
-                            <p:childTnLst>
-                              <p:par>
-                                <p:cTn id="19" presetID="2" presetClass="entr" presetSubtype="4" fill="hold" nodeType="afterEffect">
-                                  <p:stCondLst>
-                                    <p:cond delay="0"/>
-                                  </p:stCondLst>
-                                  <p:childTnLst>
-                                    <p:set>
-                                      <p:cBhvr>
-                                        <p:cTn id="20" dur="1" fill="hold">
-                                          <p:stCondLst>
-                                            <p:cond delay="0"/>
-                                          </p:stCondLst>
-                                        </p:cTn>
-                                        <p:tgtEl>
-                                          <p:spTgt spid="6"/>
-                                        </p:tgtEl>
-                                        <p:attrNameLst>
-                                          <p:attrName>style.visibility</p:attrName>
-                                        </p:attrNameLst>
-                                      </p:cBhvr>
-                                      <p:to>
-                                        <p:strVal val="visible"/>
-                                      </p:to>
-                                    </p:set>
-                                    <p:anim calcmode="lin" valueType="num">
-                                      <p:cBhvr additive="base">
-                                        <p:cTn id="21" dur="1000" fill="hold"/>
-                                        <p:tgtEl>
-                                          <p:spTgt spid="6"/>
-                                        </p:tgtEl>
-                                        <p:attrNameLst>
-                                          <p:attrName>ppt_x</p:attrName>
-                                        </p:attrNameLst>
-                                      </p:cBhvr>
-                                      <p:tavLst>
-                                        <p:tav tm="0">
-                                          <p:val>
-                                            <p:strVal val="#ppt_x"/>
-                                          </p:val>
-                                        </p:tav>
-                                        <p:tav tm="100000">
-                                          <p:val>
-                                            <p:strVal val="#ppt_x"/>
-                                          </p:val>
-                                        </p:tav>
-                                      </p:tavLst>
-                                    </p:anim>
-                                    <p:anim calcmode="lin" valueType="num">
-                                      <p:cBhvr additive="base">
-                                        <p:cTn id="22" dur="1000" fill="hold"/>
-                                        <p:tgtEl>
-                                          <p:spTgt spid="6"/>
-                                        </p:tgtEl>
-                                        <p:attrNameLst>
-                                          <p:attrName>ppt_y</p:attrName>
-                                        </p:attrNameLst>
-                                      </p:cBhvr>
-                                      <p:tavLst>
-                                        <p:tav tm="0">
-                                          <p:val>
-                                            <p:strVal val="1+#ppt_h/2"/>
-                                          </p:val>
-                                        </p:tav>
-                                        <p:tav tm="100000">
-                                          <p:val>
-                                            <p:strVal val="#ppt_y"/>
-                                          </p:val>
-                                        </p:tav>
-                                      </p:tavLst>
-                                    </p:anim>
-                                  </p:childTnLst>
-                                </p:cTn>
-                              </p:par>
-                            </p:childTnLst>
-                          </p:cTn>
-                        </p:par>
-                      </p:childTnLst>
-                    </p:cTn>
-                  </p:par>
-                </p:childTnLst>
-              </p:cTn>
-              <p:prevCondLst>
-                <p:cond evt="onPrev" delay="0">
-                  <p:tgtEl>
-                    <p:sldTgt/>
-                  </p:tgtEl>
-                </p:cond>
-              </p:prevCondLst>
-              <p:nextCondLst>
-                <p:cond evt="onNext" delay="0">
-                  <p:tgtEl>
-                    <p:sldTgt/>
-                  </p:tgtEl>
-                </p:cond>
-              </p:nextCondLst>
-            </p:seq>
-          </p:childTnLst>
-        </p:cTn>
-      </p:par>
-    </p:tnLst>
-    <p:bldLst>
-      <p:bldP spid="3" grpId="0" build="p"/>
-      <p:bldP spid="7" grpId="0"/>
-    </p:bldLst>
-  </p:timing>
 </p:sld>
 </file>
 
@@ -20007,318 +18124,6 @@
   <p:transition spd="slow">
     <p:cover/>
   </p:transition>
-  <p:timing>
-    <p:tnLst>
-      <p:par>
-        <p:cTn id="1" dur="indefinite" restart="never" nodeType="tmRoot">
-          <p:childTnLst>
-            <p:seq concurrent="1" nextAc="seek">
-              <p:cTn id="2" dur="indefinite" nodeType="mainSeq">
-                <p:childTnLst>
-                  <p:par>
-                    <p:cTn id="3" fill="hold">
-                      <p:stCondLst>
-                        <p:cond delay="indefinite"/>
-                      </p:stCondLst>
-                      <p:childTnLst>
-                        <p:par>
-                          <p:cTn id="4" fill="hold">
-                            <p:stCondLst>
-                              <p:cond delay="0"/>
-                            </p:stCondLst>
-                            <p:childTnLst>
-                              <p:par>
-                                <p:cTn id="5" presetID="2" presetClass="entr" presetSubtype="4" fill="hold" grpId="0" nodeType="clickEffect">
-                                  <p:stCondLst>
-                                    <p:cond delay="0"/>
-                                  </p:stCondLst>
-                                  <p:childTnLst>
-                                    <p:set>
-                                      <p:cBhvr>
-                                        <p:cTn id="6" dur="1" fill="hold">
-                                          <p:stCondLst>
-                                            <p:cond delay="0"/>
-                                          </p:stCondLst>
-                                        </p:cTn>
-                                        <p:tgtEl>
-                                          <p:spTgt spid="3">
-                                            <p:txEl>
-                                              <p:pRg st="0" end="0"/>
-                                            </p:txEl>
-                                          </p:spTgt>
-                                        </p:tgtEl>
-                                        <p:attrNameLst>
-                                          <p:attrName>style.visibility</p:attrName>
-                                        </p:attrNameLst>
-                                      </p:cBhvr>
-                                      <p:to>
-                                        <p:strVal val="visible"/>
-                                      </p:to>
-                                    </p:set>
-                                    <p:anim calcmode="lin" valueType="num">
-                                      <p:cBhvr additive="base">
-                                        <p:cTn id="7" dur="1000" fill="hold"/>
-                                        <p:tgtEl>
-                                          <p:spTgt spid="3">
-                                            <p:txEl>
-                                              <p:pRg st="0" end="0"/>
-                                            </p:txEl>
-                                          </p:spTgt>
-                                        </p:tgtEl>
-                                        <p:attrNameLst>
-                                          <p:attrName>ppt_x</p:attrName>
-                                        </p:attrNameLst>
-                                      </p:cBhvr>
-                                      <p:tavLst>
-                                        <p:tav tm="0">
-                                          <p:val>
-                                            <p:strVal val="#ppt_x"/>
-                                          </p:val>
-                                        </p:tav>
-                                        <p:tav tm="100000">
-                                          <p:val>
-                                            <p:strVal val="#ppt_x"/>
-                                          </p:val>
-                                        </p:tav>
-                                      </p:tavLst>
-                                    </p:anim>
-                                    <p:anim calcmode="lin" valueType="num">
-                                      <p:cBhvr additive="base">
-                                        <p:cTn id="8" dur="1000" fill="hold"/>
-                                        <p:tgtEl>
-                                          <p:spTgt spid="3">
-                                            <p:txEl>
-                                              <p:pRg st="0" end="0"/>
-                                            </p:txEl>
-                                          </p:spTgt>
-                                        </p:tgtEl>
-                                        <p:attrNameLst>
-                                          <p:attrName>ppt_y</p:attrName>
-                                        </p:attrNameLst>
-                                      </p:cBhvr>
-                                      <p:tavLst>
-                                        <p:tav tm="0">
-                                          <p:val>
-                                            <p:strVal val="1+#ppt_h/2"/>
-                                          </p:val>
-                                        </p:tav>
-                                        <p:tav tm="100000">
-                                          <p:val>
-                                            <p:strVal val="#ppt_y"/>
-                                          </p:val>
-                                        </p:tav>
-                                      </p:tavLst>
-                                    </p:anim>
-                                  </p:childTnLst>
-                                </p:cTn>
-                              </p:par>
-                            </p:childTnLst>
-                          </p:cTn>
-                        </p:par>
-                        <p:par>
-                          <p:cTn id="9" fill="hold">
-                            <p:stCondLst>
-                              <p:cond delay="1000"/>
-                            </p:stCondLst>
-                            <p:childTnLst>
-                              <p:par>
-                                <p:cTn id="10" presetID="2" presetClass="entr" presetSubtype="4" fill="hold" grpId="0" nodeType="afterEffect">
-                                  <p:stCondLst>
-                                    <p:cond delay="2000"/>
-                                  </p:stCondLst>
-                                  <p:childTnLst>
-                                    <p:set>
-                                      <p:cBhvr>
-                                        <p:cTn id="11" dur="1" fill="hold">
-                                          <p:stCondLst>
-                                            <p:cond delay="0"/>
-                                          </p:stCondLst>
-                                        </p:cTn>
-                                        <p:tgtEl>
-                                          <p:spTgt spid="3">
-                                            <p:txEl>
-                                              <p:pRg st="1" end="1"/>
-                                            </p:txEl>
-                                          </p:spTgt>
-                                        </p:tgtEl>
-                                        <p:attrNameLst>
-                                          <p:attrName>style.visibility</p:attrName>
-                                        </p:attrNameLst>
-                                      </p:cBhvr>
-                                      <p:to>
-                                        <p:strVal val="visible"/>
-                                      </p:to>
-                                    </p:set>
-                                    <p:anim calcmode="lin" valueType="num">
-                                      <p:cBhvr additive="base">
-                                        <p:cTn id="12" dur="1000" fill="hold"/>
-                                        <p:tgtEl>
-                                          <p:spTgt spid="3">
-                                            <p:txEl>
-                                              <p:pRg st="1" end="1"/>
-                                            </p:txEl>
-                                          </p:spTgt>
-                                        </p:tgtEl>
-                                        <p:attrNameLst>
-                                          <p:attrName>ppt_x</p:attrName>
-                                        </p:attrNameLst>
-                                      </p:cBhvr>
-                                      <p:tavLst>
-                                        <p:tav tm="0">
-                                          <p:val>
-                                            <p:strVal val="#ppt_x"/>
-                                          </p:val>
-                                        </p:tav>
-                                        <p:tav tm="100000">
-                                          <p:val>
-                                            <p:strVal val="#ppt_x"/>
-                                          </p:val>
-                                        </p:tav>
-                                      </p:tavLst>
-                                    </p:anim>
-                                    <p:anim calcmode="lin" valueType="num">
-                                      <p:cBhvr additive="base">
-                                        <p:cTn id="13" dur="1000" fill="hold"/>
-                                        <p:tgtEl>
-                                          <p:spTgt spid="3">
-                                            <p:txEl>
-                                              <p:pRg st="1" end="1"/>
-                                            </p:txEl>
-                                          </p:spTgt>
-                                        </p:tgtEl>
-                                        <p:attrNameLst>
-                                          <p:attrName>ppt_y</p:attrName>
-                                        </p:attrNameLst>
-                                      </p:cBhvr>
-                                      <p:tavLst>
-                                        <p:tav tm="0">
-                                          <p:val>
-                                            <p:strVal val="1+#ppt_h/2"/>
-                                          </p:val>
-                                        </p:tav>
-                                        <p:tav tm="100000">
-                                          <p:val>
-                                            <p:strVal val="#ppt_y"/>
-                                          </p:val>
-                                        </p:tav>
-                                      </p:tavLst>
-                                    </p:anim>
-                                  </p:childTnLst>
-                                </p:cTn>
-                              </p:par>
-                            </p:childTnLst>
-                          </p:cTn>
-                        </p:par>
-                        <p:par>
-                          <p:cTn id="14" fill="hold">
-                            <p:stCondLst>
-                              <p:cond delay="4000"/>
-                            </p:stCondLst>
-                            <p:childTnLst>
-                              <p:par>
-                                <p:cTn id="15" presetID="2" presetClass="entr" presetSubtype="4" fill="hold" nodeType="afterEffect">
-                                  <p:stCondLst>
-                                    <p:cond delay="2000"/>
-                                  </p:stCondLst>
-                                  <p:childTnLst>
-                                    <p:set>
-                                      <p:cBhvr>
-                                        <p:cTn id="16" dur="1" fill="hold">
-                                          <p:stCondLst>
-                                            <p:cond delay="0"/>
-                                          </p:stCondLst>
-                                        </p:cTn>
-                                        <p:tgtEl>
-                                          <p:spTgt spid="5"/>
-                                        </p:tgtEl>
-                                        <p:attrNameLst>
-                                          <p:attrName>style.visibility</p:attrName>
-                                        </p:attrNameLst>
-                                      </p:cBhvr>
-                                      <p:to>
-                                        <p:strVal val="visible"/>
-                                      </p:to>
-                                    </p:set>
-                                    <p:anim calcmode="lin" valueType="num">
-                                      <p:cBhvr additive="base">
-                                        <p:cTn id="17" dur="1000" fill="hold"/>
-                                        <p:tgtEl>
-                                          <p:spTgt spid="5"/>
-                                        </p:tgtEl>
-                                        <p:attrNameLst>
-                                          <p:attrName>ppt_x</p:attrName>
-                                        </p:attrNameLst>
-                                      </p:cBhvr>
-                                      <p:tavLst>
-                                        <p:tav tm="0">
-                                          <p:val>
-                                            <p:strVal val="#ppt_x"/>
-                                          </p:val>
-                                        </p:tav>
-                                        <p:tav tm="100000">
-                                          <p:val>
-                                            <p:strVal val="#ppt_x"/>
-                                          </p:val>
-                                        </p:tav>
-                                      </p:tavLst>
-                                    </p:anim>
-                                    <p:anim calcmode="lin" valueType="num">
-                                      <p:cBhvr additive="base">
-                                        <p:cTn id="18" dur="1000" fill="hold"/>
-                                        <p:tgtEl>
-                                          <p:spTgt spid="5"/>
-                                        </p:tgtEl>
-                                        <p:attrNameLst>
-                                          <p:attrName>ppt_y</p:attrName>
-                                        </p:attrNameLst>
-                                      </p:cBhvr>
-                                      <p:tavLst>
-                                        <p:tav tm="0">
-                                          <p:val>
-                                            <p:strVal val="1+#ppt_h/2"/>
-                                          </p:val>
-                                        </p:tav>
-                                        <p:tav tm="100000">
-                                          <p:val>
-                                            <p:strVal val="#ppt_y"/>
-                                          </p:val>
-                                        </p:tav>
-                                      </p:tavLst>
-                                    </p:anim>
-                                  </p:childTnLst>
-                                </p:cTn>
-                              </p:par>
-                            </p:childTnLst>
-                          </p:cTn>
-                        </p:par>
-                      </p:childTnLst>
-                    </p:cTn>
-                  </p:par>
-                </p:childTnLst>
-              </p:cTn>
-              <p:prevCondLst>
-                <p:cond evt="onPrev" delay="0">
-                  <p:tgtEl>
-                    <p:sldTgt/>
-                  </p:tgtEl>
-                </p:cond>
-              </p:prevCondLst>
-              <p:nextCondLst>
-                <p:cond evt="onNext" delay="0">
-                  <p:tgtEl>
-                    <p:sldTgt/>
-                  </p:tgtEl>
-                </p:cond>
-              </p:nextCondLst>
-            </p:seq>
-          </p:childTnLst>
-        </p:cTn>
-      </p:par>
-    </p:tnLst>
-    <p:bldLst>
-      <p:bldP spid="3" grpId="0" build="p"/>
-    </p:bldLst>
-  </p:timing>
 </p:sld>
 </file>
 
@@ -20527,215 +18332,6 @@
   <p:transition spd="slow">
     <p:cover/>
   </p:transition>
-  <p:timing>
-    <p:tnLst>
-      <p:par>
-        <p:cTn id="1" dur="indefinite" restart="never" nodeType="tmRoot">
-          <p:childTnLst>
-            <p:seq concurrent="1" nextAc="seek">
-              <p:cTn id="2" dur="indefinite" nodeType="mainSeq">
-                <p:childTnLst>
-                  <p:par>
-                    <p:cTn id="3" fill="hold">
-                      <p:stCondLst>
-                        <p:cond delay="indefinite"/>
-                      </p:stCondLst>
-                      <p:childTnLst>
-                        <p:par>
-                          <p:cTn id="4" fill="hold">
-                            <p:stCondLst>
-                              <p:cond delay="0"/>
-                            </p:stCondLst>
-                            <p:childTnLst>
-                              <p:par>
-                                <p:cTn id="5" presetID="2" presetClass="entr" presetSubtype="4" fill="hold" grpId="0" nodeType="clickEffect">
-                                  <p:stCondLst>
-                                    <p:cond delay="0"/>
-                                  </p:stCondLst>
-                                  <p:childTnLst>
-                                    <p:set>
-                                      <p:cBhvr>
-                                        <p:cTn id="6" dur="1" fill="hold">
-                                          <p:stCondLst>
-                                            <p:cond delay="0"/>
-                                          </p:stCondLst>
-                                        </p:cTn>
-                                        <p:tgtEl>
-                                          <p:spTgt spid="3">
-                                            <p:txEl>
-                                              <p:pRg st="0" end="0"/>
-                                            </p:txEl>
-                                          </p:spTgt>
-                                        </p:tgtEl>
-                                        <p:attrNameLst>
-                                          <p:attrName>style.visibility</p:attrName>
-                                        </p:attrNameLst>
-                                      </p:cBhvr>
-                                      <p:to>
-                                        <p:strVal val="visible"/>
-                                      </p:to>
-                                    </p:set>
-                                    <p:anim calcmode="lin" valueType="num">
-                                      <p:cBhvr additive="base">
-                                        <p:cTn id="7" dur="1000" fill="hold"/>
-                                        <p:tgtEl>
-                                          <p:spTgt spid="3">
-                                            <p:txEl>
-                                              <p:pRg st="0" end="0"/>
-                                            </p:txEl>
-                                          </p:spTgt>
-                                        </p:tgtEl>
-                                        <p:attrNameLst>
-                                          <p:attrName>ppt_x</p:attrName>
-                                        </p:attrNameLst>
-                                      </p:cBhvr>
-                                      <p:tavLst>
-                                        <p:tav tm="0">
-                                          <p:val>
-                                            <p:strVal val="#ppt_x"/>
-                                          </p:val>
-                                        </p:tav>
-                                        <p:tav tm="100000">
-                                          <p:val>
-                                            <p:strVal val="#ppt_x"/>
-                                          </p:val>
-                                        </p:tav>
-                                      </p:tavLst>
-                                    </p:anim>
-                                    <p:anim calcmode="lin" valueType="num">
-                                      <p:cBhvr additive="base">
-                                        <p:cTn id="8" dur="1000" fill="hold"/>
-                                        <p:tgtEl>
-                                          <p:spTgt spid="3">
-                                            <p:txEl>
-                                              <p:pRg st="0" end="0"/>
-                                            </p:txEl>
-                                          </p:spTgt>
-                                        </p:tgtEl>
-                                        <p:attrNameLst>
-                                          <p:attrName>ppt_y</p:attrName>
-                                        </p:attrNameLst>
-                                      </p:cBhvr>
-                                      <p:tavLst>
-                                        <p:tav tm="0">
-                                          <p:val>
-                                            <p:strVal val="1+#ppt_h/2"/>
-                                          </p:val>
-                                        </p:tav>
-                                        <p:tav tm="100000">
-                                          <p:val>
-                                            <p:strVal val="#ppt_y"/>
-                                          </p:val>
-                                        </p:tav>
-                                      </p:tavLst>
-                                    </p:anim>
-                                  </p:childTnLst>
-                                </p:cTn>
-                              </p:par>
-                              <p:par>
-                                <p:cTn id="9" presetID="2" presetClass="entr" presetSubtype="4" fill="hold" nodeType="withEffect">
-                                  <p:stCondLst>
-                                    <p:cond delay="0"/>
-                                  </p:stCondLst>
-                                  <p:childTnLst>
-                                    <p:set>
-                                      <p:cBhvr>
-                                        <p:cTn id="10" dur="1" fill="hold">
-                                          <p:stCondLst>
-                                            <p:cond delay="0"/>
-                                          </p:stCondLst>
-                                        </p:cTn>
-                                        <p:tgtEl>
-                                          <p:spTgt spid="6"/>
-                                        </p:tgtEl>
-                                        <p:attrNameLst>
-                                          <p:attrName>style.visibility</p:attrName>
-                                        </p:attrNameLst>
-                                      </p:cBhvr>
-                                      <p:to>
-                                        <p:strVal val="visible"/>
-                                      </p:to>
-                                    </p:set>
-                                    <p:anim calcmode="lin" valueType="num">
-                                      <p:cBhvr additive="base">
-                                        <p:cTn id="11" dur="1000" fill="hold"/>
-                                        <p:tgtEl>
-                                          <p:spTgt spid="6"/>
-                                        </p:tgtEl>
-                                        <p:attrNameLst>
-                                          <p:attrName>ppt_x</p:attrName>
-                                        </p:attrNameLst>
-                                      </p:cBhvr>
-                                      <p:tavLst>
-                                        <p:tav tm="0">
-                                          <p:val>
-                                            <p:strVal val="#ppt_x"/>
-                                          </p:val>
-                                        </p:tav>
-                                        <p:tav tm="100000">
-                                          <p:val>
-                                            <p:strVal val="#ppt_x"/>
-                                          </p:val>
-                                        </p:tav>
-                                      </p:tavLst>
-                                    </p:anim>
-                                    <p:anim calcmode="lin" valueType="num">
-                                      <p:cBhvr additive="base">
-                                        <p:cTn id="12" dur="1000" fill="hold"/>
-                                        <p:tgtEl>
-                                          <p:spTgt spid="6"/>
-                                        </p:tgtEl>
-                                        <p:attrNameLst>
-                                          <p:attrName>ppt_y</p:attrName>
-                                        </p:attrNameLst>
-                                      </p:cBhvr>
-                                      <p:tavLst>
-                                        <p:tav tm="0">
-                                          <p:val>
-                                            <p:strVal val="1+#ppt_h/2"/>
-                                          </p:val>
-                                        </p:tav>
-                                        <p:tav tm="100000">
-                                          <p:val>
-                                            <p:strVal val="#ppt_y"/>
-                                          </p:val>
-                                        </p:tav>
-                                      </p:tavLst>
-                                    </p:anim>
-                                  </p:childTnLst>
-                                </p:cTn>
-                              </p:par>
-                            </p:childTnLst>
-                          </p:cTn>
-                        </p:par>
-                      </p:childTnLst>
-                    </p:cTn>
-                  </p:par>
-                </p:childTnLst>
-              </p:cTn>
-              <p:prevCondLst>
-                <p:cond evt="onPrev" delay="0">
-                  <p:tgtEl>
-                    <p:sldTgt/>
-                  </p:tgtEl>
-                </p:cond>
-              </p:prevCondLst>
-              <p:nextCondLst>
-                <p:cond evt="onNext" delay="0">
-                  <p:tgtEl>
-                    <p:sldTgt/>
-                  </p:tgtEl>
-                </p:cond>
-              </p:nextCondLst>
-            </p:seq>
-          </p:childTnLst>
-        </p:cTn>
-      </p:par>
-    </p:tnLst>
-    <p:bldLst>
-      <p:bldP spid="3" grpId="0" build="p"/>
-    </p:bldLst>
-  </p:timing>
 </p:sld>
 </file>
 
@@ -21011,318 +18607,6 @@
   <p:transition spd="slow">
     <p:cover/>
   </p:transition>
-  <p:timing>
-    <p:tnLst>
-      <p:par>
-        <p:cTn id="1" dur="indefinite" restart="never" nodeType="tmRoot">
-          <p:childTnLst>
-            <p:seq concurrent="1" nextAc="seek">
-              <p:cTn id="2" dur="indefinite" nodeType="mainSeq">
-                <p:childTnLst>
-                  <p:par>
-                    <p:cTn id="3" fill="hold">
-                      <p:stCondLst>
-                        <p:cond delay="indefinite"/>
-                      </p:stCondLst>
-                      <p:childTnLst>
-                        <p:par>
-                          <p:cTn id="4" fill="hold">
-                            <p:stCondLst>
-                              <p:cond delay="0"/>
-                            </p:stCondLst>
-                            <p:childTnLst>
-                              <p:par>
-                                <p:cTn id="5" presetID="2" presetClass="entr" presetSubtype="4" fill="hold" grpId="0" nodeType="clickEffect">
-                                  <p:stCondLst>
-                                    <p:cond delay="0"/>
-                                  </p:stCondLst>
-                                  <p:childTnLst>
-                                    <p:set>
-                                      <p:cBhvr>
-                                        <p:cTn id="6" dur="1" fill="hold">
-                                          <p:stCondLst>
-                                            <p:cond delay="0"/>
-                                          </p:stCondLst>
-                                        </p:cTn>
-                                        <p:tgtEl>
-                                          <p:spTgt spid="3">
-                                            <p:txEl>
-                                              <p:pRg st="0" end="0"/>
-                                            </p:txEl>
-                                          </p:spTgt>
-                                        </p:tgtEl>
-                                        <p:attrNameLst>
-                                          <p:attrName>style.visibility</p:attrName>
-                                        </p:attrNameLst>
-                                      </p:cBhvr>
-                                      <p:to>
-                                        <p:strVal val="visible"/>
-                                      </p:to>
-                                    </p:set>
-                                    <p:anim calcmode="lin" valueType="num">
-                                      <p:cBhvr additive="base">
-                                        <p:cTn id="7" dur="1000" fill="hold"/>
-                                        <p:tgtEl>
-                                          <p:spTgt spid="3">
-                                            <p:txEl>
-                                              <p:pRg st="0" end="0"/>
-                                            </p:txEl>
-                                          </p:spTgt>
-                                        </p:tgtEl>
-                                        <p:attrNameLst>
-                                          <p:attrName>ppt_x</p:attrName>
-                                        </p:attrNameLst>
-                                      </p:cBhvr>
-                                      <p:tavLst>
-                                        <p:tav tm="0">
-                                          <p:val>
-                                            <p:strVal val="#ppt_x"/>
-                                          </p:val>
-                                        </p:tav>
-                                        <p:tav tm="100000">
-                                          <p:val>
-                                            <p:strVal val="#ppt_x"/>
-                                          </p:val>
-                                        </p:tav>
-                                      </p:tavLst>
-                                    </p:anim>
-                                    <p:anim calcmode="lin" valueType="num">
-                                      <p:cBhvr additive="base">
-                                        <p:cTn id="8" dur="1000" fill="hold"/>
-                                        <p:tgtEl>
-                                          <p:spTgt spid="3">
-                                            <p:txEl>
-                                              <p:pRg st="0" end="0"/>
-                                            </p:txEl>
-                                          </p:spTgt>
-                                        </p:tgtEl>
-                                        <p:attrNameLst>
-                                          <p:attrName>ppt_y</p:attrName>
-                                        </p:attrNameLst>
-                                      </p:cBhvr>
-                                      <p:tavLst>
-                                        <p:tav tm="0">
-                                          <p:val>
-                                            <p:strVal val="1+#ppt_h/2"/>
-                                          </p:val>
-                                        </p:tav>
-                                        <p:tav tm="100000">
-                                          <p:val>
-                                            <p:strVal val="#ppt_y"/>
-                                          </p:val>
-                                        </p:tav>
-                                      </p:tavLst>
-                                    </p:anim>
-                                  </p:childTnLst>
-                                </p:cTn>
-                              </p:par>
-                            </p:childTnLst>
-                          </p:cTn>
-                        </p:par>
-                        <p:par>
-                          <p:cTn id="9" fill="hold">
-                            <p:stCondLst>
-                              <p:cond delay="1000"/>
-                            </p:stCondLst>
-                            <p:childTnLst>
-                              <p:par>
-                                <p:cTn id="10" presetID="2" presetClass="entr" presetSubtype="4" fill="hold" grpId="0" nodeType="afterEffect">
-                                  <p:stCondLst>
-                                    <p:cond delay="2000"/>
-                                  </p:stCondLst>
-                                  <p:childTnLst>
-                                    <p:set>
-                                      <p:cBhvr>
-                                        <p:cTn id="11" dur="1" fill="hold">
-                                          <p:stCondLst>
-                                            <p:cond delay="0"/>
-                                          </p:stCondLst>
-                                        </p:cTn>
-                                        <p:tgtEl>
-                                          <p:spTgt spid="3">
-                                            <p:txEl>
-                                              <p:pRg st="1" end="1"/>
-                                            </p:txEl>
-                                          </p:spTgt>
-                                        </p:tgtEl>
-                                        <p:attrNameLst>
-                                          <p:attrName>style.visibility</p:attrName>
-                                        </p:attrNameLst>
-                                      </p:cBhvr>
-                                      <p:to>
-                                        <p:strVal val="visible"/>
-                                      </p:to>
-                                    </p:set>
-                                    <p:anim calcmode="lin" valueType="num">
-                                      <p:cBhvr additive="base">
-                                        <p:cTn id="12" dur="1000" fill="hold"/>
-                                        <p:tgtEl>
-                                          <p:spTgt spid="3">
-                                            <p:txEl>
-                                              <p:pRg st="1" end="1"/>
-                                            </p:txEl>
-                                          </p:spTgt>
-                                        </p:tgtEl>
-                                        <p:attrNameLst>
-                                          <p:attrName>ppt_x</p:attrName>
-                                        </p:attrNameLst>
-                                      </p:cBhvr>
-                                      <p:tavLst>
-                                        <p:tav tm="0">
-                                          <p:val>
-                                            <p:strVal val="#ppt_x"/>
-                                          </p:val>
-                                        </p:tav>
-                                        <p:tav tm="100000">
-                                          <p:val>
-                                            <p:strVal val="#ppt_x"/>
-                                          </p:val>
-                                        </p:tav>
-                                      </p:tavLst>
-                                    </p:anim>
-                                    <p:anim calcmode="lin" valueType="num">
-                                      <p:cBhvr additive="base">
-                                        <p:cTn id="13" dur="1000" fill="hold"/>
-                                        <p:tgtEl>
-                                          <p:spTgt spid="3">
-                                            <p:txEl>
-                                              <p:pRg st="1" end="1"/>
-                                            </p:txEl>
-                                          </p:spTgt>
-                                        </p:tgtEl>
-                                        <p:attrNameLst>
-                                          <p:attrName>ppt_y</p:attrName>
-                                        </p:attrNameLst>
-                                      </p:cBhvr>
-                                      <p:tavLst>
-                                        <p:tav tm="0">
-                                          <p:val>
-                                            <p:strVal val="1+#ppt_h/2"/>
-                                          </p:val>
-                                        </p:tav>
-                                        <p:tav tm="100000">
-                                          <p:val>
-                                            <p:strVal val="#ppt_y"/>
-                                          </p:val>
-                                        </p:tav>
-                                      </p:tavLst>
-                                    </p:anim>
-                                  </p:childTnLst>
-                                </p:cTn>
-                              </p:par>
-                            </p:childTnLst>
-                          </p:cTn>
-                        </p:par>
-                        <p:par>
-                          <p:cTn id="14" fill="hold">
-                            <p:stCondLst>
-                              <p:cond delay="4000"/>
-                            </p:stCondLst>
-                            <p:childTnLst>
-                              <p:par>
-                                <p:cTn id="15" presetID="2" presetClass="entr" presetSubtype="4" fill="hold" nodeType="afterEffect">
-                                  <p:stCondLst>
-                                    <p:cond delay="0"/>
-                                  </p:stCondLst>
-                                  <p:childTnLst>
-                                    <p:set>
-                                      <p:cBhvr>
-                                        <p:cTn id="16" dur="1" fill="hold">
-                                          <p:stCondLst>
-                                            <p:cond delay="0"/>
-                                          </p:stCondLst>
-                                        </p:cTn>
-                                        <p:tgtEl>
-                                          <p:spTgt spid="5"/>
-                                        </p:tgtEl>
-                                        <p:attrNameLst>
-                                          <p:attrName>style.visibility</p:attrName>
-                                        </p:attrNameLst>
-                                      </p:cBhvr>
-                                      <p:to>
-                                        <p:strVal val="visible"/>
-                                      </p:to>
-                                    </p:set>
-                                    <p:anim calcmode="lin" valueType="num">
-                                      <p:cBhvr additive="base">
-                                        <p:cTn id="17" dur="1000" fill="hold"/>
-                                        <p:tgtEl>
-                                          <p:spTgt spid="5"/>
-                                        </p:tgtEl>
-                                        <p:attrNameLst>
-                                          <p:attrName>ppt_x</p:attrName>
-                                        </p:attrNameLst>
-                                      </p:cBhvr>
-                                      <p:tavLst>
-                                        <p:tav tm="0">
-                                          <p:val>
-                                            <p:strVal val="#ppt_x"/>
-                                          </p:val>
-                                        </p:tav>
-                                        <p:tav tm="100000">
-                                          <p:val>
-                                            <p:strVal val="#ppt_x"/>
-                                          </p:val>
-                                        </p:tav>
-                                      </p:tavLst>
-                                    </p:anim>
-                                    <p:anim calcmode="lin" valueType="num">
-                                      <p:cBhvr additive="base">
-                                        <p:cTn id="18" dur="1000" fill="hold"/>
-                                        <p:tgtEl>
-                                          <p:spTgt spid="5"/>
-                                        </p:tgtEl>
-                                        <p:attrNameLst>
-                                          <p:attrName>ppt_y</p:attrName>
-                                        </p:attrNameLst>
-                                      </p:cBhvr>
-                                      <p:tavLst>
-                                        <p:tav tm="0">
-                                          <p:val>
-                                            <p:strVal val="1+#ppt_h/2"/>
-                                          </p:val>
-                                        </p:tav>
-                                        <p:tav tm="100000">
-                                          <p:val>
-                                            <p:strVal val="#ppt_y"/>
-                                          </p:val>
-                                        </p:tav>
-                                      </p:tavLst>
-                                    </p:anim>
-                                  </p:childTnLst>
-                                </p:cTn>
-                              </p:par>
-                            </p:childTnLst>
-                          </p:cTn>
-                        </p:par>
-                      </p:childTnLst>
-                    </p:cTn>
-                  </p:par>
-                </p:childTnLst>
-              </p:cTn>
-              <p:prevCondLst>
-                <p:cond evt="onPrev" delay="0">
-                  <p:tgtEl>
-                    <p:sldTgt/>
-                  </p:tgtEl>
-                </p:cond>
-              </p:prevCondLst>
-              <p:nextCondLst>
-                <p:cond evt="onNext" delay="0">
-                  <p:tgtEl>
-                    <p:sldTgt/>
-                  </p:tgtEl>
-                </p:cond>
-              </p:nextCondLst>
-            </p:seq>
-          </p:childTnLst>
-        </p:cTn>
-      </p:par>
-    </p:tnLst>
-    <p:bldLst>
-      <p:bldP spid="3" grpId="0" build="p"/>
-    </p:bldLst>
-  </p:timing>
 </p:sld>
 </file>
 
